--- a/W3/2. W3S2 final/W3S2.pptx
+++ b/W3/2. W3S2 final/W3S2.pptx
@@ -236,2315 +236,103 @@
 </p:presentation>
 </file>
 
+<file path=ppt/revisionInfo.xml><?xml version="1.0" encoding="utf-8"?>
+<p1510:revInfo xmlns:a="http://schemas.openxmlformats.org/drawingml/2006/main" xmlns:r="http://schemas.openxmlformats.org/officeDocument/2006/relationships" xmlns:p1510="http://schemas.microsoft.com/office/powerpoint/2015/10/main">
+  <p1510:revLst>
+    <p1510:client id="{C7561F6F-100F-4C53-BF2E-4E1318C410DF}" v="3" dt="2025-12-18T22:25:14.215"/>
+  </p1510:revLst>
+</p1510:revInfo>
+</file>
+
 <file path=ppt/changesInfos/changesInfo1.xml><?xml version="1.0" encoding="utf-8"?>
 <pc:chgInfo xmlns:a="http://schemas.openxmlformats.org/drawingml/2006/main" xmlns:r="http://schemas.openxmlformats.org/officeDocument/2006/relationships" xmlns:ac="http://schemas.microsoft.com/office/drawing/2013/main/command" xmlns:pc="http://schemas.microsoft.com/office/powerpoint/2013/main/command">
   <pc:docChgLst>
-    <pc:chgData name="Matthieu De Mari" userId="dfb708c9-d8dc-439f-9a3b-c772bf4a311c" providerId="ADAL" clId="{3C5169EE-A97A-435D-9C7E-3653962501C6}"/>
-    <pc:docChg chg="custSel addSld modSld sldOrd addSection modSection">
-      <pc:chgData name="Matthieu De Mari" userId="dfb708c9-d8dc-439f-9a3b-c772bf4a311c" providerId="ADAL" clId="{3C5169EE-A97A-435D-9C7E-3653962501C6}" dt="2024-02-07T02:59:22.033" v="1066" actId="207"/>
+    <pc:chgData name="Matthieu De Mari" userId="dfb708c9-d8dc-439f-9a3b-c772bf4a311c" providerId="ADAL" clId="{81E9B007-0C2C-493E-9B93-55A62C9C1F12}"/>
+    <pc:docChg chg="custSel modSld">
+      <pc:chgData name="Matthieu De Mari" userId="dfb708c9-d8dc-439f-9a3b-c772bf4a311c" providerId="ADAL" clId="{81E9B007-0C2C-493E-9B93-55A62C9C1F12}" dt="2025-12-18T22:26:26.279" v="83" actId="14100"/>
       <pc:docMkLst>
         <pc:docMk/>
       </pc:docMkLst>
       <pc:sldChg chg="modSp mod">
-        <pc:chgData name="Matthieu De Mari" userId="dfb708c9-d8dc-439f-9a3b-c772bf4a311c" providerId="ADAL" clId="{3C5169EE-A97A-435D-9C7E-3653962501C6}" dt="2024-01-21T10:09:58.088" v="59" actId="20577"/>
+        <pc:chgData name="Matthieu De Mari" userId="dfb708c9-d8dc-439f-9a3b-c772bf4a311c" providerId="ADAL" clId="{81E9B007-0C2C-493E-9B93-55A62C9C1F12}" dt="2025-12-18T22:21:39.978" v="26" actId="20577"/>
         <pc:sldMkLst>
           <pc:docMk/>
-          <pc:sldMk cId="2128707751" sldId="390"/>
+          <pc:sldMk cId="2474697269" sldId="387"/>
         </pc:sldMkLst>
+        <pc:spChg chg="mod">
+          <ac:chgData name="Matthieu De Mari" userId="dfb708c9-d8dc-439f-9a3b-c772bf4a311c" providerId="ADAL" clId="{81E9B007-0C2C-493E-9B93-55A62C9C1F12}" dt="2025-12-18T22:21:39.978" v="26" actId="20577"/>
+          <ac:spMkLst>
+            <pc:docMk/>
+            <pc:sldMk cId="2474697269" sldId="387"/>
+            <ac:spMk id="3" creationId="{C7732CA9-163D-B4B0-71B2-AEA1EC81E0E6}"/>
+          </ac:spMkLst>
+        </pc:spChg>
       </pc:sldChg>
-      <pc:sldChg chg="modSp">
-        <pc:chgData name="Matthieu De Mari" userId="dfb708c9-d8dc-439f-9a3b-c772bf4a311c" providerId="ADAL" clId="{3C5169EE-A97A-435D-9C7E-3653962501C6}" dt="2024-02-07T02:53:35.472" v="520" actId="20577"/>
+      <pc:sldChg chg="modSp mod">
+        <pc:chgData name="Matthieu De Mari" userId="dfb708c9-d8dc-439f-9a3b-c772bf4a311c" providerId="ADAL" clId="{81E9B007-0C2C-493E-9B93-55A62C9C1F12}" dt="2025-12-18T22:22:14.441" v="42" actId="20577"/>
         <pc:sldMkLst>
           <pc:docMk/>
           <pc:sldMk cId="1546007078" sldId="762"/>
         </pc:sldMkLst>
+        <pc:spChg chg="mod">
+          <ac:chgData name="Matthieu De Mari" userId="dfb708c9-d8dc-439f-9a3b-c772bf4a311c" providerId="ADAL" clId="{81E9B007-0C2C-493E-9B93-55A62C9C1F12}" dt="2025-12-18T22:22:14.441" v="42" actId="20577"/>
+          <ac:spMkLst>
+            <pc:docMk/>
+            <pc:sldMk cId="1546007078" sldId="762"/>
+            <ac:spMk id="11" creationId="{0EEC07FE-D839-07DF-7C1A-CDBE72FE6BB9}"/>
+          </ac:spMkLst>
+        </pc:spChg>
       </pc:sldChg>
       <pc:sldChg chg="modSp mod">
-        <pc:chgData name="Matthieu De Mari" userId="dfb708c9-d8dc-439f-9a3b-c772bf4a311c" providerId="ADAL" clId="{3C5169EE-A97A-435D-9C7E-3653962501C6}" dt="2024-01-21T10:07:13.728" v="0" actId="20577"/>
+        <pc:chgData name="Matthieu De Mari" userId="dfb708c9-d8dc-439f-9a3b-c772bf4a311c" providerId="ADAL" clId="{81E9B007-0C2C-493E-9B93-55A62C9C1F12}" dt="2025-12-18T22:23:03.026" v="56" actId="20577"/>
         <pc:sldMkLst>
           <pc:docMk/>
           <pc:sldMk cId="2580175991" sldId="763"/>
         </pc:sldMkLst>
-      </pc:sldChg>
-      <pc:sldChg chg="modSp mod ord">
-        <pc:chgData name="Matthieu De Mari" userId="dfb708c9-d8dc-439f-9a3b-c772bf4a311c" providerId="ADAL" clId="{3C5169EE-A97A-435D-9C7E-3653962501C6}" dt="2024-02-07T02:54:43.303" v="539" actId="20578"/>
-        <pc:sldMkLst>
-          <pc:docMk/>
-          <pc:sldMk cId="1879463264" sldId="764"/>
-        </pc:sldMkLst>
+        <pc:spChg chg="mod">
+          <ac:chgData name="Matthieu De Mari" userId="dfb708c9-d8dc-439f-9a3b-c772bf4a311c" providerId="ADAL" clId="{81E9B007-0C2C-493E-9B93-55A62C9C1F12}" dt="2025-12-18T22:23:03.026" v="56" actId="20577"/>
+          <ac:spMkLst>
+            <pc:docMk/>
+            <pc:sldMk cId="2580175991" sldId="763"/>
+            <ac:spMk id="5" creationId="{1A87BA25-5926-816A-6E16-0F90D4B62FB8}"/>
+          </ac:spMkLst>
+        </pc:spChg>
       </pc:sldChg>
       <pc:sldChg chg="modSp mod">
-        <pc:chgData name="Matthieu De Mari" userId="dfb708c9-d8dc-439f-9a3b-c772bf4a311c" providerId="ADAL" clId="{3C5169EE-A97A-435D-9C7E-3653962501C6}" dt="2024-02-02T09:10:42.651" v="99" actId="20577"/>
-        <pc:sldMkLst>
-          <pc:docMk/>
-          <pc:sldMk cId="2909899754" sldId="769"/>
-        </pc:sldMkLst>
-      </pc:sldChg>
-      <pc:sldChg chg="modSp mod">
-        <pc:chgData name="Matthieu De Mari" userId="dfb708c9-d8dc-439f-9a3b-c772bf4a311c" providerId="ADAL" clId="{3C5169EE-A97A-435D-9C7E-3653962501C6}" dt="2024-01-21T10:10:04.734" v="60"/>
-        <pc:sldMkLst>
-          <pc:docMk/>
-          <pc:sldMk cId="581091786" sldId="770"/>
-        </pc:sldMkLst>
-      </pc:sldChg>
-      <pc:sldChg chg="modSp mod">
-        <pc:chgData name="Matthieu De Mari" userId="dfb708c9-d8dc-439f-9a3b-c772bf4a311c" providerId="ADAL" clId="{3C5169EE-A97A-435D-9C7E-3653962501C6}" dt="2024-01-21T10:10:07.404" v="61"/>
-        <pc:sldMkLst>
-          <pc:docMk/>
-          <pc:sldMk cId="2768410648" sldId="771"/>
-        </pc:sldMkLst>
-      </pc:sldChg>
-      <pc:sldChg chg="modSp mod">
-        <pc:chgData name="Matthieu De Mari" userId="dfb708c9-d8dc-439f-9a3b-c772bf4a311c" providerId="ADAL" clId="{3C5169EE-A97A-435D-9C7E-3653962501C6}" dt="2024-01-21T10:11:42.482" v="82" actId="20577"/>
+        <pc:chgData name="Matthieu De Mari" userId="dfb708c9-d8dc-439f-9a3b-c772bf4a311c" providerId="ADAL" clId="{81E9B007-0C2C-493E-9B93-55A62C9C1F12}" dt="2025-12-18T22:25:14.215" v="80"/>
         <pc:sldMkLst>
           <pc:docMk/>
           <pc:sldMk cId="743119883" sldId="775"/>
         </pc:sldMkLst>
+        <pc:spChg chg="mod">
+          <ac:chgData name="Matthieu De Mari" userId="dfb708c9-d8dc-439f-9a3b-c772bf4a311c" providerId="ADAL" clId="{81E9B007-0C2C-493E-9B93-55A62C9C1F12}" dt="2025-12-18T22:25:14.215" v="80"/>
+          <ac:spMkLst>
+            <pc:docMk/>
+            <pc:sldMk cId="743119883" sldId="775"/>
+            <ac:spMk id="3" creationId="{EDC87932-752D-FABC-76EF-38023409D8D8}"/>
+          </ac:spMkLst>
+        </pc:spChg>
       </pc:sldChg>
       <pc:sldChg chg="modSp mod">
-        <pc:chgData name="Matthieu De Mari" userId="dfb708c9-d8dc-439f-9a3b-c772bf4a311c" providerId="ADAL" clId="{3C5169EE-A97A-435D-9C7E-3653962501C6}" dt="2024-01-21T10:12:20.983" v="89" actId="27636"/>
-        <pc:sldMkLst>
-          <pc:docMk/>
-          <pc:sldMk cId="3349972987" sldId="777"/>
-        </pc:sldMkLst>
-      </pc:sldChg>
-      <pc:sldChg chg="modSp mod">
-        <pc:chgData name="Matthieu De Mari" userId="dfb708c9-d8dc-439f-9a3b-c772bf4a311c" providerId="ADAL" clId="{3C5169EE-A97A-435D-9C7E-3653962501C6}" dt="2024-01-21T10:12:49.414" v="91" actId="20577"/>
-        <pc:sldMkLst>
-          <pc:docMk/>
-          <pc:sldMk cId="4008937125" sldId="778"/>
-        </pc:sldMkLst>
-      </pc:sldChg>
-      <pc:sldChg chg="modSp mod">
-        <pc:chgData name="Matthieu De Mari" userId="dfb708c9-d8dc-439f-9a3b-c772bf4a311c" providerId="ADAL" clId="{3C5169EE-A97A-435D-9C7E-3653962501C6}" dt="2024-02-02T09:11:33.303" v="102" actId="5793"/>
+        <pc:chgData name="Matthieu De Mari" userId="dfb708c9-d8dc-439f-9a3b-c772bf4a311c" providerId="ADAL" clId="{81E9B007-0C2C-493E-9B93-55A62C9C1F12}" dt="2025-12-18T22:26:26.279" v="83" actId="14100"/>
         <pc:sldMkLst>
           <pc:docMk/>
           <pc:sldMk cId="2678238830" sldId="780"/>
         </pc:sldMkLst>
-      </pc:sldChg>
-      <pc:sldChg chg="addSp delSp mod">
-        <pc:chgData name="Matthieu De Mari" userId="dfb708c9-d8dc-439f-9a3b-c772bf4a311c" providerId="ADAL" clId="{3C5169EE-A97A-435D-9C7E-3653962501C6}" dt="2024-02-06T09:37:33.579" v="519" actId="22"/>
-        <pc:sldMkLst>
-          <pc:docMk/>
-          <pc:sldMk cId="3029045816" sldId="781"/>
-        </pc:sldMkLst>
-      </pc:sldChg>
-      <pc:sldChg chg="modSp mod">
-        <pc:chgData name="Matthieu De Mari" userId="dfb708c9-d8dc-439f-9a3b-c772bf4a311c" providerId="ADAL" clId="{3C5169EE-A97A-435D-9C7E-3653962501C6}" dt="2024-02-07T02:59:22.033" v="1066" actId="207"/>
-        <pc:sldMkLst>
-          <pc:docMk/>
-          <pc:sldMk cId="639852900" sldId="783"/>
-        </pc:sldMkLst>
-      </pc:sldChg>
-      <pc:sldChg chg="addSp delSp modSp new mod modClrScheme chgLayout">
-        <pc:chgData name="Matthieu De Mari" userId="dfb708c9-d8dc-439f-9a3b-c772bf4a311c" providerId="ADAL" clId="{3C5169EE-A97A-435D-9C7E-3653962501C6}" dt="2024-02-07T02:58:48.139" v="1065" actId="12"/>
-        <pc:sldMkLst>
-          <pc:docMk/>
-          <pc:sldMk cId="2116083586" sldId="786"/>
-        </pc:sldMkLst>
-      </pc:sldChg>
-      <pc:sldChg chg="modSp add mod">
-        <pc:chgData name="Matthieu De Mari" userId="dfb708c9-d8dc-439f-9a3b-c772bf4a311c" providerId="ADAL" clId="{3C5169EE-A97A-435D-9C7E-3653962501C6}" dt="2024-02-07T02:57:41.537" v="971" actId="113"/>
-        <pc:sldMkLst>
-          <pc:docMk/>
-          <pc:sldMk cId="1002846102" sldId="787"/>
-        </pc:sldMkLst>
-      </pc:sldChg>
-    </pc:docChg>
-  </pc:docChgLst>
-  <pc:docChgLst>
-    <pc:chgData name="Matthieu De Mari" userId="dfb708c9-d8dc-439f-9a3b-c772bf4a311c" providerId="ADAL" clId="{D2FDBEB2-E663-41FC-8A3C-AC79657DF6AB}"/>
-    <pc:docChg chg="undo custSel addSld delSld modSld sldOrd addSection delSection modSection">
-      <pc:chgData name="Matthieu De Mari" userId="dfb708c9-d8dc-439f-9a3b-c772bf4a311c" providerId="ADAL" clId="{D2FDBEB2-E663-41FC-8A3C-AC79657DF6AB}" dt="2023-02-03T09:13:37.539" v="8349" actId="22"/>
-      <pc:docMkLst>
-        <pc:docMk/>
-      </pc:docMkLst>
-      <pc:sldChg chg="modSp mod">
-        <pc:chgData name="Matthieu De Mari" userId="dfb708c9-d8dc-439f-9a3b-c772bf4a311c" providerId="ADAL" clId="{D2FDBEB2-E663-41FC-8A3C-AC79657DF6AB}" dt="2023-01-31T09:38:27.909" v="1" actId="20577"/>
-        <pc:sldMkLst>
-          <pc:docMk/>
-          <pc:sldMk cId="3442501962" sldId="257"/>
-        </pc:sldMkLst>
-      </pc:sldChg>
-      <pc:sldChg chg="modSp mod">
-        <pc:chgData name="Matthieu De Mari" userId="dfb708c9-d8dc-439f-9a3b-c772bf4a311c" providerId="ADAL" clId="{D2FDBEB2-E663-41FC-8A3C-AC79657DF6AB}" dt="2023-01-31T09:38:33.645" v="7" actId="20577"/>
-        <pc:sldMkLst>
-          <pc:docMk/>
-          <pc:sldMk cId="1036081419" sldId="346"/>
-        </pc:sldMkLst>
-      </pc:sldChg>
-      <pc:sldChg chg="modSp mod">
-        <pc:chgData name="Matthieu De Mari" userId="dfb708c9-d8dc-439f-9a3b-c772bf4a311c" providerId="ADAL" clId="{D2FDBEB2-E663-41FC-8A3C-AC79657DF6AB}" dt="2023-01-31T09:39:03.009" v="70" actId="20577"/>
-        <pc:sldMkLst>
-          <pc:docMk/>
-          <pc:sldMk cId="1040156172" sldId="377"/>
-        </pc:sldMkLst>
-      </pc:sldChg>
-      <pc:sldChg chg="addSp delSp modSp new mod modClrScheme chgLayout">
-        <pc:chgData name="Matthieu De Mari" userId="dfb708c9-d8dc-439f-9a3b-c772bf4a311c" providerId="ADAL" clId="{D2FDBEB2-E663-41FC-8A3C-AC79657DF6AB}" dt="2023-02-03T06:08:42.324" v="707" actId="20577"/>
-        <pc:sldMkLst>
-          <pc:docMk/>
-          <pc:sldMk cId="380766058" sldId="378"/>
-        </pc:sldMkLst>
-      </pc:sldChg>
-      <pc:sldChg chg="addSp delSp modSp new mod modClrScheme chgLayout">
-        <pc:chgData name="Matthieu De Mari" userId="dfb708c9-d8dc-439f-9a3b-c772bf4a311c" providerId="ADAL" clId="{D2FDBEB2-E663-41FC-8A3C-AC79657DF6AB}" dt="2023-02-03T06:12:18.186" v="801" actId="1076"/>
-        <pc:sldMkLst>
-          <pc:docMk/>
-          <pc:sldMk cId="1970187575" sldId="379"/>
-        </pc:sldMkLst>
-      </pc:sldChg>
-      <pc:sldChg chg="addSp delSp modSp new mod modClrScheme chgLayout">
-        <pc:chgData name="Matthieu De Mari" userId="dfb708c9-d8dc-439f-9a3b-c772bf4a311c" providerId="ADAL" clId="{D2FDBEB2-E663-41FC-8A3C-AC79657DF6AB}" dt="2023-02-03T06:39:40.751" v="2139" actId="207"/>
-        <pc:sldMkLst>
-          <pc:docMk/>
-          <pc:sldMk cId="2100436947" sldId="380"/>
-        </pc:sldMkLst>
-      </pc:sldChg>
-      <pc:sldChg chg="addSp modSp new mod modClrScheme chgLayout">
-        <pc:chgData name="Matthieu De Mari" userId="dfb708c9-d8dc-439f-9a3b-c772bf4a311c" providerId="ADAL" clId="{D2FDBEB2-E663-41FC-8A3C-AC79657DF6AB}" dt="2023-02-03T06:43:16.501" v="2260" actId="20577"/>
-        <pc:sldMkLst>
-          <pc:docMk/>
-          <pc:sldMk cId="3251402422" sldId="381"/>
-        </pc:sldMkLst>
-      </pc:sldChg>
-      <pc:sldChg chg="addSp delSp modSp new mod modClrScheme chgLayout">
-        <pc:chgData name="Matthieu De Mari" userId="dfb708c9-d8dc-439f-9a3b-c772bf4a311c" providerId="ADAL" clId="{D2FDBEB2-E663-41FC-8A3C-AC79657DF6AB}" dt="2023-02-03T06:48:14.770" v="2345" actId="14100"/>
-        <pc:sldMkLst>
-          <pc:docMk/>
-          <pc:sldMk cId="1017635827" sldId="382"/>
-        </pc:sldMkLst>
-      </pc:sldChg>
-      <pc:sldChg chg="modSp new mod">
-        <pc:chgData name="Matthieu De Mari" userId="dfb708c9-d8dc-439f-9a3b-c772bf4a311c" providerId="ADAL" clId="{D2FDBEB2-E663-41FC-8A3C-AC79657DF6AB}" dt="2023-02-03T07:03:32.616" v="2650" actId="20577"/>
-        <pc:sldMkLst>
-          <pc:docMk/>
-          <pc:sldMk cId="1921397945" sldId="383"/>
-        </pc:sldMkLst>
-      </pc:sldChg>
-      <pc:sldChg chg="addSp delSp modSp new mod modClrScheme chgLayout">
-        <pc:chgData name="Matthieu De Mari" userId="dfb708c9-d8dc-439f-9a3b-c772bf4a311c" providerId="ADAL" clId="{D2FDBEB2-E663-41FC-8A3C-AC79657DF6AB}" dt="2023-02-03T08:27:26.197" v="6114" actId="20577"/>
-        <pc:sldMkLst>
-          <pc:docMk/>
-          <pc:sldMk cId="1420298135" sldId="384"/>
-        </pc:sldMkLst>
-      </pc:sldChg>
-      <pc:sldChg chg="addSp modSp new mod">
-        <pc:chgData name="Matthieu De Mari" userId="dfb708c9-d8dc-439f-9a3b-c772bf4a311c" providerId="ADAL" clId="{D2FDBEB2-E663-41FC-8A3C-AC79657DF6AB}" dt="2023-02-03T08:27:48.202" v="6121" actId="20577"/>
-        <pc:sldMkLst>
-          <pc:docMk/>
-          <pc:sldMk cId="2560511070" sldId="385"/>
-        </pc:sldMkLst>
-      </pc:sldChg>
-      <pc:sldChg chg="addSp delSp modSp new mod modClrScheme chgLayout">
-        <pc:chgData name="Matthieu De Mari" userId="dfb708c9-d8dc-439f-9a3b-c772bf4a311c" providerId="ADAL" clId="{D2FDBEB2-E663-41FC-8A3C-AC79657DF6AB}" dt="2023-02-03T07:24:21.886" v="3777" actId="20577"/>
-        <pc:sldMkLst>
-          <pc:docMk/>
-          <pc:sldMk cId="1116470923" sldId="386"/>
-        </pc:sldMkLst>
-      </pc:sldChg>
-      <pc:sldChg chg="modSp new mod">
-        <pc:chgData name="Matthieu De Mari" userId="dfb708c9-d8dc-439f-9a3b-c772bf4a311c" providerId="ADAL" clId="{D2FDBEB2-E663-41FC-8A3C-AC79657DF6AB}" dt="2023-02-03T07:51:47.934" v="3926" actId="20577"/>
-        <pc:sldMkLst>
-          <pc:docMk/>
-          <pc:sldMk cId="2474697269" sldId="387"/>
-        </pc:sldMkLst>
-      </pc:sldChg>
-      <pc:sldChg chg="modSp new mod">
-        <pc:chgData name="Matthieu De Mari" userId="dfb708c9-d8dc-439f-9a3b-c772bf4a311c" providerId="ADAL" clId="{D2FDBEB2-E663-41FC-8A3C-AC79657DF6AB}" dt="2023-02-03T08:05:19.527" v="4929" actId="113"/>
-        <pc:sldMkLst>
-          <pc:docMk/>
-          <pc:sldMk cId="4198773114" sldId="388"/>
-        </pc:sldMkLst>
-      </pc:sldChg>
-      <pc:sldChg chg="modSp new mod">
-        <pc:chgData name="Matthieu De Mari" userId="dfb708c9-d8dc-439f-9a3b-c772bf4a311c" providerId="ADAL" clId="{D2FDBEB2-E663-41FC-8A3C-AC79657DF6AB}" dt="2023-02-03T08:15:34.322" v="5775" actId="20577"/>
-        <pc:sldMkLst>
-          <pc:docMk/>
-          <pc:sldMk cId="481628505" sldId="389"/>
-        </pc:sldMkLst>
-      </pc:sldChg>
-      <pc:sldChg chg="addSp delSp modSp new mod">
-        <pc:chgData name="Matthieu De Mari" userId="dfb708c9-d8dc-439f-9a3b-c772bf4a311c" providerId="ADAL" clId="{D2FDBEB2-E663-41FC-8A3C-AC79657DF6AB}" dt="2023-02-03T08:16:23.090" v="5808" actId="1076"/>
-        <pc:sldMkLst>
-          <pc:docMk/>
-          <pc:sldMk cId="2128707751" sldId="390"/>
-        </pc:sldMkLst>
-      </pc:sldChg>
-      <pc:sldChg chg="addSp delSp modSp new mod modClrScheme chgLayout">
-        <pc:chgData name="Matthieu De Mari" userId="dfb708c9-d8dc-439f-9a3b-c772bf4a311c" providerId="ADAL" clId="{D2FDBEB2-E663-41FC-8A3C-AC79657DF6AB}" dt="2023-02-03T08:36:24.788" v="6692" actId="20577"/>
-        <pc:sldMkLst>
-          <pc:docMk/>
-          <pc:sldMk cId="1283478655" sldId="391"/>
-        </pc:sldMkLst>
-      </pc:sldChg>
-      <pc:sldChg chg="addSp delSp new mod ord">
-        <pc:chgData name="Matthieu De Mari" userId="dfb708c9-d8dc-439f-9a3b-c772bf4a311c" providerId="ADAL" clId="{D2FDBEB2-E663-41FC-8A3C-AC79657DF6AB}" dt="2023-02-03T08:51:08.222" v="7382"/>
-        <pc:sldMkLst>
-          <pc:docMk/>
-          <pc:sldMk cId="1341638402" sldId="392"/>
-        </pc:sldMkLst>
-      </pc:sldChg>
-      <pc:sldChg chg="new del">
-        <pc:chgData name="Matthieu De Mari" userId="dfb708c9-d8dc-439f-9a3b-c772bf4a311c" providerId="ADAL" clId="{D2FDBEB2-E663-41FC-8A3C-AC79657DF6AB}" dt="2023-02-03T08:51:09.735" v="7383" actId="47"/>
-        <pc:sldMkLst>
-          <pc:docMk/>
-          <pc:sldMk cId="949620911" sldId="393"/>
-        </pc:sldMkLst>
-      </pc:sldChg>
-      <pc:sldChg chg="addSp delSp modSp new mod modClrScheme chgLayout">
-        <pc:chgData name="Matthieu De Mari" userId="dfb708c9-d8dc-439f-9a3b-c772bf4a311c" providerId="ADAL" clId="{D2FDBEB2-E663-41FC-8A3C-AC79657DF6AB}" dt="2023-02-03T08:53:43.343" v="7567" actId="14100"/>
-        <pc:sldMkLst>
-          <pc:docMk/>
-          <pc:sldMk cId="164097668" sldId="394"/>
-        </pc:sldMkLst>
-      </pc:sldChg>
-      <pc:sldChg chg="addSp delSp modSp new mod modClrScheme chgLayout">
-        <pc:chgData name="Matthieu De Mari" userId="dfb708c9-d8dc-439f-9a3b-c772bf4a311c" providerId="ADAL" clId="{D2FDBEB2-E663-41FC-8A3C-AC79657DF6AB}" dt="2023-02-03T09:08:43.040" v="8236" actId="14100"/>
-        <pc:sldMkLst>
-          <pc:docMk/>
-          <pc:sldMk cId="3048177291" sldId="395"/>
-        </pc:sldMkLst>
-      </pc:sldChg>
-      <pc:sldChg chg="new">
-        <pc:chgData name="Matthieu De Mari" userId="dfb708c9-d8dc-439f-9a3b-c772bf4a311c" providerId="ADAL" clId="{D2FDBEB2-E663-41FC-8A3C-AC79657DF6AB}" dt="2023-02-03T02:58:04.050" v="175" actId="680"/>
-        <pc:sldMkLst>
-          <pc:docMk/>
-          <pc:sldMk cId="1458730680" sldId="396"/>
-        </pc:sldMkLst>
-      </pc:sldChg>
-      <pc:sldChg chg="new">
-        <pc:chgData name="Matthieu De Mari" userId="dfb708c9-d8dc-439f-9a3b-c772bf4a311c" providerId="ADAL" clId="{D2FDBEB2-E663-41FC-8A3C-AC79657DF6AB}" dt="2023-02-03T02:58:18.676" v="178" actId="680"/>
-        <pc:sldMkLst>
-          <pc:docMk/>
-          <pc:sldMk cId="1451434589" sldId="397"/>
-        </pc:sldMkLst>
-      </pc:sldChg>
-      <pc:sldChg chg="new">
-        <pc:chgData name="Matthieu De Mari" userId="dfb708c9-d8dc-439f-9a3b-c772bf4a311c" providerId="ADAL" clId="{D2FDBEB2-E663-41FC-8A3C-AC79657DF6AB}" dt="2023-02-03T02:58:36.414" v="181" actId="680"/>
-        <pc:sldMkLst>
-          <pc:docMk/>
-          <pc:sldMk cId="2867637474" sldId="398"/>
-        </pc:sldMkLst>
-      </pc:sldChg>
-      <pc:sldChg chg="modSp new mod">
-        <pc:chgData name="Matthieu De Mari" userId="dfb708c9-d8dc-439f-9a3b-c772bf4a311c" providerId="ADAL" clId="{D2FDBEB2-E663-41FC-8A3C-AC79657DF6AB}" dt="2023-02-03T02:59:22.033" v="235" actId="20577"/>
-        <pc:sldMkLst>
-          <pc:docMk/>
-          <pc:sldMk cId="122423608" sldId="399"/>
-        </pc:sldMkLst>
-      </pc:sldChg>
-      <pc:sldChg chg="new">
-        <pc:chgData name="Matthieu De Mari" userId="dfb708c9-d8dc-439f-9a3b-c772bf4a311c" providerId="ADAL" clId="{D2FDBEB2-E663-41FC-8A3C-AC79657DF6AB}" dt="2023-02-03T02:59:37.988" v="238" actId="680"/>
-        <pc:sldMkLst>
-          <pc:docMk/>
-          <pc:sldMk cId="2642959288" sldId="400"/>
-        </pc:sldMkLst>
-      </pc:sldChg>
-      <pc:sldChg chg="new">
-        <pc:chgData name="Matthieu De Mari" userId="dfb708c9-d8dc-439f-9a3b-c772bf4a311c" providerId="ADAL" clId="{D2FDBEB2-E663-41FC-8A3C-AC79657DF6AB}" dt="2023-02-03T03:00:18.961" v="243" actId="680"/>
-        <pc:sldMkLst>
-          <pc:docMk/>
-          <pc:sldMk cId="4039171501" sldId="401"/>
-        </pc:sldMkLst>
-      </pc:sldChg>
-      <pc:sldChg chg="new">
-        <pc:chgData name="Matthieu De Mari" userId="dfb708c9-d8dc-439f-9a3b-c772bf4a311c" providerId="ADAL" clId="{D2FDBEB2-E663-41FC-8A3C-AC79657DF6AB}" dt="2023-02-03T03:00:44.919" v="246" actId="680"/>
-        <pc:sldMkLst>
-          <pc:docMk/>
-          <pc:sldMk cId="3163596145" sldId="402"/>
-        </pc:sldMkLst>
-      </pc:sldChg>
-      <pc:sldChg chg="new">
-        <pc:chgData name="Matthieu De Mari" userId="dfb708c9-d8dc-439f-9a3b-c772bf4a311c" providerId="ADAL" clId="{D2FDBEB2-E663-41FC-8A3C-AC79657DF6AB}" dt="2023-02-03T03:01:15.486" v="251" actId="680"/>
-        <pc:sldMkLst>
-          <pc:docMk/>
-          <pc:sldMk cId="101927766" sldId="403"/>
-        </pc:sldMkLst>
-      </pc:sldChg>
-      <pc:sldChg chg="modSp new mod">
-        <pc:chgData name="Matthieu De Mari" userId="dfb708c9-d8dc-439f-9a3b-c772bf4a311c" providerId="ADAL" clId="{D2FDBEB2-E663-41FC-8A3C-AC79657DF6AB}" dt="2023-02-03T06:54:09.367" v="2541" actId="20577"/>
-        <pc:sldMkLst>
-          <pc:docMk/>
-          <pc:sldMk cId="3140288791" sldId="404"/>
-        </pc:sldMkLst>
-      </pc:sldChg>
-      <pc:sldChg chg="add">
-        <pc:chgData name="Matthieu De Mari" userId="dfb708c9-d8dc-439f-9a3b-c772bf4a311c" providerId="ADAL" clId="{D2FDBEB2-E663-41FC-8A3C-AC79657DF6AB}" dt="2023-02-03T06:03:02.893" v="259"/>
-        <pc:sldMkLst>
-          <pc:docMk/>
-          <pc:sldMk cId="3843402283" sldId="405"/>
-        </pc:sldMkLst>
-      </pc:sldChg>
-      <pc:sldChg chg="addSp delSp modSp add mod ord modClrScheme chgLayout">
-        <pc:chgData name="Matthieu De Mari" userId="dfb708c9-d8dc-439f-9a3b-c772bf4a311c" providerId="ADAL" clId="{D2FDBEB2-E663-41FC-8A3C-AC79657DF6AB}" dt="2023-02-03T06:09:42.334" v="720" actId="1076"/>
-        <pc:sldMkLst>
-          <pc:docMk/>
-          <pc:sldMk cId="3358927626" sldId="406"/>
-        </pc:sldMkLst>
-      </pc:sldChg>
-      <pc:sldChg chg="addSp delSp modSp new mod">
-        <pc:chgData name="Matthieu De Mari" userId="dfb708c9-d8dc-439f-9a3b-c772bf4a311c" providerId="ADAL" clId="{D2FDBEB2-E663-41FC-8A3C-AC79657DF6AB}" dt="2023-02-03T06:15:37.685" v="1099" actId="12"/>
-        <pc:sldMkLst>
-          <pc:docMk/>
-          <pc:sldMk cId="1925028509" sldId="407"/>
-        </pc:sldMkLst>
-      </pc:sldChg>
-      <pc:sldChg chg="addSp delSp modSp new mod">
-        <pc:chgData name="Matthieu De Mari" userId="dfb708c9-d8dc-439f-9a3b-c772bf4a311c" providerId="ADAL" clId="{D2FDBEB2-E663-41FC-8A3C-AC79657DF6AB}" dt="2023-02-03T06:27:00.107" v="1534" actId="20577"/>
-        <pc:sldMkLst>
-          <pc:docMk/>
-          <pc:sldMk cId="3458396453" sldId="408"/>
-        </pc:sldMkLst>
-      </pc:sldChg>
-      <pc:sldChg chg="modSp add mod">
-        <pc:chgData name="Matthieu De Mari" userId="dfb708c9-d8dc-439f-9a3b-c772bf4a311c" providerId="ADAL" clId="{D2FDBEB2-E663-41FC-8A3C-AC79657DF6AB}" dt="2023-02-03T06:27:25.758" v="1541" actId="20577"/>
-        <pc:sldMkLst>
-          <pc:docMk/>
-          <pc:sldMk cId="1339110510" sldId="409"/>
-        </pc:sldMkLst>
-      </pc:sldChg>
-      <pc:sldChg chg="addSp delSp modSp add mod chgLayout">
-        <pc:chgData name="Matthieu De Mari" userId="dfb708c9-d8dc-439f-9a3b-c772bf4a311c" providerId="ADAL" clId="{D2FDBEB2-E663-41FC-8A3C-AC79657DF6AB}" dt="2023-02-03T06:29:45.592" v="1649" actId="1076"/>
-        <pc:sldMkLst>
-          <pc:docMk/>
-          <pc:sldMk cId="1178350440" sldId="410"/>
-        </pc:sldMkLst>
-      </pc:sldChg>
-      <pc:sldChg chg="addSp delSp modSp add mod">
-        <pc:chgData name="Matthieu De Mari" userId="dfb708c9-d8dc-439f-9a3b-c772bf4a311c" providerId="ADAL" clId="{D2FDBEB2-E663-41FC-8A3C-AC79657DF6AB}" dt="2023-02-03T06:30:43.564" v="1656" actId="1076"/>
-        <pc:sldMkLst>
-          <pc:docMk/>
-          <pc:sldMk cId="2149409242" sldId="411"/>
-        </pc:sldMkLst>
-      </pc:sldChg>
-      <pc:sldChg chg="addSp delSp modSp new mod modClrScheme chgLayout">
-        <pc:chgData name="Matthieu De Mari" userId="dfb708c9-d8dc-439f-9a3b-c772bf4a311c" providerId="ADAL" clId="{D2FDBEB2-E663-41FC-8A3C-AC79657DF6AB}" dt="2023-02-03T06:32:52.063" v="1839" actId="1076"/>
-        <pc:sldMkLst>
-          <pc:docMk/>
-          <pc:sldMk cId="1857929555" sldId="412"/>
-        </pc:sldMkLst>
-      </pc:sldChg>
-      <pc:sldChg chg="delSp modSp add mod">
-        <pc:chgData name="Matthieu De Mari" userId="dfb708c9-d8dc-439f-9a3b-c772bf4a311c" providerId="ADAL" clId="{D2FDBEB2-E663-41FC-8A3C-AC79657DF6AB}" dt="2023-02-03T06:32:48.411" v="1837" actId="1076"/>
-        <pc:sldMkLst>
-          <pc:docMk/>
-          <pc:sldMk cId="3179138343" sldId="413"/>
-        </pc:sldMkLst>
-      </pc:sldChg>
-      <pc:sldChg chg="addSp delSp modSp new mod ord modClrScheme chgLayout">
-        <pc:chgData name="Matthieu De Mari" userId="dfb708c9-d8dc-439f-9a3b-c772bf4a311c" providerId="ADAL" clId="{D2FDBEB2-E663-41FC-8A3C-AC79657DF6AB}" dt="2023-02-03T06:35:33.161" v="1926" actId="207"/>
-        <pc:sldMkLst>
-          <pc:docMk/>
-          <pc:sldMk cId="1324969895" sldId="414"/>
-        </pc:sldMkLst>
-      </pc:sldChg>
-      <pc:sldChg chg="addSp delSp modSp add mod">
-        <pc:chgData name="Matthieu De Mari" userId="dfb708c9-d8dc-439f-9a3b-c772bf4a311c" providerId="ADAL" clId="{D2FDBEB2-E663-41FC-8A3C-AC79657DF6AB}" dt="2023-02-03T06:35:36.345" v="1927" actId="207"/>
-        <pc:sldMkLst>
-          <pc:docMk/>
-          <pc:sldMk cId="481166971" sldId="415"/>
-        </pc:sldMkLst>
-      </pc:sldChg>
-      <pc:sldChg chg="addSp delSp modSp add mod">
-        <pc:chgData name="Matthieu De Mari" userId="dfb708c9-d8dc-439f-9a3b-c772bf4a311c" providerId="ADAL" clId="{D2FDBEB2-E663-41FC-8A3C-AC79657DF6AB}" dt="2023-02-03T06:35:57.022" v="1933" actId="14100"/>
-        <pc:sldMkLst>
-          <pc:docMk/>
-          <pc:sldMk cId="4050702309" sldId="416"/>
-        </pc:sldMkLst>
-      </pc:sldChg>
-      <pc:sldChg chg="addSp delSp modSp add mod">
-        <pc:chgData name="Matthieu De Mari" userId="dfb708c9-d8dc-439f-9a3b-c772bf4a311c" providerId="ADAL" clId="{D2FDBEB2-E663-41FC-8A3C-AC79657DF6AB}" dt="2023-02-03T06:36:16.380" v="1937" actId="1076"/>
-        <pc:sldMkLst>
-          <pc:docMk/>
-          <pc:sldMk cId="4249457938" sldId="417"/>
-        </pc:sldMkLst>
-      </pc:sldChg>
-      <pc:sldChg chg="addSp delSp modSp add mod">
-        <pc:chgData name="Matthieu De Mari" userId="dfb708c9-d8dc-439f-9a3b-c772bf4a311c" providerId="ADAL" clId="{D2FDBEB2-E663-41FC-8A3C-AC79657DF6AB}" dt="2023-02-03T06:40:11.228" v="2148" actId="1076"/>
-        <pc:sldMkLst>
-          <pc:docMk/>
-          <pc:sldMk cId="3310153579" sldId="418"/>
-        </pc:sldMkLst>
-      </pc:sldChg>
-      <pc:sldChg chg="addSp delSp modSp add mod">
-        <pc:chgData name="Matthieu De Mari" userId="dfb708c9-d8dc-439f-9a3b-c772bf4a311c" providerId="ADAL" clId="{D2FDBEB2-E663-41FC-8A3C-AC79657DF6AB}" dt="2023-02-03T06:40:35.066" v="2150" actId="1076"/>
-        <pc:sldMkLst>
-          <pc:docMk/>
-          <pc:sldMk cId="1163891923" sldId="419"/>
-        </pc:sldMkLst>
-      </pc:sldChg>
-      <pc:sldChg chg="addSp delSp modSp add mod">
-        <pc:chgData name="Matthieu De Mari" userId="dfb708c9-d8dc-439f-9a3b-c772bf4a311c" providerId="ADAL" clId="{D2FDBEB2-E663-41FC-8A3C-AC79657DF6AB}" dt="2023-02-03T06:42:16.251" v="2202" actId="1037"/>
-        <pc:sldMkLst>
-          <pc:docMk/>
-          <pc:sldMk cId="1773283043" sldId="420"/>
-        </pc:sldMkLst>
-      </pc:sldChg>
-      <pc:sldChg chg="addSp delSp modSp add mod">
-        <pc:chgData name="Matthieu De Mari" userId="dfb708c9-d8dc-439f-9a3b-c772bf4a311c" providerId="ADAL" clId="{D2FDBEB2-E663-41FC-8A3C-AC79657DF6AB}" dt="2023-02-03T06:44:22.777" v="2273" actId="1076"/>
-        <pc:sldMkLst>
-          <pc:docMk/>
-          <pc:sldMk cId="346749718" sldId="421"/>
-        </pc:sldMkLst>
-      </pc:sldChg>
-      <pc:sldChg chg="addSp delSp modSp add mod">
-        <pc:chgData name="Matthieu De Mari" userId="dfb708c9-d8dc-439f-9a3b-c772bf4a311c" providerId="ADAL" clId="{D2FDBEB2-E663-41FC-8A3C-AC79657DF6AB}" dt="2023-02-03T06:44:28.223" v="2274" actId="1076"/>
-        <pc:sldMkLst>
-          <pc:docMk/>
-          <pc:sldMk cId="2747530419" sldId="422"/>
-        </pc:sldMkLst>
-      </pc:sldChg>
-      <pc:sldChg chg="addSp delSp modSp add mod chgLayout">
-        <pc:chgData name="Matthieu De Mari" userId="dfb708c9-d8dc-439f-9a3b-c772bf4a311c" providerId="ADAL" clId="{D2FDBEB2-E663-41FC-8A3C-AC79657DF6AB}" dt="2023-02-03T06:50:11.938" v="2380" actId="14100"/>
-        <pc:sldMkLst>
-          <pc:docMk/>
-          <pc:sldMk cId="4145254973" sldId="423"/>
-        </pc:sldMkLst>
-      </pc:sldChg>
-      <pc:sldChg chg="addSp delSp modSp add mod">
-        <pc:chgData name="Matthieu De Mari" userId="dfb708c9-d8dc-439f-9a3b-c772bf4a311c" providerId="ADAL" clId="{D2FDBEB2-E663-41FC-8A3C-AC79657DF6AB}" dt="2023-02-03T06:51:22.484" v="2410" actId="20577"/>
-        <pc:sldMkLst>
-          <pc:docMk/>
-          <pc:sldMk cId="1513778887" sldId="424"/>
-        </pc:sldMkLst>
-      </pc:sldChg>
-      <pc:sldChg chg="addSp delSp modSp add mod">
-        <pc:chgData name="Matthieu De Mari" userId="dfb708c9-d8dc-439f-9a3b-c772bf4a311c" providerId="ADAL" clId="{D2FDBEB2-E663-41FC-8A3C-AC79657DF6AB}" dt="2023-02-03T06:50:07.197" v="2378" actId="1076"/>
-        <pc:sldMkLst>
-          <pc:docMk/>
-          <pc:sldMk cId="548772636" sldId="425"/>
-        </pc:sldMkLst>
-      </pc:sldChg>
-      <pc:sldChg chg="addSp delSp modSp add mod modClrScheme chgLayout">
-        <pc:chgData name="Matthieu De Mari" userId="dfb708c9-d8dc-439f-9a3b-c772bf4a311c" providerId="ADAL" clId="{D2FDBEB2-E663-41FC-8A3C-AC79657DF6AB}" dt="2023-02-03T06:52:56.286" v="2468" actId="20577"/>
-        <pc:sldMkLst>
-          <pc:docMk/>
-          <pc:sldMk cId="995336806" sldId="426"/>
-        </pc:sldMkLst>
-      </pc:sldChg>
-      <pc:sldChg chg="add">
-        <pc:chgData name="Matthieu De Mari" userId="dfb708c9-d8dc-439f-9a3b-c772bf4a311c" providerId="ADAL" clId="{D2FDBEB2-E663-41FC-8A3C-AC79657DF6AB}" dt="2023-02-03T07:27:21.109" v="3778"/>
-        <pc:sldMkLst>
-          <pc:docMk/>
-          <pc:sldMk cId="1567954153" sldId="608"/>
-        </pc:sldMkLst>
-      </pc:sldChg>
-      <pc:sldChg chg="modSp add mod">
-        <pc:chgData name="Matthieu De Mari" userId="dfb708c9-d8dc-439f-9a3b-c772bf4a311c" providerId="ADAL" clId="{D2FDBEB2-E663-41FC-8A3C-AC79657DF6AB}" dt="2023-02-03T07:04:16.986" v="2681" actId="20577"/>
-        <pc:sldMkLst>
-          <pc:docMk/>
-          <pc:sldMk cId="1098360026" sldId="646"/>
-        </pc:sldMkLst>
-      </pc:sldChg>
-      <pc:sldChg chg="modSp new mod">
-        <pc:chgData name="Matthieu De Mari" userId="dfb708c9-d8dc-439f-9a3b-c772bf4a311c" providerId="ADAL" clId="{D2FDBEB2-E663-41FC-8A3C-AC79657DF6AB}" dt="2023-02-03T07:07:22.338" v="2871" actId="207"/>
-        <pc:sldMkLst>
-          <pc:docMk/>
-          <pc:sldMk cId="3471904534" sldId="647"/>
-        </pc:sldMkLst>
-      </pc:sldChg>
-      <pc:sldChg chg="addSp delSp modSp add mod">
-        <pc:chgData name="Matthieu De Mari" userId="dfb708c9-d8dc-439f-9a3b-c772bf4a311c" providerId="ADAL" clId="{D2FDBEB2-E663-41FC-8A3C-AC79657DF6AB}" dt="2023-02-03T08:26:52.576" v="6104" actId="14100"/>
-        <pc:sldMkLst>
-          <pc:docMk/>
-          <pc:sldMk cId="1172112343" sldId="648"/>
-        </pc:sldMkLst>
-      </pc:sldChg>
-      <pc:sldChg chg="addSp delSp modSp add mod ord">
-        <pc:chgData name="Matthieu De Mari" userId="dfb708c9-d8dc-439f-9a3b-c772bf4a311c" providerId="ADAL" clId="{D2FDBEB2-E663-41FC-8A3C-AC79657DF6AB}" dt="2023-02-03T07:12:02.061" v="3217" actId="20577"/>
-        <pc:sldMkLst>
-          <pc:docMk/>
-          <pc:sldMk cId="1146881653" sldId="649"/>
-        </pc:sldMkLst>
-      </pc:sldChg>
-      <pc:sldChg chg="addSp delSp modSp add mod">
-        <pc:chgData name="Matthieu De Mari" userId="dfb708c9-d8dc-439f-9a3b-c772bf4a311c" providerId="ADAL" clId="{D2FDBEB2-E663-41FC-8A3C-AC79657DF6AB}" dt="2023-02-03T07:18:45.380" v="3575" actId="22"/>
-        <pc:sldMkLst>
-          <pc:docMk/>
-          <pc:sldMk cId="2437975891" sldId="650"/>
-        </pc:sldMkLst>
-      </pc:sldChg>
-      <pc:sldChg chg="addSp delSp modSp add mod chgLayout">
-        <pc:chgData name="Matthieu De Mari" userId="dfb708c9-d8dc-439f-9a3b-c772bf4a311c" providerId="ADAL" clId="{D2FDBEB2-E663-41FC-8A3C-AC79657DF6AB}" dt="2023-02-03T08:28:04.146" v="6124" actId="14100"/>
-        <pc:sldMkLst>
-          <pc:docMk/>
-          <pc:sldMk cId="2710721176" sldId="651"/>
-        </pc:sldMkLst>
-      </pc:sldChg>
-      <pc:sldChg chg="addSp delSp modSp add mod">
-        <pc:chgData name="Matthieu De Mari" userId="dfb708c9-d8dc-439f-9a3b-c772bf4a311c" providerId="ADAL" clId="{D2FDBEB2-E663-41FC-8A3C-AC79657DF6AB}" dt="2023-02-03T07:22:56.178" v="3713" actId="1076"/>
-        <pc:sldMkLst>
-          <pc:docMk/>
-          <pc:sldMk cId="2596538432" sldId="652"/>
-        </pc:sldMkLst>
-      </pc:sldChg>
-      <pc:sldChg chg="add del">
-        <pc:chgData name="Matthieu De Mari" userId="dfb708c9-d8dc-439f-9a3b-c772bf4a311c" providerId="ADAL" clId="{D2FDBEB2-E663-41FC-8A3C-AC79657DF6AB}" dt="2023-02-03T07:20:41.487" v="3632" actId="47"/>
-        <pc:sldMkLst>
-          <pc:docMk/>
-          <pc:sldMk cId="4100639751" sldId="652"/>
-        </pc:sldMkLst>
-      </pc:sldChg>
-      <pc:sldChg chg="add">
-        <pc:chgData name="Matthieu De Mari" userId="dfb708c9-d8dc-439f-9a3b-c772bf4a311c" providerId="ADAL" clId="{D2FDBEB2-E663-41FC-8A3C-AC79657DF6AB}" dt="2023-02-03T07:27:21.109" v="3778"/>
-        <pc:sldMkLst>
-          <pc:docMk/>
-          <pc:sldMk cId="2525469962" sldId="757"/>
-        </pc:sldMkLst>
-      </pc:sldChg>
-      <pc:sldChg chg="add">
-        <pc:chgData name="Matthieu De Mari" userId="dfb708c9-d8dc-439f-9a3b-c772bf4a311c" providerId="ADAL" clId="{D2FDBEB2-E663-41FC-8A3C-AC79657DF6AB}" dt="2023-02-03T07:27:21.109" v="3778"/>
-        <pc:sldMkLst>
-          <pc:docMk/>
-          <pc:sldMk cId="571242276" sldId="758"/>
-        </pc:sldMkLst>
-      </pc:sldChg>
-      <pc:sldChg chg="add">
-        <pc:chgData name="Matthieu De Mari" userId="dfb708c9-d8dc-439f-9a3b-c772bf4a311c" providerId="ADAL" clId="{D2FDBEB2-E663-41FC-8A3C-AC79657DF6AB}" dt="2023-02-03T07:27:21.109" v="3778"/>
-        <pc:sldMkLst>
-          <pc:docMk/>
-          <pc:sldMk cId="1598131875" sldId="759"/>
-        </pc:sldMkLst>
-      </pc:sldChg>
-      <pc:sldChg chg="new">
-        <pc:chgData name="Matthieu De Mari" userId="dfb708c9-d8dc-439f-9a3b-c772bf4a311c" providerId="ADAL" clId="{D2FDBEB2-E663-41FC-8A3C-AC79657DF6AB}" dt="2023-02-03T07:27:29.638" v="3780" actId="680"/>
-        <pc:sldMkLst>
-          <pc:docMk/>
-          <pc:sldMk cId="2917324732" sldId="760"/>
-        </pc:sldMkLst>
-      </pc:sldChg>
-      <pc:sldChg chg="addSp delSp modSp add mod modClrScheme chgLayout">
-        <pc:chgData name="Matthieu De Mari" userId="dfb708c9-d8dc-439f-9a3b-c772bf4a311c" providerId="ADAL" clId="{D2FDBEB2-E663-41FC-8A3C-AC79657DF6AB}" dt="2023-02-03T07:55:26.347" v="4284" actId="20577"/>
-        <pc:sldMkLst>
-          <pc:docMk/>
-          <pc:sldMk cId="3339699406" sldId="761"/>
-        </pc:sldMkLst>
-      </pc:sldChg>
-      <pc:sldChg chg="addSp delSp modSp add mod">
-        <pc:chgData name="Matthieu De Mari" userId="dfb708c9-d8dc-439f-9a3b-c772bf4a311c" providerId="ADAL" clId="{D2FDBEB2-E663-41FC-8A3C-AC79657DF6AB}" dt="2023-02-03T07:57:48.123" v="4393" actId="1076"/>
-        <pc:sldMkLst>
-          <pc:docMk/>
-          <pc:sldMk cId="1546007078" sldId="762"/>
-        </pc:sldMkLst>
-      </pc:sldChg>
-      <pc:sldChg chg="addSp delSp modSp new mod modClrScheme chgLayout">
-        <pc:chgData name="Matthieu De Mari" userId="dfb708c9-d8dc-439f-9a3b-c772bf4a311c" providerId="ADAL" clId="{D2FDBEB2-E663-41FC-8A3C-AC79657DF6AB}" dt="2023-02-03T07:59:23.778" v="4443" actId="20577"/>
-        <pc:sldMkLst>
-          <pc:docMk/>
-          <pc:sldMk cId="2580175991" sldId="763"/>
-        </pc:sldMkLst>
-      </pc:sldChg>
-      <pc:sldChg chg="addSp modSp add mod">
-        <pc:chgData name="Matthieu De Mari" userId="dfb708c9-d8dc-439f-9a3b-c772bf4a311c" providerId="ADAL" clId="{D2FDBEB2-E663-41FC-8A3C-AC79657DF6AB}" dt="2023-02-03T08:30:06.264" v="6207"/>
-        <pc:sldMkLst>
-          <pc:docMk/>
-          <pc:sldMk cId="1879463264" sldId="764"/>
-        </pc:sldMkLst>
-      </pc:sldChg>
-      <pc:sldChg chg="addSp delSp modSp add mod modClrScheme chgLayout">
-        <pc:chgData name="Matthieu De Mari" userId="dfb708c9-d8dc-439f-9a3b-c772bf4a311c" providerId="ADAL" clId="{D2FDBEB2-E663-41FC-8A3C-AC79657DF6AB}" dt="2023-02-03T08:07:21.637" v="4960" actId="115"/>
-        <pc:sldMkLst>
-          <pc:docMk/>
-          <pc:sldMk cId="1996337912" sldId="765"/>
-        </pc:sldMkLst>
-      </pc:sldChg>
-      <pc:sldChg chg="addSp delSp modSp add mod modClrScheme chgLayout">
-        <pc:chgData name="Matthieu De Mari" userId="dfb708c9-d8dc-439f-9a3b-c772bf4a311c" providerId="ADAL" clId="{D2FDBEB2-E663-41FC-8A3C-AC79657DF6AB}" dt="2023-02-03T08:15:31.961" v="5774" actId="20577"/>
-        <pc:sldMkLst>
-          <pc:docMk/>
-          <pc:sldMk cId="1554669076" sldId="766"/>
-        </pc:sldMkLst>
-      </pc:sldChg>
-      <pc:sldChg chg="modSp add mod">
-        <pc:chgData name="Matthieu De Mari" userId="dfb708c9-d8dc-439f-9a3b-c772bf4a311c" providerId="ADAL" clId="{D2FDBEB2-E663-41FC-8A3C-AC79657DF6AB}" dt="2023-02-03T08:14:24.478" v="5655" actId="113"/>
-        <pc:sldMkLst>
-          <pc:docMk/>
-          <pc:sldMk cId="887698529" sldId="767"/>
-        </pc:sldMkLst>
-      </pc:sldChg>
-      <pc:sldChg chg="modSp add mod">
-        <pc:chgData name="Matthieu De Mari" userId="dfb708c9-d8dc-439f-9a3b-c772bf4a311c" providerId="ADAL" clId="{D2FDBEB2-E663-41FC-8A3C-AC79657DF6AB}" dt="2023-02-03T08:15:19.361" v="5773" actId="20577"/>
-        <pc:sldMkLst>
-          <pc:docMk/>
-          <pc:sldMk cId="3101493777" sldId="768"/>
-        </pc:sldMkLst>
-      </pc:sldChg>
-      <pc:sldChg chg="modSp new mod">
-        <pc:chgData name="Matthieu De Mari" userId="dfb708c9-d8dc-439f-9a3b-c772bf4a311c" providerId="ADAL" clId="{D2FDBEB2-E663-41FC-8A3C-AC79657DF6AB}" dt="2023-02-03T08:22:57.233" v="6026" actId="20577"/>
-        <pc:sldMkLst>
-          <pc:docMk/>
-          <pc:sldMk cId="2909899754" sldId="769"/>
-        </pc:sldMkLst>
-      </pc:sldChg>
-      <pc:sldChg chg="add del">
-        <pc:chgData name="Matthieu De Mari" userId="dfb708c9-d8dc-439f-9a3b-c772bf4a311c" providerId="ADAL" clId="{D2FDBEB2-E663-41FC-8A3C-AC79657DF6AB}" dt="2023-02-03T08:14:32.531" v="5657" actId="47"/>
-        <pc:sldMkLst>
-          <pc:docMk/>
-          <pc:sldMk cId="2993869992" sldId="769"/>
-        </pc:sldMkLst>
-      </pc:sldChg>
-      <pc:sldChg chg="addSp delSp modSp add mod">
-        <pc:chgData name="Matthieu De Mari" userId="dfb708c9-d8dc-439f-9a3b-c772bf4a311c" providerId="ADAL" clId="{D2FDBEB2-E663-41FC-8A3C-AC79657DF6AB}" dt="2023-02-03T08:16:53.633" v="5816" actId="1076"/>
-        <pc:sldMkLst>
-          <pc:docMk/>
-          <pc:sldMk cId="581091786" sldId="770"/>
-        </pc:sldMkLst>
-      </pc:sldChg>
-      <pc:sldChg chg="addSp delSp modSp add mod">
-        <pc:chgData name="Matthieu De Mari" userId="dfb708c9-d8dc-439f-9a3b-c772bf4a311c" providerId="ADAL" clId="{D2FDBEB2-E663-41FC-8A3C-AC79657DF6AB}" dt="2023-02-03T08:17:21.113" v="5822" actId="1076"/>
-        <pc:sldMkLst>
-          <pc:docMk/>
-          <pc:sldMk cId="2768410648" sldId="771"/>
-        </pc:sldMkLst>
-      </pc:sldChg>
-      <pc:sldChg chg="addSp delSp modSp add mod">
-        <pc:chgData name="Matthieu De Mari" userId="dfb708c9-d8dc-439f-9a3b-c772bf4a311c" providerId="ADAL" clId="{D2FDBEB2-E663-41FC-8A3C-AC79657DF6AB}" dt="2023-02-03T08:24:00.796" v="6040" actId="693"/>
-        <pc:sldMkLst>
-          <pc:docMk/>
-          <pc:sldMk cId="2791462929" sldId="772"/>
-        </pc:sldMkLst>
-      </pc:sldChg>
-      <pc:sldChg chg="addSp delSp modSp add mod">
-        <pc:chgData name="Matthieu De Mari" userId="dfb708c9-d8dc-439f-9a3b-c772bf4a311c" providerId="ADAL" clId="{D2FDBEB2-E663-41FC-8A3C-AC79657DF6AB}" dt="2023-02-03T08:25:06.211" v="6051" actId="14100"/>
-        <pc:sldMkLst>
-          <pc:docMk/>
-          <pc:sldMk cId="3544439591" sldId="773"/>
-        </pc:sldMkLst>
-      </pc:sldChg>
-      <pc:sldChg chg="addSp delSp modSp add mod">
-        <pc:chgData name="Matthieu De Mari" userId="dfb708c9-d8dc-439f-9a3b-c772bf4a311c" providerId="ADAL" clId="{D2FDBEB2-E663-41FC-8A3C-AC79657DF6AB}" dt="2023-02-03T08:25:30.434" v="6061" actId="478"/>
-        <pc:sldMkLst>
-          <pc:docMk/>
-          <pc:sldMk cId="2831341972" sldId="774"/>
-        </pc:sldMkLst>
-      </pc:sldChg>
-      <pc:sldChg chg="addSp delSp modSp add mod">
-        <pc:chgData name="Matthieu De Mari" userId="dfb708c9-d8dc-439f-9a3b-c772bf4a311c" providerId="ADAL" clId="{D2FDBEB2-E663-41FC-8A3C-AC79657DF6AB}" dt="2023-02-03T08:35:42.751" v="6590" actId="20577"/>
-        <pc:sldMkLst>
-          <pc:docMk/>
-          <pc:sldMk cId="743119883" sldId="775"/>
-        </pc:sldMkLst>
-      </pc:sldChg>
-      <pc:sldChg chg="addSp delSp modSp add mod modClrScheme chgLayout">
-        <pc:chgData name="Matthieu De Mari" userId="dfb708c9-d8dc-439f-9a3b-c772bf4a311c" providerId="ADAL" clId="{D2FDBEB2-E663-41FC-8A3C-AC79657DF6AB}" dt="2023-02-03T08:38:18.521" v="6716" actId="14100"/>
-        <pc:sldMkLst>
-          <pc:docMk/>
-          <pc:sldMk cId="1966383991" sldId="776"/>
-        </pc:sldMkLst>
-      </pc:sldChg>
-      <pc:sldChg chg="modSp add mod">
-        <pc:chgData name="Matthieu De Mari" userId="dfb708c9-d8dc-439f-9a3b-c772bf4a311c" providerId="ADAL" clId="{D2FDBEB2-E663-41FC-8A3C-AC79657DF6AB}" dt="2023-02-03T08:44:33.674" v="7137" actId="14100"/>
-        <pc:sldMkLst>
-          <pc:docMk/>
-          <pc:sldMk cId="3349972987" sldId="777"/>
-        </pc:sldMkLst>
-      </pc:sldChg>
-      <pc:sldChg chg="modSp new mod ord">
-        <pc:chgData name="Matthieu De Mari" userId="dfb708c9-d8dc-439f-9a3b-c772bf4a311c" providerId="ADAL" clId="{D2FDBEB2-E663-41FC-8A3C-AC79657DF6AB}" dt="2023-02-03T08:51:08.222" v="7382"/>
-        <pc:sldMkLst>
-          <pc:docMk/>
-          <pc:sldMk cId="4008937125" sldId="778"/>
-        </pc:sldMkLst>
-      </pc:sldChg>
-      <pc:sldChg chg="addSp delSp modSp add mod ord modClrScheme chgLayout">
-        <pc:chgData name="Matthieu De Mari" userId="dfb708c9-d8dc-439f-9a3b-c772bf4a311c" providerId="ADAL" clId="{D2FDBEB2-E663-41FC-8A3C-AC79657DF6AB}" dt="2023-02-03T08:51:08.222" v="7382"/>
-        <pc:sldMkLst>
-          <pc:docMk/>
-          <pc:sldMk cId="1689794110" sldId="779"/>
-        </pc:sldMkLst>
-      </pc:sldChg>
-      <pc:sldChg chg="addSp delSp modSp add mod">
-        <pc:chgData name="Matthieu De Mari" userId="dfb708c9-d8dc-439f-9a3b-c772bf4a311c" providerId="ADAL" clId="{D2FDBEB2-E663-41FC-8A3C-AC79657DF6AB}" dt="2023-02-03T08:55:14.765" v="7629" actId="20577"/>
-        <pc:sldMkLst>
-          <pc:docMk/>
-          <pc:sldMk cId="2678238830" sldId="780"/>
-        </pc:sldMkLst>
-      </pc:sldChg>
-      <pc:sldChg chg="addSp delSp new mod">
-        <pc:chgData name="Matthieu De Mari" userId="dfb708c9-d8dc-439f-9a3b-c772bf4a311c" providerId="ADAL" clId="{D2FDBEB2-E663-41FC-8A3C-AC79657DF6AB}" dt="2023-02-03T09:13:37.539" v="8349" actId="22"/>
-        <pc:sldMkLst>
-          <pc:docMk/>
-          <pc:sldMk cId="3029045816" sldId="781"/>
-        </pc:sldMkLst>
-      </pc:sldChg>
-      <pc:sldChg chg="addSp delSp modSp new mod modClrScheme chgLayout">
-        <pc:chgData name="Matthieu De Mari" userId="dfb708c9-d8dc-439f-9a3b-c772bf4a311c" providerId="ADAL" clId="{D2FDBEB2-E663-41FC-8A3C-AC79657DF6AB}" dt="2023-02-03T09:09:53.026" v="8345" actId="20577"/>
-        <pc:sldMkLst>
-          <pc:docMk/>
-          <pc:sldMk cId="278531271" sldId="782"/>
-        </pc:sldMkLst>
-      </pc:sldChg>
-    </pc:docChg>
-  </pc:docChgLst>
-  <pc:docChgLst>
-    <pc:chgData name="Matthieu De Mari" userId="dfb708c9-d8dc-439f-9a3b-c772bf4a311c" providerId="ADAL" clId="{CD3BCE5D-F1D9-409A-9E6B-AD5ABB34863C}"/>
-    <pc:docChg chg="undo custSel addSld delSld modSld sldOrd addSection delSection modSection">
-      <pc:chgData name="Matthieu De Mari" userId="dfb708c9-d8dc-439f-9a3b-c772bf4a311c" providerId="ADAL" clId="{CD3BCE5D-F1D9-409A-9E6B-AD5ABB34863C}" dt="2023-02-07T02:34:16.315" v="97" actId="113"/>
-      <pc:docMkLst>
-        <pc:docMk/>
-      </pc:docMkLst>
-      <pc:sldChg chg="del">
-        <pc:chgData name="Matthieu De Mari" userId="dfb708c9-d8dc-439f-9a3b-c772bf4a311c" providerId="ADAL" clId="{CD3BCE5D-F1D9-409A-9E6B-AD5ABB34863C}" dt="2023-02-07T01:24:07.043" v="4" actId="47"/>
-        <pc:sldMkLst>
-          <pc:docMk/>
-          <pc:sldMk cId="3442501962" sldId="257"/>
-        </pc:sldMkLst>
-      </pc:sldChg>
-      <pc:sldChg chg="del">
-        <pc:chgData name="Matthieu De Mari" userId="dfb708c9-d8dc-439f-9a3b-c772bf4a311c" providerId="ADAL" clId="{CD3BCE5D-F1D9-409A-9E6B-AD5ABB34863C}" dt="2023-02-07T01:25:56.384" v="56" actId="47"/>
-        <pc:sldMkLst>
-          <pc:docMk/>
-          <pc:sldMk cId="1893873068" sldId="266"/>
-        </pc:sldMkLst>
-      </pc:sldChg>
-      <pc:sldChg chg="del">
-        <pc:chgData name="Matthieu De Mari" userId="dfb708c9-d8dc-439f-9a3b-c772bf4a311c" providerId="ADAL" clId="{CD3BCE5D-F1D9-409A-9E6B-AD5ABB34863C}" dt="2023-02-07T01:25:56.384" v="56" actId="47"/>
-        <pc:sldMkLst>
-          <pc:docMk/>
-          <pc:sldMk cId="3880949074" sldId="267"/>
-        </pc:sldMkLst>
-      </pc:sldChg>
-      <pc:sldChg chg="del">
-        <pc:chgData name="Matthieu De Mari" userId="dfb708c9-d8dc-439f-9a3b-c772bf4a311c" providerId="ADAL" clId="{CD3BCE5D-F1D9-409A-9E6B-AD5ABB34863C}" dt="2023-02-07T01:25:53.661" v="55" actId="47"/>
-        <pc:sldMkLst>
-          <pc:docMk/>
-          <pc:sldMk cId="1036081419" sldId="346"/>
-        </pc:sldMkLst>
-      </pc:sldChg>
-      <pc:sldChg chg="modSp mod">
-        <pc:chgData name="Matthieu De Mari" userId="dfb708c9-d8dc-439f-9a3b-c772bf4a311c" providerId="ADAL" clId="{CD3BCE5D-F1D9-409A-9E6B-AD5ABB34863C}" dt="2023-02-07T01:24:02.661" v="3" actId="20577"/>
-        <pc:sldMkLst>
-          <pc:docMk/>
-          <pc:sldMk cId="1040156172" sldId="377"/>
-        </pc:sldMkLst>
-      </pc:sldChg>
-      <pc:sldChg chg="del">
-        <pc:chgData name="Matthieu De Mari" userId="dfb708c9-d8dc-439f-9a3b-c772bf4a311c" providerId="ADAL" clId="{CD3BCE5D-F1D9-409A-9E6B-AD5ABB34863C}" dt="2023-02-07T01:24:10.953" v="5" actId="47"/>
-        <pc:sldMkLst>
-          <pc:docMk/>
-          <pc:sldMk cId="380766058" sldId="378"/>
-        </pc:sldMkLst>
-      </pc:sldChg>
-      <pc:sldChg chg="del">
-        <pc:chgData name="Matthieu De Mari" userId="dfb708c9-d8dc-439f-9a3b-c772bf4a311c" providerId="ADAL" clId="{CD3BCE5D-F1D9-409A-9E6B-AD5ABB34863C}" dt="2023-02-07T01:24:12.156" v="6" actId="47"/>
-        <pc:sldMkLst>
-          <pc:docMk/>
-          <pc:sldMk cId="1970187575" sldId="379"/>
-        </pc:sldMkLst>
-      </pc:sldChg>
-      <pc:sldChg chg="del">
-        <pc:chgData name="Matthieu De Mari" userId="dfb708c9-d8dc-439f-9a3b-c772bf4a311c" providerId="ADAL" clId="{CD3BCE5D-F1D9-409A-9E6B-AD5ABB34863C}" dt="2023-02-07T01:24:13.097" v="7" actId="47"/>
-        <pc:sldMkLst>
-          <pc:docMk/>
-          <pc:sldMk cId="2100436947" sldId="380"/>
-        </pc:sldMkLst>
-      </pc:sldChg>
-      <pc:sldChg chg="del">
-        <pc:chgData name="Matthieu De Mari" userId="dfb708c9-d8dc-439f-9a3b-c772bf4a311c" providerId="ADAL" clId="{CD3BCE5D-F1D9-409A-9E6B-AD5ABB34863C}" dt="2023-02-07T01:24:14.869" v="8" actId="47"/>
-        <pc:sldMkLst>
-          <pc:docMk/>
-          <pc:sldMk cId="3251402422" sldId="381"/>
-        </pc:sldMkLst>
-      </pc:sldChg>
-      <pc:sldChg chg="del">
-        <pc:chgData name="Matthieu De Mari" userId="dfb708c9-d8dc-439f-9a3b-c772bf4a311c" providerId="ADAL" clId="{CD3BCE5D-F1D9-409A-9E6B-AD5ABB34863C}" dt="2023-02-07T01:24:15.636" v="9" actId="47"/>
-        <pc:sldMkLst>
-          <pc:docMk/>
-          <pc:sldMk cId="1017635827" sldId="382"/>
-        </pc:sldMkLst>
-      </pc:sldChg>
-      <pc:sldChg chg="del">
-        <pc:chgData name="Matthieu De Mari" userId="dfb708c9-d8dc-439f-9a3b-c772bf4a311c" providerId="ADAL" clId="{CD3BCE5D-F1D9-409A-9E6B-AD5ABB34863C}" dt="2023-02-07T01:24:17.207" v="11" actId="47"/>
-        <pc:sldMkLst>
-          <pc:docMk/>
-          <pc:sldMk cId="1921397945" sldId="383"/>
-        </pc:sldMkLst>
-      </pc:sldChg>
-      <pc:sldChg chg="del">
-        <pc:chgData name="Matthieu De Mari" userId="dfb708c9-d8dc-439f-9a3b-c772bf4a311c" providerId="ADAL" clId="{CD3BCE5D-F1D9-409A-9E6B-AD5ABB34863C}" dt="2023-02-07T01:24:17.947" v="12" actId="47"/>
-        <pc:sldMkLst>
-          <pc:docMk/>
-          <pc:sldMk cId="1420298135" sldId="384"/>
-        </pc:sldMkLst>
-      </pc:sldChg>
-      <pc:sldChg chg="add del">
-        <pc:chgData name="Matthieu De Mari" userId="dfb708c9-d8dc-439f-9a3b-c772bf4a311c" providerId="ADAL" clId="{CD3BCE5D-F1D9-409A-9E6B-AD5ABB34863C}" dt="2023-02-07T01:25:00.965" v="39" actId="47"/>
-        <pc:sldMkLst>
-          <pc:docMk/>
-          <pc:sldMk cId="2560511070" sldId="385"/>
-        </pc:sldMkLst>
-      </pc:sldChg>
-      <pc:sldChg chg="add del">
-        <pc:chgData name="Matthieu De Mari" userId="dfb708c9-d8dc-439f-9a3b-c772bf4a311c" providerId="ADAL" clId="{CD3BCE5D-F1D9-409A-9E6B-AD5ABB34863C}" dt="2023-02-07T01:25:20.702" v="46" actId="47"/>
-        <pc:sldMkLst>
-          <pc:docMk/>
-          <pc:sldMk cId="1116470923" sldId="386"/>
-        </pc:sldMkLst>
-      </pc:sldChg>
-      <pc:sldChg chg="add del">
-        <pc:chgData name="Matthieu De Mari" userId="dfb708c9-d8dc-439f-9a3b-c772bf4a311c" providerId="ADAL" clId="{CD3BCE5D-F1D9-409A-9E6B-AD5ABB34863C}" dt="2023-02-07T01:24:46.809" v="34" actId="47"/>
-        <pc:sldMkLst>
-          <pc:docMk/>
-          <pc:sldMk cId="2474697269" sldId="387"/>
-        </pc:sldMkLst>
-      </pc:sldChg>
-      <pc:sldChg chg="add del">
-        <pc:chgData name="Matthieu De Mari" userId="dfb708c9-d8dc-439f-9a3b-c772bf4a311c" providerId="ADAL" clId="{CD3BCE5D-F1D9-409A-9E6B-AD5ABB34863C}" dt="2023-02-07T01:24:46.290" v="33" actId="47"/>
-        <pc:sldMkLst>
-          <pc:docMk/>
-          <pc:sldMk cId="4198773114" sldId="388"/>
-        </pc:sldMkLst>
-      </pc:sldChg>
-      <pc:sldChg chg="add del">
-        <pc:chgData name="Matthieu De Mari" userId="dfb708c9-d8dc-439f-9a3b-c772bf4a311c" providerId="ADAL" clId="{CD3BCE5D-F1D9-409A-9E6B-AD5ABB34863C}" dt="2023-02-07T01:24:45.459" v="32" actId="47"/>
-        <pc:sldMkLst>
-          <pc:docMk/>
-          <pc:sldMk cId="481628505" sldId="389"/>
-        </pc:sldMkLst>
-      </pc:sldChg>
-      <pc:sldChg chg="add del">
-        <pc:chgData name="Matthieu De Mari" userId="dfb708c9-d8dc-439f-9a3b-c772bf4a311c" providerId="ADAL" clId="{CD3BCE5D-F1D9-409A-9E6B-AD5ABB34863C}" dt="2023-02-07T01:24:40.039" v="31" actId="47"/>
-        <pc:sldMkLst>
-          <pc:docMk/>
-          <pc:sldMk cId="2128707751" sldId="390"/>
-        </pc:sldMkLst>
-      </pc:sldChg>
-      <pc:sldChg chg="add del">
-        <pc:chgData name="Matthieu De Mari" userId="dfb708c9-d8dc-439f-9a3b-c772bf4a311c" providerId="ADAL" clId="{CD3BCE5D-F1D9-409A-9E6B-AD5ABB34863C}" dt="2023-02-07T01:24:39.496" v="30" actId="47"/>
-        <pc:sldMkLst>
-          <pc:docMk/>
-          <pc:sldMk cId="1283478655" sldId="391"/>
-        </pc:sldMkLst>
-      </pc:sldChg>
-      <pc:sldChg chg="add del">
-        <pc:chgData name="Matthieu De Mari" userId="dfb708c9-d8dc-439f-9a3b-c772bf4a311c" providerId="ADAL" clId="{CD3BCE5D-F1D9-409A-9E6B-AD5ABB34863C}" dt="2023-02-07T01:24:39.136" v="29" actId="47"/>
-        <pc:sldMkLst>
-          <pc:docMk/>
-          <pc:sldMk cId="1341638402" sldId="392"/>
-        </pc:sldMkLst>
-      </pc:sldChg>
-      <pc:sldChg chg="add del">
-        <pc:chgData name="Matthieu De Mari" userId="dfb708c9-d8dc-439f-9a3b-c772bf4a311c" providerId="ADAL" clId="{CD3BCE5D-F1D9-409A-9E6B-AD5ABB34863C}" dt="2023-02-07T01:24:38.686" v="28" actId="47"/>
-        <pc:sldMkLst>
-          <pc:docMk/>
-          <pc:sldMk cId="164097668" sldId="394"/>
-        </pc:sldMkLst>
-      </pc:sldChg>
-      <pc:sldChg chg="add del">
-        <pc:chgData name="Matthieu De Mari" userId="dfb708c9-d8dc-439f-9a3b-c772bf4a311c" providerId="ADAL" clId="{CD3BCE5D-F1D9-409A-9E6B-AD5ABB34863C}" dt="2023-02-07T01:24:38.462" v="27" actId="47"/>
-        <pc:sldMkLst>
-          <pc:docMk/>
-          <pc:sldMk cId="3048177291" sldId="395"/>
-        </pc:sldMkLst>
-      </pc:sldChg>
-      <pc:sldChg chg="add del">
-        <pc:chgData name="Matthieu De Mari" userId="dfb708c9-d8dc-439f-9a3b-c772bf4a311c" providerId="ADAL" clId="{CD3BCE5D-F1D9-409A-9E6B-AD5ABB34863C}" dt="2023-02-07T01:25:45.675" v="47" actId="47"/>
-        <pc:sldMkLst>
-          <pc:docMk/>
-          <pc:sldMk cId="1458730680" sldId="396"/>
-        </pc:sldMkLst>
-      </pc:sldChg>
-      <pc:sldChg chg="add del">
-        <pc:chgData name="Matthieu De Mari" userId="dfb708c9-d8dc-439f-9a3b-c772bf4a311c" providerId="ADAL" clId="{CD3BCE5D-F1D9-409A-9E6B-AD5ABB34863C}" dt="2023-02-07T01:25:46.485" v="48" actId="47"/>
-        <pc:sldMkLst>
-          <pc:docMk/>
-          <pc:sldMk cId="1451434589" sldId="397"/>
-        </pc:sldMkLst>
-      </pc:sldChg>
-      <pc:sldChg chg="del">
-        <pc:chgData name="Matthieu De Mari" userId="dfb708c9-d8dc-439f-9a3b-c772bf4a311c" providerId="ADAL" clId="{CD3BCE5D-F1D9-409A-9E6B-AD5ABB34863C}" dt="2023-02-07T01:25:47.138" v="49" actId="47"/>
-        <pc:sldMkLst>
-          <pc:docMk/>
-          <pc:sldMk cId="2867637474" sldId="398"/>
-        </pc:sldMkLst>
-      </pc:sldChg>
-      <pc:sldChg chg="del">
-        <pc:chgData name="Matthieu De Mari" userId="dfb708c9-d8dc-439f-9a3b-c772bf4a311c" providerId="ADAL" clId="{CD3BCE5D-F1D9-409A-9E6B-AD5ABB34863C}" dt="2023-02-07T01:25:47.878" v="50" actId="47"/>
-        <pc:sldMkLst>
-          <pc:docMk/>
-          <pc:sldMk cId="122423608" sldId="399"/>
-        </pc:sldMkLst>
-      </pc:sldChg>
-      <pc:sldChg chg="del">
-        <pc:chgData name="Matthieu De Mari" userId="dfb708c9-d8dc-439f-9a3b-c772bf4a311c" providerId="ADAL" clId="{CD3BCE5D-F1D9-409A-9E6B-AD5ABB34863C}" dt="2023-02-07T01:25:48.510" v="51" actId="47"/>
-        <pc:sldMkLst>
-          <pc:docMk/>
-          <pc:sldMk cId="2642959288" sldId="400"/>
-        </pc:sldMkLst>
-      </pc:sldChg>
-      <pc:sldChg chg="del">
-        <pc:chgData name="Matthieu De Mari" userId="dfb708c9-d8dc-439f-9a3b-c772bf4a311c" providerId="ADAL" clId="{CD3BCE5D-F1D9-409A-9E6B-AD5ABB34863C}" dt="2023-02-07T01:25:49.162" v="52" actId="47"/>
-        <pc:sldMkLst>
-          <pc:docMk/>
-          <pc:sldMk cId="4039171501" sldId="401"/>
-        </pc:sldMkLst>
-      </pc:sldChg>
-      <pc:sldChg chg="del">
-        <pc:chgData name="Matthieu De Mari" userId="dfb708c9-d8dc-439f-9a3b-c772bf4a311c" providerId="ADAL" clId="{CD3BCE5D-F1D9-409A-9E6B-AD5ABB34863C}" dt="2023-02-07T01:25:49.771" v="53" actId="47"/>
-        <pc:sldMkLst>
-          <pc:docMk/>
-          <pc:sldMk cId="3163596145" sldId="402"/>
-        </pc:sldMkLst>
-      </pc:sldChg>
-      <pc:sldChg chg="del">
-        <pc:chgData name="Matthieu De Mari" userId="dfb708c9-d8dc-439f-9a3b-c772bf4a311c" providerId="ADAL" clId="{CD3BCE5D-F1D9-409A-9E6B-AD5ABB34863C}" dt="2023-02-07T01:25:50.425" v="54" actId="47"/>
-        <pc:sldMkLst>
-          <pc:docMk/>
-          <pc:sldMk cId="101927766" sldId="403"/>
-        </pc:sldMkLst>
-      </pc:sldChg>
-      <pc:sldChg chg="del">
-        <pc:chgData name="Matthieu De Mari" userId="dfb708c9-d8dc-439f-9a3b-c772bf4a311c" providerId="ADAL" clId="{CD3BCE5D-F1D9-409A-9E6B-AD5ABB34863C}" dt="2023-02-07T01:24:16.370" v="10" actId="47"/>
-        <pc:sldMkLst>
-          <pc:docMk/>
-          <pc:sldMk cId="3140288791" sldId="404"/>
-        </pc:sldMkLst>
-      </pc:sldChg>
-      <pc:sldChg chg="del">
-        <pc:chgData name="Matthieu De Mari" userId="dfb708c9-d8dc-439f-9a3b-c772bf4a311c" providerId="ADAL" clId="{CD3BCE5D-F1D9-409A-9E6B-AD5ABB34863C}" dt="2023-02-07T01:24:10.953" v="5" actId="47"/>
-        <pc:sldMkLst>
-          <pc:docMk/>
-          <pc:sldMk cId="3843402283" sldId="405"/>
-        </pc:sldMkLst>
-      </pc:sldChg>
-      <pc:sldChg chg="del">
-        <pc:chgData name="Matthieu De Mari" userId="dfb708c9-d8dc-439f-9a3b-c772bf4a311c" providerId="ADAL" clId="{CD3BCE5D-F1D9-409A-9E6B-AD5ABB34863C}" dt="2023-02-07T01:24:10.953" v="5" actId="47"/>
-        <pc:sldMkLst>
-          <pc:docMk/>
-          <pc:sldMk cId="3358927626" sldId="406"/>
-        </pc:sldMkLst>
-      </pc:sldChg>
-      <pc:sldChg chg="del">
-        <pc:chgData name="Matthieu De Mari" userId="dfb708c9-d8dc-439f-9a3b-c772bf4a311c" providerId="ADAL" clId="{CD3BCE5D-F1D9-409A-9E6B-AD5ABB34863C}" dt="2023-02-07T01:24:12.156" v="6" actId="47"/>
-        <pc:sldMkLst>
-          <pc:docMk/>
-          <pc:sldMk cId="1925028509" sldId="407"/>
-        </pc:sldMkLst>
-      </pc:sldChg>
-      <pc:sldChg chg="del">
-        <pc:chgData name="Matthieu De Mari" userId="dfb708c9-d8dc-439f-9a3b-c772bf4a311c" providerId="ADAL" clId="{CD3BCE5D-F1D9-409A-9E6B-AD5ABB34863C}" dt="2023-02-07T01:24:12.156" v="6" actId="47"/>
-        <pc:sldMkLst>
-          <pc:docMk/>
-          <pc:sldMk cId="3458396453" sldId="408"/>
-        </pc:sldMkLst>
-      </pc:sldChg>
-      <pc:sldChg chg="del">
-        <pc:chgData name="Matthieu De Mari" userId="dfb708c9-d8dc-439f-9a3b-c772bf4a311c" providerId="ADAL" clId="{CD3BCE5D-F1D9-409A-9E6B-AD5ABB34863C}" dt="2023-02-07T01:24:12.156" v="6" actId="47"/>
-        <pc:sldMkLst>
-          <pc:docMk/>
-          <pc:sldMk cId="1339110510" sldId="409"/>
-        </pc:sldMkLst>
-      </pc:sldChg>
-      <pc:sldChg chg="del">
-        <pc:chgData name="Matthieu De Mari" userId="dfb708c9-d8dc-439f-9a3b-c772bf4a311c" providerId="ADAL" clId="{CD3BCE5D-F1D9-409A-9E6B-AD5ABB34863C}" dt="2023-02-07T01:24:12.156" v="6" actId="47"/>
-        <pc:sldMkLst>
-          <pc:docMk/>
-          <pc:sldMk cId="1178350440" sldId="410"/>
-        </pc:sldMkLst>
-      </pc:sldChg>
-      <pc:sldChg chg="del">
-        <pc:chgData name="Matthieu De Mari" userId="dfb708c9-d8dc-439f-9a3b-c772bf4a311c" providerId="ADAL" clId="{CD3BCE5D-F1D9-409A-9E6B-AD5ABB34863C}" dt="2023-02-07T01:24:12.156" v="6" actId="47"/>
-        <pc:sldMkLst>
-          <pc:docMk/>
-          <pc:sldMk cId="2149409242" sldId="411"/>
-        </pc:sldMkLst>
-      </pc:sldChg>
-      <pc:sldChg chg="del">
-        <pc:chgData name="Matthieu De Mari" userId="dfb708c9-d8dc-439f-9a3b-c772bf4a311c" providerId="ADAL" clId="{CD3BCE5D-F1D9-409A-9E6B-AD5ABB34863C}" dt="2023-02-07T01:24:12.156" v="6" actId="47"/>
-        <pc:sldMkLst>
-          <pc:docMk/>
-          <pc:sldMk cId="1857929555" sldId="412"/>
-        </pc:sldMkLst>
-      </pc:sldChg>
-      <pc:sldChg chg="del">
-        <pc:chgData name="Matthieu De Mari" userId="dfb708c9-d8dc-439f-9a3b-c772bf4a311c" providerId="ADAL" clId="{CD3BCE5D-F1D9-409A-9E6B-AD5ABB34863C}" dt="2023-02-07T01:24:12.156" v="6" actId="47"/>
-        <pc:sldMkLst>
-          <pc:docMk/>
-          <pc:sldMk cId="3179138343" sldId="413"/>
-        </pc:sldMkLst>
-      </pc:sldChg>
-      <pc:sldChg chg="del">
-        <pc:chgData name="Matthieu De Mari" userId="dfb708c9-d8dc-439f-9a3b-c772bf4a311c" providerId="ADAL" clId="{CD3BCE5D-F1D9-409A-9E6B-AD5ABB34863C}" dt="2023-02-07T01:24:13.097" v="7" actId="47"/>
-        <pc:sldMkLst>
-          <pc:docMk/>
-          <pc:sldMk cId="1324969895" sldId="414"/>
-        </pc:sldMkLst>
-      </pc:sldChg>
-      <pc:sldChg chg="del">
-        <pc:chgData name="Matthieu De Mari" userId="dfb708c9-d8dc-439f-9a3b-c772bf4a311c" providerId="ADAL" clId="{CD3BCE5D-F1D9-409A-9E6B-AD5ABB34863C}" dt="2023-02-07T01:24:13.097" v="7" actId="47"/>
-        <pc:sldMkLst>
-          <pc:docMk/>
-          <pc:sldMk cId="481166971" sldId="415"/>
-        </pc:sldMkLst>
-      </pc:sldChg>
-      <pc:sldChg chg="del">
-        <pc:chgData name="Matthieu De Mari" userId="dfb708c9-d8dc-439f-9a3b-c772bf4a311c" providerId="ADAL" clId="{CD3BCE5D-F1D9-409A-9E6B-AD5ABB34863C}" dt="2023-02-07T01:24:13.097" v="7" actId="47"/>
-        <pc:sldMkLst>
-          <pc:docMk/>
-          <pc:sldMk cId="4050702309" sldId="416"/>
-        </pc:sldMkLst>
-      </pc:sldChg>
-      <pc:sldChg chg="del">
-        <pc:chgData name="Matthieu De Mari" userId="dfb708c9-d8dc-439f-9a3b-c772bf4a311c" providerId="ADAL" clId="{CD3BCE5D-F1D9-409A-9E6B-AD5ABB34863C}" dt="2023-02-07T01:24:13.097" v="7" actId="47"/>
-        <pc:sldMkLst>
-          <pc:docMk/>
-          <pc:sldMk cId="4249457938" sldId="417"/>
-        </pc:sldMkLst>
-      </pc:sldChg>
-      <pc:sldChg chg="del">
-        <pc:chgData name="Matthieu De Mari" userId="dfb708c9-d8dc-439f-9a3b-c772bf4a311c" providerId="ADAL" clId="{CD3BCE5D-F1D9-409A-9E6B-AD5ABB34863C}" dt="2023-02-07T01:24:13.097" v="7" actId="47"/>
-        <pc:sldMkLst>
-          <pc:docMk/>
-          <pc:sldMk cId="3310153579" sldId="418"/>
-        </pc:sldMkLst>
-      </pc:sldChg>
-      <pc:sldChg chg="del">
-        <pc:chgData name="Matthieu De Mari" userId="dfb708c9-d8dc-439f-9a3b-c772bf4a311c" providerId="ADAL" clId="{CD3BCE5D-F1D9-409A-9E6B-AD5ABB34863C}" dt="2023-02-07T01:24:13.097" v="7" actId="47"/>
-        <pc:sldMkLst>
-          <pc:docMk/>
-          <pc:sldMk cId="1163891923" sldId="419"/>
-        </pc:sldMkLst>
-      </pc:sldChg>
-      <pc:sldChg chg="del">
-        <pc:chgData name="Matthieu De Mari" userId="dfb708c9-d8dc-439f-9a3b-c772bf4a311c" providerId="ADAL" clId="{CD3BCE5D-F1D9-409A-9E6B-AD5ABB34863C}" dt="2023-02-07T01:24:13.097" v="7" actId="47"/>
-        <pc:sldMkLst>
-          <pc:docMk/>
-          <pc:sldMk cId="1773283043" sldId="420"/>
-        </pc:sldMkLst>
-      </pc:sldChg>
-      <pc:sldChg chg="del">
-        <pc:chgData name="Matthieu De Mari" userId="dfb708c9-d8dc-439f-9a3b-c772bf4a311c" providerId="ADAL" clId="{CD3BCE5D-F1D9-409A-9E6B-AD5ABB34863C}" dt="2023-02-07T01:24:14.869" v="8" actId="47"/>
-        <pc:sldMkLst>
-          <pc:docMk/>
-          <pc:sldMk cId="346749718" sldId="421"/>
-        </pc:sldMkLst>
-      </pc:sldChg>
-      <pc:sldChg chg="del">
-        <pc:chgData name="Matthieu De Mari" userId="dfb708c9-d8dc-439f-9a3b-c772bf4a311c" providerId="ADAL" clId="{CD3BCE5D-F1D9-409A-9E6B-AD5ABB34863C}" dt="2023-02-07T01:24:14.869" v="8" actId="47"/>
-        <pc:sldMkLst>
-          <pc:docMk/>
-          <pc:sldMk cId="2747530419" sldId="422"/>
-        </pc:sldMkLst>
-      </pc:sldChg>
-      <pc:sldChg chg="del">
-        <pc:chgData name="Matthieu De Mari" userId="dfb708c9-d8dc-439f-9a3b-c772bf4a311c" providerId="ADAL" clId="{CD3BCE5D-F1D9-409A-9E6B-AD5ABB34863C}" dt="2023-02-07T01:24:15.636" v="9" actId="47"/>
-        <pc:sldMkLst>
-          <pc:docMk/>
-          <pc:sldMk cId="4145254973" sldId="423"/>
-        </pc:sldMkLst>
-      </pc:sldChg>
-      <pc:sldChg chg="del">
-        <pc:chgData name="Matthieu De Mari" userId="dfb708c9-d8dc-439f-9a3b-c772bf4a311c" providerId="ADAL" clId="{CD3BCE5D-F1D9-409A-9E6B-AD5ABB34863C}" dt="2023-02-07T01:24:15.636" v="9" actId="47"/>
-        <pc:sldMkLst>
-          <pc:docMk/>
-          <pc:sldMk cId="1513778887" sldId="424"/>
-        </pc:sldMkLst>
-      </pc:sldChg>
-      <pc:sldChg chg="del">
-        <pc:chgData name="Matthieu De Mari" userId="dfb708c9-d8dc-439f-9a3b-c772bf4a311c" providerId="ADAL" clId="{CD3BCE5D-F1D9-409A-9E6B-AD5ABB34863C}" dt="2023-02-07T01:24:15.636" v="9" actId="47"/>
-        <pc:sldMkLst>
-          <pc:docMk/>
-          <pc:sldMk cId="548772636" sldId="425"/>
-        </pc:sldMkLst>
-      </pc:sldChg>
-      <pc:sldChg chg="del">
-        <pc:chgData name="Matthieu De Mari" userId="dfb708c9-d8dc-439f-9a3b-c772bf4a311c" providerId="ADAL" clId="{CD3BCE5D-F1D9-409A-9E6B-AD5ABB34863C}" dt="2023-02-07T01:24:15.636" v="9" actId="47"/>
-        <pc:sldMkLst>
-          <pc:docMk/>
-          <pc:sldMk cId="995336806" sldId="426"/>
-        </pc:sldMkLst>
-      </pc:sldChg>
-      <pc:sldChg chg="del">
-        <pc:chgData name="Matthieu De Mari" userId="dfb708c9-d8dc-439f-9a3b-c772bf4a311c" providerId="ADAL" clId="{CD3BCE5D-F1D9-409A-9E6B-AD5ABB34863C}" dt="2023-02-07T01:24:07.043" v="4" actId="47"/>
-        <pc:sldMkLst>
-          <pc:docMk/>
-          <pc:sldMk cId="1567954153" sldId="608"/>
-        </pc:sldMkLst>
-      </pc:sldChg>
-      <pc:sldChg chg="del">
-        <pc:chgData name="Matthieu De Mari" userId="dfb708c9-d8dc-439f-9a3b-c772bf4a311c" providerId="ADAL" clId="{CD3BCE5D-F1D9-409A-9E6B-AD5ABB34863C}" dt="2023-02-07T01:24:17.207" v="11" actId="47"/>
-        <pc:sldMkLst>
-          <pc:docMk/>
-          <pc:sldMk cId="1098360026" sldId="646"/>
-        </pc:sldMkLst>
-      </pc:sldChg>
-      <pc:sldChg chg="del">
-        <pc:chgData name="Matthieu De Mari" userId="dfb708c9-d8dc-439f-9a3b-c772bf4a311c" providerId="ADAL" clId="{CD3BCE5D-F1D9-409A-9E6B-AD5ABB34863C}" dt="2023-02-07T01:24:17.207" v="11" actId="47"/>
-        <pc:sldMkLst>
-          <pc:docMk/>
-          <pc:sldMk cId="3471904534" sldId="647"/>
-        </pc:sldMkLst>
-      </pc:sldChg>
-      <pc:sldChg chg="del">
-        <pc:chgData name="Matthieu De Mari" userId="dfb708c9-d8dc-439f-9a3b-c772bf4a311c" providerId="ADAL" clId="{CD3BCE5D-F1D9-409A-9E6B-AD5ABB34863C}" dt="2023-02-07T01:24:17.207" v="11" actId="47"/>
-        <pc:sldMkLst>
-          <pc:docMk/>
-          <pc:sldMk cId="1172112343" sldId="648"/>
-        </pc:sldMkLst>
-      </pc:sldChg>
-      <pc:sldChg chg="del">
-        <pc:chgData name="Matthieu De Mari" userId="dfb708c9-d8dc-439f-9a3b-c772bf4a311c" providerId="ADAL" clId="{CD3BCE5D-F1D9-409A-9E6B-AD5ABB34863C}" dt="2023-02-07T01:24:17.207" v="11" actId="47"/>
-        <pc:sldMkLst>
-          <pc:docMk/>
-          <pc:sldMk cId="1146881653" sldId="649"/>
-        </pc:sldMkLst>
-      </pc:sldChg>
-      <pc:sldChg chg="add del ord">
-        <pc:chgData name="Matthieu De Mari" userId="dfb708c9-d8dc-439f-9a3b-c772bf4a311c" providerId="ADAL" clId="{CD3BCE5D-F1D9-409A-9E6B-AD5ABB34863C}" dt="2023-02-07T01:25:09.366" v="44"/>
-        <pc:sldMkLst>
-          <pc:docMk/>
-          <pc:sldMk cId="2437975891" sldId="650"/>
-        </pc:sldMkLst>
-      </pc:sldChg>
-      <pc:sldChg chg="add del">
-        <pc:chgData name="Matthieu De Mari" userId="dfb708c9-d8dc-439f-9a3b-c772bf4a311c" providerId="ADAL" clId="{CD3BCE5D-F1D9-409A-9E6B-AD5ABB34863C}" dt="2023-02-07T01:25:01.801" v="40" actId="47"/>
-        <pc:sldMkLst>
-          <pc:docMk/>
-          <pc:sldMk cId="2710721176" sldId="651"/>
-        </pc:sldMkLst>
-      </pc:sldChg>
-      <pc:sldChg chg="add del">
-        <pc:chgData name="Matthieu De Mari" userId="dfb708c9-d8dc-439f-9a3b-c772bf4a311c" providerId="ADAL" clId="{CD3BCE5D-F1D9-409A-9E6B-AD5ABB34863C}" dt="2023-02-07T01:25:20.702" v="46" actId="47"/>
-        <pc:sldMkLst>
-          <pc:docMk/>
-          <pc:sldMk cId="2596538432" sldId="652"/>
-        </pc:sldMkLst>
-      </pc:sldChg>
-      <pc:sldChg chg="del">
-        <pc:chgData name="Matthieu De Mari" userId="dfb708c9-d8dc-439f-9a3b-c772bf4a311c" providerId="ADAL" clId="{CD3BCE5D-F1D9-409A-9E6B-AD5ABB34863C}" dt="2023-02-07T01:24:07.043" v="4" actId="47"/>
-        <pc:sldMkLst>
-          <pc:docMk/>
-          <pc:sldMk cId="2525469962" sldId="757"/>
-        </pc:sldMkLst>
-      </pc:sldChg>
-      <pc:sldChg chg="del">
-        <pc:chgData name="Matthieu De Mari" userId="dfb708c9-d8dc-439f-9a3b-c772bf4a311c" providerId="ADAL" clId="{CD3BCE5D-F1D9-409A-9E6B-AD5ABB34863C}" dt="2023-02-07T01:24:07.043" v="4" actId="47"/>
-        <pc:sldMkLst>
-          <pc:docMk/>
-          <pc:sldMk cId="571242276" sldId="758"/>
-        </pc:sldMkLst>
-      </pc:sldChg>
-      <pc:sldChg chg="del">
-        <pc:chgData name="Matthieu De Mari" userId="dfb708c9-d8dc-439f-9a3b-c772bf4a311c" providerId="ADAL" clId="{CD3BCE5D-F1D9-409A-9E6B-AD5ABB34863C}" dt="2023-02-07T01:24:07.043" v="4" actId="47"/>
-        <pc:sldMkLst>
-          <pc:docMk/>
-          <pc:sldMk cId="1598131875" sldId="759"/>
-        </pc:sldMkLst>
-      </pc:sldChg>
-      <pc:sldChg chg="del">
-        <pc:chgData name="Matthieu De Mari" userId="dfb708c9-d8dc-439f-9a3b-c772bf4a311c" providerId="ADAL" clId="{CD3BCE5D-F1D9-409A-9E6B-AD5ABB34863C}" dt="2023-02-07T01:23:59.267" v="1" actId="47"/>
-        <pc:sldMkLst>
-          <pc:docMk/>
-          <pc:sldMk cId="2917324732" sldId="760"/>
-        </pc:sldMkLst>
-      </pc:sldChg>
-      <pc:sldChg chg="add del">
-        <pc:chgData name="Matthieu De Mari" userId="dfb708c9-d8dc-439f-9a3b-c772bf4a311c" providerId="ADAL" clId="{CD3BCE5D-F1D9-409A-9E6B-AD5ABB34863C}" dt="2023-02-07T01:24:46.809" v="34" actId="47"/>
-        <pc:sldMkLst>
-          <pc:docMk/>
-          <pc:sldMk cId="3339699406" sldId="761"/>
-        </pc:sldMkLst>
-      </pc:sldChg>
-      <pc:sldChg chg="add del">
-        <pc:chgData name="Matthieu De Mari" userId="dfb708c9-d8dc-439f-9a3b-c772bf4a311c" providerId="ADAL" clId="{CD3BCE5D-F1D9-409A-9E6B-AD5ABB34863C}" dt="2023-02-07T01:24:46.809" v="34" actId="47"/>
-        <pc:sldMkLst>
-          <pc:docMk/>
-          <pc:sldMk cId="1546007078" sldId="762"/>
-        </pc:sldMkLst>
-      </pc:sldChg>
-      <pc:sldChg chg="add del">
-        <pc:chgData name="Matthieu De Mari" userId="dfb708c9-d8dc-439f-9a3b-c772bf4a311c" providerId="ADAL" clId="{CD3BCE5D-F1D9-409A-9E6B-AD5ABB34863C}" dt="2023-02-07T01:24:46.809" v="34" actId="47"/>
-        <pc:sldMkLst>
-          <pc:docMk/>
-          <pc:sldMk cId="2580175991" sldId="763"/>
-        </pc:sldMkLst>
-      </pc:sldChg>
-      <pc:sldChg chg="modSp add del mod">
-        <pc:chgData name="Matthieu De Mari" userId="dfb708c9-d8dc-439f-9a3b-c772bf4a311c" providerId="ADAL" clId="{CD3BCE5D-F1D9-409A-9E6B-AD5ABB34863C}" dt="2023-02-07T02:34:16.315" v="97" actId="113"/>
-        <pc:sldMkLst>
-          <pc:docMk/>
-          <pc:sldMk cId="1879463264" sldId="764"/>
-        </pc:sldMkLst>
-      </pc:sldChg>
-      <pc:sldChg chg="add del">
-        <pc:chgData name="Matthieu De Mari" userId="dfb708c9-d8dc-439f-9a3b-c772bf4a311c" providerId="ADAL" clId="{CD3BCE5D-F1D9-409A-9E6B-AD5ABB34863C}" dt="2023-02-07T01:24:46.290" v="33" actId="47"/>
-        <pc:sldMkLst>
-          <pc:docMk/>
-          <pc:sldMk cId="1996337912" sldId="765"/>
-        </pc:sldMkLst>
-      </pc:sldChg>
-      <pc:sldChg chg="add del">
-        <pc:chgData name="Matthieu De Mari" userId="dfb708c9-d8dc-439f-9a3b-c772bf4a311c" providerId="ADAL" clId="{CD3BCE5D-F1D9-409A-9E6B-AD5ABB34863C}" dt="2023-02-07T01:24:45.459" v="32" actId="47"/>
-        <pc:sldMkLst>
-          <pc:docMk/>
-          <pc:sldMk cId="1554669076" sldId="766"/>
-        </pc:sldMkLst>
-      </pc:sldChg>
-      <pc:sldChg chg="add del">
-        <pc:chgData name="Matthieu De Mari" userId="dfb708c9-d8dc-439f-9a3b-c772bf4a311c" providerId="ADAL" clId="{CD3BCE5D-F1D9-409A-9E6B-AD5ABB34863C}" dt="2023-02-07T01:24:45.459" v="32" actId="47"/>
-        <pc:sldMkLst>
-          <pc:docMk/>
-          <pc:sldMk cId="887698529" sldId="767"/>
-        </pc:sldMkLst>
-      </pc:sldChg>
-      <pc:sldChg chg="add del">
-        <pc:chgData name="Matthieu De Mari" userId="dfb708c9-d8dc-439f-9a3b-c772bf4a311c" providerId="ADAL" clId="{CD3BCE5D-F1D9-409A-9E6B-AD5ABB34863C}" dt="2023-02-07T01:24:45.459" v="32" actId="47"/>
-        <pc:sldMkLst>
-          <pc:docMk/>
-          <pc:sldMk cId="3101493777" sldId="768"/>
-        </pc:sldMkLst>
-      </pc:sldChg>
-      <pc:sldChg chg="add del">
-        <pc:chgData name="Matthieu De Mari" userId="dfb708c9-d8dc-439f-9a3b-c772bf4a311c" providerId="ADAL" clId="{CD3BCE5D-F1D9-409A-9E6B-AD5ABB34863C}" dt="2023-02-07T01:24:40.039" v="31" actId="47"/>
-        <pc:sldMkLst>
-          <pc:docMk/>
-          <pc:sldMk cId="2909899754" sldId="769"/>
-        </pc:sldMkLst>
-      </pc:sldChg>
-      <pc:sldChg chg="add del">
-        <pc:chgData name="Matthieu De Mari" userId="dfb708c9-d8dc-439f-9a3b-c772bf4a311c" providerId="ADAL" clId="{CD3BCE5D-F1D9-409A-9E6B-AD5ABB34863C}" dt="2023-02-07T01:24:40.039" v="31" actId="47"/>
-        <pc:sldMkLst>
-          <pc:docMk/>
-          <pc:sldMk cId="581091786" sldId="770"/>
-        </pc:sldMkLst>
-      </pc:sldChg>
-      <pc:sldChg chg="add del">
-        <pc:chgData name="Matthieu De Mari" userId="dfb708c9-d8dc-439f-9a3b-c772bf4a311c" providerId="ADAL" clId="{CD3BCE5D-F1D9-409A-9E6B-AD5ABB34863C}" dt="2023-02-07T01:24:40.039" v="31" actId="47"/>
-        <pc:sldMkLst>
-          <pc:docMk/>
-          <pc:sldMk cId="2768410648" sldId="771"/>
-        </pc:sldMkLst>
-      </pc:sldChg>
-      <pc:sldChg chg="add del">
-        <pc:chgData name="Matthieu De Mari" userId="dfb708c9-d8dc-439f-9a3b-c772bf4a311c" providerId="ADAL" clId="{CD3BCE5D-F1D9-409A-9E6B-AD5ABB34863C}" dt="2023-02-07T01:24:40.039" v="31" actId="47"/>
-        <pc:sldMkLst>
-          <pc:docMk/>
-          <pc:sldMk cId="2791462929" sldId="772"/>
-        </pc:sldMkLst>
-      </pc:sldChg>
-      <pc:sldChg chg="add del">
-        <pc:chgData name="Matthieu De Mari" userId="dfb708c9-d8dc-439f-9a3b-c772bf4a311c" providerId="ADAL" clId="{CD3BCE5D-F1D9-409A-9E6B-AD5ABB34863C}" dt="2023-02-07T01:24:40.039" v="31" actId="47"/>
-        <pc:sldMkLst>
-          <pc:docMk/>
-          <pc:sldMk cId="3544439591" sldId="773"/>
-        </pc:sldMkLst>
-      </pc:sldChg>
-      <pc:sldChg chg="add del">
-        <pc:chgData name="Matthieu De Mari" userId="dfb708c9-d8dc-439f-9a3b-c772bf4a311c" providerId="ADAL" clId="{CD3BCE5D-F1D9-409A-9E6B-AD5ABB34863C}" dt="2023-02-07T01:24:40.039" v="31" actId="47"/>
-        <pc:sldMkLst>
-          <pc:docMk/>
-          <pc:sldMk cId="2831341972" sldId="774"/>
-        </pc:sldMkLst>
-      </pc:sldChg>
-      <pc:sldChg chg="add del">
-        <pc:chgData name="Matthieu De Mari" userId="dfb708c9-d8dc-439f-9a3b-c772bf4a311c" providerId="ADAL" clId="{CD3BCE5D-F1D9-409A-9E6B-AD5ABB34863C}" dt="2023-02-07T01:24:39.496" v="30" actId="47"/>
-        <pc:sldMkLst>
-          <pc:docMk/>
-          <pc:sldMk cId="743119883" sldId="775"/>
-        </pc:sldMkLst>
-      </pc:sldChg>
-      <pc:sldChg chg="add del">
-        <pc:chgData name="Matthieu De Mari" userId="dfb708c9-d8dc-439f-9a3b-c772bf4a311c" providerId="ADAL" clId="{CD3BCE5D-F1D9-409A-9E6B-AD5ABB34863C}" dt="2023-02-07T01:24:39.496" v="30" actId="47"/>
-        <pc:sldMkLst>
-          <pc:docMk/>
-          <pc:sldMk cId="1966383991" sldId="776"/>
-        </pc:sldMkLst>
-      </pc:sldChg>
-      <pc:sldChg chg="add del">
-        <pc:chgData name="Matthieu De Mari" userId="dfb708c9-d8dc-439f-9a3b-c772bf4a311c" providerId="ADAL" clId="{CD3BCE5D-F1D9-409A-9E6B-AD5ABB34863C}" dt="2023-02-07T01:24:39.496" v="30" actId="47"/>
-        <pc:sldMkLst>
-          <pc:docMk/>
-          <pc:sldMk cId="3349972987" sldId="777"/>
-        </pc:sldMkLst>
-      </pc:sldChg>
-      <pc:sldChg chg="add del">
-        <pc:chgData name="Matthieu De Mari" userId="dfb708c9-d8dc-439f-9a3b-c772bf4a311c" providerId="ADAL" clId="{CD3BCE5D-F1D9-409A-9E6B-AD5ABB34863C}" dt="2023-02-07T01:24:39.136" v="29" actId="47"/>
-        <pc:sldMkLst>
-          <pc:docMk/>
-          <pc:sldMk cId="4008937125" sldId="778"/>
-        </pc:sldMkLst>
-      </pc:sldChg>
-      <pc:sldChg chg="add del">
-        <pc:chgData name="Matthieu De Mari" userId="dfb708c9-d8dc-439f-9a3b-c772bf4a311c" providerId="ADAL" clId="{CD3BCE5D-F1D9-409A-9E6B-AD5ABB34863C}" dt="2023-02-07T01:24:39.136" v="29" actId="47"/>
-        <pc:sldMkLst>
-          <pc:docMk/>
-          <pc:sldMk cId="1689794110" sldId="779"/>
-        </pc:sldMkLst>
-      </pc:sldChg>
-      <pc:sldChg chg="add del">
-        <pc:chgData name="Matthieu De Mari" userId="dfb708c9-d8dc-439f-9a3b-c772bf4a311c" providerId="ADAL" clId="{CD3BCE5D-F1D9-409A-9E6B-AD5ABB34863C}" dt="2023-02-07T01:24:38.686" v="28" actId="47"/>
-        <pc:sldMkLst>
-          <pc:docMk/>
-          <pc:sldMk cId="2678238830" sldId="780"/>
-        </pc:sldMkLst>
-      </pc:sldChg>
-      <pc:sldChg chg="add del">
-        <pc:chgData name="Matthieu De Mari" userId="dfb708c9-d8dc-439f-9a3b-c772bf4a311c" providerId="ADAL" clId="{CD3BCE5D-F1D9-409A-9E6B-AD5ABB34863C}" dt="2023-02-07T01:24:38.462" v="27" actId="47"/>
-        <pc:sldMkLst>
-          <pc:docMk/>
-          <pc:sldMk cId="3029045816" sldId="781"/>
-        </pc:sldMkLst>
-      </pc:sldChg>
-      <pc:sldChg chg="add del">
-        <pc:chgData name="Matthieu De Mari" userId="dfb708c9-d8dc-439f-9a3b-c772bf4a311c" providerId="ADAL" clId="{CD3BCE5D-F1D9-409A-9E6B-AD5ABB34863C}" dt="2023-02-07T01:24:38.462" v="27" actId="47"/>
-        <pc:sldMkLst>
-          <pc:docMk/>
-          <pc:sldMk cId="278531271" sldId="782"/>
-        </pc:sldMkLst>
-      </pc:sldChg>
-      <pc:sldChg chg="add">
-        <pc:chgData name="Matthieu De Mari" userId="dfb708c9-d8dc-439f-9a3b-c772bf4a311c" providerId="ADAL" clId="{CD3BCE5D-F1D9-409A-9E6B-AD5ABB34863C}" dt="2023-02-07T01:23:57.604" v="0"/>
-        <pc:sldMkLst>
-          <pc:docMk/>
-          <pc:sldMk cId="639852900" sldId="783"/>
-        </pc:sldMkLst>
-      </pc:sldChg>
-      <pc:sldChg chg="add">
-        <pc:chgData name="Matthieu De Mari" userId="dfb708c9-d8dc-439f-9a3b-c772bf4a311c" providerId="ADAL" clId="{CD3BCE5D-F1D9-409A-9E6B-AD5ABB34863C}" dt="2023-02-07T01:23:57.604" v="0"/>
-        <pc:sldMkLst>
-          <pc:docMk/>
-          <pc:sldMk cId="2670805330" sldId="784"/>
-        </pc:sldMkLst>
-      </pc:sldChg>
-      <pc:sldChg chg="add">
-        <pc:chgData name="Matthieu De Mari" userId="dfb708c9-d8dc-439f-9a3b-c772bf4a311c" providerId="ADAL" clId="{CD3BCE5D-F1D9-409A-9E6B-AD5ABB34863C}" dt="2023-02-07T01:23:57.604" v="0"/>
-        <pc:sldMkLst>
-          <pc:docMk/>
-          <pc:sldMk cId="636279122" sldId="785"/>
-        </pc:sldMkLst>
-      </pc:sldChg>
-    </pc:docChg>
-  </pc:docChgLst>
-  <pc:docChgLst>
-    <pc:chgData name="Matthieu De Mari" userId="dfb708c9-d8dc-439f-9a3b-c772bf4a311c" providerId="ADAL" clId="{8EE40018-26BD-4A7B-8D17-70AC8417C2D0}"/>
-    <pc:docChg chg="undo custSel addSld delSld modSld addSection delSection modSection">
-      <pc:chgData name="Matthieu De Mari" userId="dfb708c9-d8dc-439f-9a3b-c772bf4a311c" providerId="ADAL" clId="{8EE40018-26BD-4A7B-8D17-70AC8417C2D0}" dt="2022-11-16T06:55:05.435" v="67" actId="47"/>
-      <pc:docMkLst>
-        <pc:docMk/>
-      </pc:docMkLst>
-      <pc:sldChg chg="modSp mod">
-        <pc:chgData name="Matthieu De Mari" userId="dfb708c9-d8dc-439f-9a3b-c772bf4a311c" providerId="ADAL" clId="{8EE40018-26BD-4A7B-8D17-70AC8417C2D0}" dt="2022-11-16T06:55:04.205" v="66" actId="20577"/>
-        <pc:sldMkLst>
-          <pc:docMk/>
-          <pc:sldMk cId="3442501962" sldId="257"/>
-        </pc:sldMkLst>
-      </pc:sldChg>
-      <pc:sldChg chg="del">
-        <pc:chgData name="Matthieu De Mari" userId="dfb708c9-d8dc-439f-9a3b-c772bf4a311c" providerId="ADAL" clId="{8EE40018-26BD-4A7B-8D17-70AC8417C2D0}" dt="2022-11-16T06:54:01.441" v="17" actId="47"/>
-        <pc:sldMkLst>
-          <pc:docMk/>
-          <pc:sldMk cId="3556835968" sldId="261"/>
-        </pc:sldMkLst>
-      </pc:sldChg>
-      <pc:sldChg chg="modSp mod">
-        <pc:chgData name="Matthieu De Mari" userId="dfb708c9-d8dc-439f-9a3b-c772bf4a311c" providerId="ADAL" clId="{8EE40018-26BD-4A7B-8D17-70AC8417C2D0}" dt="2022-11-16T06:54:47.612" v="47" actId="20577"/>
-        <pc:sldMkLst>
-          <pc:docMk/>
-          <pc:sldMk cId="1893873068" sldId="266"/>
-        </pc:sldMkLst>
-      </pc:sldChg>
-      <pc:sldChg chg="modSp mod">
-        <pc:chgData name="Matthieu De Mari" userId="dfb708c9-d8dc-439f-9a3b-c772bf4a311c" providerId="ADAL" clId="{8EE40018-26BD-4A7B-8D17-70AC8417C2D0}" dt="2022-11-16T06:54:56.797" v="60" actId="20577"/>
-        <pc:sldMkLst>
-          <pc:docMk/>
-          <pc:sldMk cId="3880949074" sldId="267"/>
-        </pc:sldMkLst>
-      </pc:sldChg>
-      <pc:sldChg chg="del">
-        <pc:chgData name="Matthieu De Mari" userId="dfb708c9-d8dc-439f-9a3b-c772bf4a311c" providerId="ADAL" clId="{8EE40018-26BD-4A7B-8D17-70AC8417C2D0}" dt="2022-11-16T06:54:02.421" v="18" actId="47"/>
-        <pc:sldMkLst>
-          <pc:docMk/>
-          <pc:sldMk cId="969289828" sldId="271"/>
-        </pc:sldMkLst>
-      </pc:sldChg>
-      <pc:sldChg chg="del">
-        <pc:chgData name="Matthieu De Mari" userId="dfb708c9-d8dc-439f-9a3b-c772bf4a311c" providerId="ADAL" clId="{8EE40018-26BD-4A7B-8D17-70AC8417C2D0}" dt="2022-11-16T06:54:02.421" v="18" actId="47"/>
-        <pc:sldMkLst>
-          <pc:docMk/>
-          <pc:sldMk cId="543657650" sldId="273"/>
-        </pc:sldMkLst>
-      </pc:sldChg>
-      <pc:sldChg chg="del">
-        <pc:chgData name="Matthieu De Mari" userId="dfb708c9-d8dc-439f-9a3b-c772bf4a311c" providerId="ADAL" clId="{8EE40018-26BD-4A7B-8D17-70AC8417C2D0}" dt="2022-11-16T06:54:01.441" v="17" actId="47"/>
-        <pc:sldMkLst>
-          <pc:docMk/>
-          <pc:sldMk cId="3687792543" sldId="275"/>
-        </pc:sldMkLst>
-      </pc:sldChg>
-      <pc:sldChg chg="del">
-        <pc:chgData name="Matthieu De Mari" userId="dfb708c9-d8dc-439f-9a3b-c772bf4a311c" providerId="ADAL" clId="{8EE40018-26BD-4A7B-8D17-70AC8417C2D0}" dt="2022-11-16T06:54:03.510" v="19" actId="47"/>
-        <pc:sldMkLst>
-          <pc:docMk/>
-          <pc:sldMk cId="1852878019" sldId="276"/>
-        </pc:sldMkLst>
-      </pc:sldChg>
-      <pc:sldChg chg="del">
-        <pc:chgData name="Matthieu De Mari" userId="dfb708c9-d8dc-439f-9a3b-c772bf4a311c" providerId="ADAL" clId="{8EE40018-26BD-4A7B-8D17-70AC8417C2D0}" dt="2022-11-16T06:54:02.421" v="18" actId="47"/>
-        <pc:sldMkLst>
-          <pc:docMk/>
-          <pc:sldMk cId="355509003" sldId="278"/>
-        </pc:sldMkLst>
-      </pc:sldChg>
-      <pc:sldChg chg="del">
-        <pc:chgData name="Matthieu De Mari" userId="dfb708c9-d8dc-439f-9a3b-c772bf4a311c" providerId="ADAL" clId="{8EE40018-26BD-4A7B-8D17-70AC8417C2D0}" dt="2022-11-16T06:54:02.421" v="18" actId="47"/>
-        <pc:sldMkLst>
-          <pc:docMk/>
-          <pc:sldMk cId="3873470932" sldId="280"/>
-        </pc:sldMkLst>
-      </pc:sldChg>
-      <pc:sldChg chg="del">
-        <pc:chgData name="Matthieu De Mari" userId="dfb708c9-d8dc-439f-9a3b-c772bf4a311c" providerId="ADAL" clId="{8EE40018-26BD-4A7B-8D17-70AC8417C2D0}" dt="2022-11-16T06:54:02.421" v="18" actId="47"/>
-        <pc:sldMkLst>
-          <pc:docMk/>
-          <pc:sldMk cId="3477464442" sldId="281"/>
-        </pc:sldMkLst>
-      </pc:sldChg>
-      <pc:sldChg chg="del">
-        <pc:chgData name="Matthieu De Mari" userId="dfb708c9-d8dc-439f-9a3b-c772bf4a311c" providerId="ADAL" clId="{8EE40018-26BD-4A7B-8D17-70AC8417C2D0}" dt="2022-11-16T06:54:02.421" v="18" actId="47"/>
-        <pc:sldMkLst>
-          <pc:docMk/>
-          <pc:sldMk cId="4219540979" sldId="282"/>
-        </pc:sldMkLst>
-      </pc:sldChg>
-      <pc:sldChg chg="modSp del mod">
-        <pc:chgData name="Matthieu De Mari" userId="dfb708c9-d8dc-439f-9a3b-c772bf4a311c" providerId="ADAL" clId="{8EE40018-26BD-4A7B-8D17-70AC8417C2D0}" dt="2022-11-16T06:55:05.435" v="67" actId="47"/>
-        <pc:sldMkLst>
-          <pc:docMk/>
-          <pc:sldMk cId="2071167148" sldId="284"/>
-        </pc:sldMkLst>
-      </pc:sldChg>
-      <pc:sldChg chg="del">
-        <pc:chgData name="Matthieu De Mari" userId="dfb708c9-d8dc-439f-9a3b-c772bf4a311c" providerId="ADAL" clId="{8EE40018-26BD-4A7B-8D17-70AC8417C2D0}" dt="2022-11-16T06:54:14.637" v="28" actId="47"/>
-        <pc:sldMkLst>
-          <pc:docMk/>
-          <pc:sldMk cId="3743280645" sldId="285"/>
-        </pc:sldMkLst>
-      </pc:sldChg>
-      <pc:sldChg chg="del">
-        <pc:chgData name="Matthieu De Mari" userId="dfb708c9-d8dc-439f-9a3b-c772bf4a311c" providerId="ADAL" clId="{8EE40018-26BD-4A7B-8D17-70AC8417C2D0}" dt="2022-11-16T06:54:02.421" v="18" actId="47"/>
-        <pc:sldMkLst>
-          <pc:docMk/>
-          <pc:sldMk cId="2640130553" sldId="286"/>
-        </pc:sldMkLst>
-      </pc:sldChg>
-      <pc:sldChg chg="del">
-        <pc:chgData name="Matthieu De Mari" userId="dfb708c9-d8dc-439f-9a3b-c772bf4a311c" providerId="ADAL" clId="{8EE40018-26BD-4A7B-8D17-70AC8417C2D0}" dt="2022-11-16T06:54:03.510" v="19" actId="47"/>
-        <pc:sldMkLst>
-          <pc:docMk/>
-          <pc:sldMk cId="3356285317" sldId="289"/>
-        </pc:sldMkLst>
-      </pc:sldChg>
-      <pc:sldChg chg="del">
-        <pc:chgData name="Matthieu De Mari" userId="dfb708c9-d8dc-439f-9a3b-c772bf4a311c" providerId="ADAL" clId="{8EE40018-26BD-4A7B-8D17-70AC8417C2D0}" dt="2022-11-16T06:54:03.510" v="19" actId="47"/>
-        <pc:sldMkLst>
-          <pc:docMk/>
-          <pc:sldMk cId="473860244" sldId="290"/>
-        </pc:sldMkLst>
-      </pc:sldChg>
-      <pc:sldChg chg="del">
-        <pc:chgData name="Matthieu De Mari" userId="dfb708c9-d8dc-439f-9a3b-c772bf4a311c" providerId="ADAL" clId="{8EE40018-26BD-4A7B-8D17-70AC8417C2D0}" dt="2022-11-16T06:54:03.510" v="19" actId="47"/>
-        <pc:sldMkLst>
-          <pc:docMk/>
-          <pc:sldMk cId="290213158" sldId="291"/>
-        </pc:sldMkLst>
-      </pc:sldChg>
-      <pc:sldChg chg="del">
-        <pc:chgData name="Matthieu De Mari" userId="dfb708c9-d8dc-439f-9a3b-c772bf4a311c" providerId="ADAL" clId="{8EE40018-26BD-4A7B-8D17-70AC8417C2D0}" dt="2022-11-16T06:54:03.510" v="19" actId="47"/>
-        <pc:sldMkLst>
-          <pc:docMk/>
-          <pc:sldMk cId="3717810270" sldId="292"/>
-        </pc:sldMkLst>
-      </pc:sldChg>
-      <pc:sldChg chg="del">
-        <pc:chgData name="Matthieu De Mari" userId="dfb708c9-d8dc-439f-9a3b-c772bf4a311c" providerId="ADAL" clId="{8EE40018-26BD-4A7B-8D17-70AC8417C2D0}" dt="2022-11-16T06:54:03.510" v="19" actId="47"/>
-        <pc:sldMkLst>
-          <pc:docMk/>
-          <pc:sldMk cId="2783948156" sldId="293"/>
-        </pc:sldMkLst>
-      </pc:sldChg>
-      <pc:sldChg chg="del">
-        <pc:chgData name="Matthieu De Mari" userId="dfb708c9-d8dc-439f-9a3b-c772bf4a311c" providerId="ADAL" clId="{8EE40018-26BD-4A7B-8D17-70AC8417C2D0}" dt="2022-11-16T06:54:04.458" v="20" actId="47"/>
-        <pc:sldMkLst>
-          <pc:docMk/>
-          <pc:sldMk cId="4179829315" sldId="294"/>
-        </pc:sldMkLst>
-      </pc:sldChg>
-      <pc:sldChg chg="del">
-        <pc:chgData name="Matthieu De Mari" userId="dfb708c9-d8dc-439f-9a3b-c772bf4a311c" providerId="ADAL" clId="{8EE40018-26BD-4A7B-8D17-70AC8417C2D0}" dt="2022-11-16T06:54:12.971" v="26" actId="47"/>
-        <pc:sldMkLst>
-          <pc:docMk/>
-          <pc:sldMk cId="709624762" sldId="295"/>
-        </pc:sldMkLst>
-      </pc:sldChg>
-      <pc:sldChg chg="del">
-        <pc:chgData name="Matthieu De Mari" userId="dfb708c9-d8dc-439f-9a3b-c772bf4a311c" providerId="ADAL" clId="{8EE40018-26BD-4A7B-8D17-70AC8417C2D0}" dt="2022-11-16T06:54:11.293" v="25" actId="47"/>
-        <pc:sldMkLst>
-          <pc:docMk/>
-          <pc:sldMk cId="2576857052" sldId="297"/>
-        </pc:sldMkLst>
-      </pc:sldChg>
-      <pc:sldChg chg="del">
-        <pc:chgData name="Matthieu De Mari" userId="dfb708c9-d8dc-439f-9a3b-c772bf4a311c" providerId="ADAL" clId="{8EE40018-26BD-4A7B-8D17-70AC8417C2D0}" dt="2022-11-16T06:54:04.458" v="20" actId="47"/>
-        <pc:sldMkLst>
-          <pc:docMk/>
-          <pc:sldMk cId="1885656403" sldId="298"/>
-        </pc:sldMkLst>
-      </pc:sldChg>
-      <pc:sldChg chg="del">
-        <pc:chgData name="Matthieu De Mari" userId="dfb708c9-d8dc-439f-9a3b-c772bf4a311c" providerId="ADAL" clId="{8EE40018-26BD-4A7B-8D17-70AC8417C2D0}" dt="2022-11-16T06:54:04.458" v="20" actId="47"/>
-        <pc:sldMkLst>
-          <pc:docMk/>
-          <pc:sldMk cId="3768793426" sldId="299"/>
-        </pc:sldMkLst>
-      </pc:sldChg>
-      <pc:sldChg chg="del">
-        <pc:chgData name="Matthieu De Mari" userId="dfb708c9-d8dc-439f-9a3b-c772bf4a311c" providerId="ADAL" clId="{8EE40018-26BD-4A7B-8D17-70AC8417C2D0}" dt="2022-11-16T06:54:07.519" v="22" actId="47"/>
-        <pc:sldMkLst>
-          <pc:docMk/>
-          <pc:sldMk cId="902380433" sldId="300"/>
-        </pc:sldMkLst>
-      </pc:sldChg>
-      <pc:sldChg chg="del">
-        <pc:chgData name="Matthieu De Mari" userId="dfb708c9-d8dc-439f-9a3b-c772bf4a311c" providerId="ADAL" clId="{8EE40018-26BD-4A7B-8D17-70AC8417C2D0}" dt="2022-11-16T06:54:08.404" v="23" actId="47"/>
-        <pc:sldMkLst>
-          <pc:docMk/>
-          <pc:sldMk cId="2202284175" sldId="301"/>
-        </pc:sldMkLst>
-      </pc:sldChg>
-      <pc:sldChg chg="del">
-        <pc:chgData name="Matthieu De Mari" userId="dfb708c9-d8dc-439f-9a3b-c772bf4a311c" providerId="ADAL" clId="{8EE40018-26BD-4A7B-8D17-70AC8417C2D0}" dt="2022-11-16T06:54:09.190" v="24" actId="47"/>
-        <pc:sldMkLst>
-          <pc:docMk/>
-          <pc:sldMk cId="1547433389" sldId="302"/>
-        </pc:sldMkLst>
-      </pc:sldChg>
-      <pc:sldChg chg="del">
-        <pc:chgData name="Matthieu De Mari" userId="dfb708c9-d8dc-439f-9a3b-c772bf4a311c" providerId="ADAL" clId="{8EE40018-26BD-4A7B-8D17-70AC8417C2D0}" dt="2022-11-16T06:54:04.458" v="20" actId="47"/>
-        <pc:sldMkLst>
-          <pc:docMk/>
-          <pc:sldMk cId="3335250243" sldId="303"/>
-        </pc:sldMkLst>
-      </pc:sldChg>
-      <pc:sldChg chg="del">
-        <pc:chgData name="Matthieu De Mari" userId="dfb708c9-d8dc-439f-9a3b-c772bf4a311c" providerId="ADAL" clId="{8EE40018-26BD-4A7B-8D17-70AC8417C2D0}" dt="2022-11-16T06:54:03.510" v="19" actId="47"/>
-        <pc:sldMkLst>
-          <pc:docMk/>
-          <pc:sldMk cId="349456406" sldId="305"/>
-        </pc:sldMkLst>
-      </pc:sldChg>
-      <pc:sldChg chg="del">
-        <pc:chgData name="Matthieu De Mari" userId="dfb708c9-d8dc-439f-9a3b-c772bf4a311c" providerId="ADAL" clId="{8EE40018-26BD-4A7B-8D17-70AC8417C2D0}" dt="2022-11-16T06:54:06.554" v="21" actId="47"/>
-        <pc:sldMkLst>
-          <pc:docMk/>
-          <pc:sldMk cId="1917974936" sldId="307"/>
-        </pc:sldMkLst>
-      </pc:sldChg>
-      <pc:sldChg chg="del">
-        <pc:chgData name="Matthieu De Mari" userId="dfb708c9-d8dc-439f-9a3b-c772bf4a311c" providerId="ADAL" clId="{8EE40018-26BD-4A7B-8D17-70AC8417C2D0}" dt="2022-11-16T06:54:06.554" v="21" actId="47"/>
-        <pc:sldMkLst>
-          <pc:docMk/>
-          <pc:sldMk cId="2278752964" sldId="309"/>
-        </pc:sldMkLst>
-      </pc:sldChg>
-      <pc:sldChg chg="del">
-        <pc:chgData name="Matthieu De Mari" userId="dfb708c9-d8dc-439f-9a3b-c772bf4a311c" providerId="ADAL" clId="{8EE40018-26BD-4A7B-8D17-70AC8417C2D0}" dt="2022-11-16T06:54:06.554" v="21" actId="47"/>
-        <pc:sldMkLst>
-          <pc:docMk/>
-          <pc:sldMk cId="3317882412" sldId="310"/>
-        </pc:sldMkLst>
-      </pc:sldChg>
-      <pc:sldChg chg="del">
-        <pc:chgData name="Matthieu De Mari" userId="dfb708c9-d8dc-439f-9a3b-c772bf4a311c" providerId="ADAL" clId="{8EE40018-26BD-4A7B-8D17-70AC8417C2D0}" dt="2022-11-16T06:54:06.554" v="21" actId="47"/>
-        <pc:sldMkLst>
-          <pc:docMk/>
-          <pc:sldMk cId="3051144984" sldId="311"/>
-        </pc:sldMkLst>
-      </pc:sldChg>
-      <pc:sldChg chg="del">
-        <pc:chgData name="Matthieu De Mari" userId="dfb708c9-d8dc-439f-9a3b-c772bf4a311c" providerId="ADAL" clId="{8EE40018-26BD-4A7B-8D17-70AC8417C2D0}" dt="2022-11-16T06:54:06.554" v="21" actId="47"/>
-        <pc:sldMkLst>
-          <pc:docMk/>
-          <pc:sldMk cId="666448182" sldId="313"/>
-        </pc:sldMkLst>
-      </pc:sldChg>
-      <pc:sldChg chg="del">
-        <pc:chgData name="Matthieu De Mari" userId="dfb708c9-d8dc-439f-9a3b-c772bf4a311c" providerId="ADAL" clId="{8EE40018-26BD-4A7B-8D17-70AC8417C2D0}" dt="2022-11-16T06:54:06.554" v="21" actId="47"/>
-        <pc:sldMkLst>
-          <pc:docMk/>
-          <pc:sldMk cId="1701431758" sldId="314"/>
-        </pc:sldMkLst>
-      </pc:sldChg>
-      <pc:sldChg chg="del">
-        <pc:chgData name="Matthieu De Mari" userId="dfb708c9-d8dc-439f-9a3b-c772bf4a311c" providerId="ADAL" clId="{8EE40018-26BD-4A7B-8D17-70AC8417C2D0}" dt="2022-11-16T06:54:06.554" v="21" actId="47"/>
-        <pc:sldMkLst>
-          <pc:docMk/>
-          <pc:sldMk cId="1813469429" sldId="315"/>
-        </pc:sldMkLst>
-      </pc:sldChg>
-      <pc:sldChg chg="del">
-        <pc:chgData name="Matthieu De Mari" userId="dfb708c9-d8dc-439f-9a3b-c772bf4a311c" providerId="ADAL" clId="{8EE40018-26BD-4A7B-8D17-70AC8417C2D0}" dt="2022-11-16T06:54:07.519" v="22" actId="47"/>
-        <pc:sldMkLst>
-          <pc:docMk/>
-          <pc:sldMk cId="3619476332" sldId="316"/>
-        </pc:sldMkLst>
-      </pc:sldChg>
-      <pc:sldChg chg="del">
-        <pc:chgData name="Matthieu De Mari" userId="dfb708c9-d8dc-439f-9a3b-c772bf4a311c" providerId="ADAL" clId="{8EE40018-26BD-4A7B-8D17-70AC8417C2D0}" dt="2022-11-16T06:54:07.519" v="22" actId="47"/>
-        <pc:sldMkLst>
-          <pc:docMk/>
-          <pc:sldMk cId="3133188960" sldId="317"/>
-        </pc:sldMkLst>
-      </pc:sldChg>
-      <pc:sldChg chg="del">
-        <pc:chgData name="Matthieu De Mari" userId="dfb708c9-d8dc-439f-9a3b-c772bf4a311c" providerId="ADAL" clId="{8EE40018-26BD-4A7B-8D17-70AC8417C2D0}" dt="2022-11-16T06:54:07.519" v="22" actId="47"/>
-        <pc:sldMkLst>
-          <pc:docMk/>
-          <pc:sldMk cId="913491245" sldId="318"/>
-        </pc:sldMkLst>
-      </pc:sldChg>
-      <pc:sldChg chg="del">
-        <pc:chgData name="Matthieu De Mari" userId="dfb708c9-d8dc-439f-9a3b-c772bf4a311c" providerId="ADAL" clId="{8EE40018-26BD-4A7B-8D17-70AC8417C2D0}" dt="2022-11-16T06:54:07.519" v="22" actId="47"/>
-        <pc:sldMkLst>
-          <pc:docMk/>
-          <pc:sldMk cId="369927457" sldId="319"/>
-        </pc:sldMkLst>
-      </pc:sldChg>
-      <pc:sldChg chg="del">
-        <pc:chgData name="Matthieu De Mari" userId="dfb708c9-d8dc-439f-9a3b-c772bf4a311c" providerId="ADAL" clId="{8EE40018-26BD-4A7B-8D17-70AC8417C2D0}" dt="2022-11-16T06:54:07.519" v="22" actId="47"/>
-        <pc:sldMkLst>
-          <pc:docMk/>
-          <pc:sldMk cId="868347224" sldId="320"/>
-        </pc:sldMkLst>
-      </pc:sldChg>
-      <pc:sldChg chg="del">
-        <pc:chgData name="Matthieu De Mari" userId="dfb708c9-d8dc-439f-9a3b-c772bf4a311c" providerId="ADAL" clId="{8EE40018-26BD-4A7B-8D17-70AC8417C2D0}" dt="2022-11-16T06:54:07.519" v="22" actId="47"/>
-        <pc:sldMkLst>
-          <pc:docMk/>
-          <pc:sldMk cId="2901421326" sldId="321"/>
-        </pc:sldMkLst>
-      </pc:sldChg>
-      <pc:sldChg chg="del">
-        <pc:chgData name="Matthieu De Mari" userId="dfb708c9-d8dc-439f-9a3b-c772bf4a311c" providerId="ADAL" clId="{8EE40018-26BD-4A7B-8D17-70AC8417C2D0}" dt="2022-11-16T06:54:07.519" v="22" actId="47"/>
-        <pc:sldMkLst>
-          <pc:docMk/>
-          <pc:sldMk cId="386318379" sldId="322"/>
-        </pc:sldMkLst>
-      </pc:sldChg>
-      <pc:sldChg chg="del">
-        <pc:chgData name="Matthieu De Mari" userId="dfb708c9-d8dc-439f-9a3b-c772bf4a311c" providerId="ADAL" clId="{8EE40018-26BD-4A7B-8D17-70AC8417C2D0}" dt="2022-11-16T06:54:07.519" v="22" actId="47"/>
-        <pc:sldMkLst>
-          <pc:docMk/>
-          <pc:sldMk cId="535785749" sldId="323"/>
-        </pc:sldMkLst>
-      </pc:sldChg>
-      <pc:sldChg chg="del">
-        <pc:chgData name="Matthieu De Mari" userId="dfb708c9-d8dc-439f-9a3b-c772bf4a311c" providerId="ADAL" clId="{8EE40018-26BD-4A7B-8D17-70AC8417C2D0}" dt="2022-11-16T06:54:07.519" v="22" actId="47"/>
-        <pc:sldMkLst>
-          <pc:docMk/>
-          <pc:sldMk cId="573807039" sldId="324"/>
-        </pc:sldMkLst>
-      </pc:sldChg>
-      <pc:sldChg chg="del">
-        <pc:chgData name="Matthieu De Mari" userId="dfb708c9-d8dc-439f-9a3b-c772bf4a311c" providerId="ADAL" clId="{8EE40018-26BD-4A7B-8D17-70AC8417C2D0}" dt="2022-11-16T06:54:07.519" v="22" actId="47"/>
-        <pc:sldMkLst>
-          <pc:docMk/>
-          <pc:sldMk cId="3026304390" sldId="325"/>
-        </pc:sldMkLst>
-      </pc:sldChg>
-      <pc:sldChg chg="del">
-        <pc:chgData name="Matthieu De Mari" userId="dfb708c9-d8dc-439f-9a3b-c772bf4a311c" providerId="ADAL" clId="{8EE40018-26BD-4A7B-8D17-70AC8417C2D0}" dt="2022-11-16T06:54:07.519" v="22" actId="47"/>
-        <pc:sldMkLst>
-          <pc:docMk/>
-          <pc:sldMk cId="4144845603" sldId="326"/>
-        </pc:sldMkLst>
-      </pc:sldChg>
-      <pc:sldChg chg="del">
-        <pc:chgData name="Matthieu De Mari" userId="dfb708c9-d8dc-439f-9a3b-c772bf4a311c" providerId="ADAL" clId="{8EE40018-26BD-4A7B-8D17-70AC8417C2D0}" dt="2022-11-16T06:54:07.519" v="22" actId="47"/>
-        <pc:sldMkLst>
-          <pc:docMk/>
-          <pc:sldMk cId="2128704617" sldId="328"/>
-        </pc:sldMkLst>
-      </pc:sldChg>
-      <pc:sldChg chg="del">
-        <pc:chgData name="Matthieu De Mari" userId="dfb708c9-d8dc-439f-9a3b-c772bf4a311c" providerId="ADAL" clId="{8EE40018-26BD-4A7B-8D17-70AC8417C2D0}" dt="2022-11-16T06:54:07.519" v="22" actId="47"/>
-        <pc:sldMkLst>
-          <pc:docMk/>
-          <pc:sldMk cId="1228181526" sldId="329"/>
-        </pc:sldMkLst>
-      </pc:sldChg>
-      <pc:sldChg chg="del">
-        <pc:chgData name="Matthieu De Mari" userId="dfb708c9-d8dc-439f-9a3b-c772bf4a311c" providerId="ADAL" clId="{8EE40018-26BD-4A7B-8D17-70AC8417C2D0}" dt="2022-11-16T06:54:07.519" v="22" actId="47"/>
-        <pc:sldMkLst>
-          <pc:docMk/>
-          <pc:sldMk cId="1086607777" sldId="331"/>
-        </pc:sldMkLst>
-      </pc:sldChg>
-      <pc:sldChg chg="del">
-        <pc:chgData name="Matthieu De Mari" userId="dfb708c9-d8dc-439f-9a3b-c772bf4a311c" providerId="ADAL" clId="{8EE40018-26BD-4A7B-8D17-70AC8417C2D0}" dt="2022-11-16T06:54:08.404" v="23" actId="47"/>
-        <pc:sldMkLst>
-          <pc:docMk/>
-          <pc:sldMk cId="3744088925" sldId="332"/>
-        </pc:sldMkLst>
-      </pc:sldChg>
-      <pc:sldChg chg="del">
-        <pc:chgData name="Matthieu De Mari" userId="dfb708c9-d8dc-439f-9a3b-c772bf4a311c" providerId="ADAL" clId="{8EE40018-26BD-4A7B-8D17-70AC8417C2D0}" dt="2022-11-16T06:54:08.404" v="23" actId="47"/>
-        <pc:sldMkLst>
-          <pc:docMk/>
-          <pc:sldMk cId="1824898086" sldId="334"/>
-        </pc:sldMkLst>
-      </pc:sldChg>
-      <pc:sldChg chg="del">
-        <pc:chgData name="Matthieu De Mari" userId="dfb708c9-d8dc-439f-9a3b-c772bf4a311c" providerId="ADAL" clId="{8EE40018-26BD-4A7B-8D17-70AC8417C2D0}" dt="2022-11-16T06:54:13.895" v="27" actId="47"/>
-        <pc:sldMkLst>
-          <pc:docMk/>
-          <pc:sldMk cId="3704706604" sldId="335"/>
-        </pc:sldMkLst>
-      </pc:sldChg>
-      <pc:sldChg chg="del">
-        <pc:chgData name="Matthieu De Mari" userId="dfb708c9-d8dc-439f-9a3b-c772bf4a311c" providerId="ADAL" clId="{8EE40018-26BD-4A7B-8D17-70AC8417C2D0}" dt="2022-11-16T06:54:11.293" v="25" actId="47"/>
-        <pc:sldMkLst>
-          <pc:docMk/>
-          <pc:sldMk cId="503014896" sldId="336"/>
-        </pc:sldMkLst>
-      </pc:sldChg>
-      <pc:sldChg chg="del">
-        <pc:chgData name="Matthieu De Mari" userId="dfb708c9-d8dc-439f-9a3b-c772bf4a311c" providerId="ADAL" clId="{8EE40018-26BD-4A7B-8D17-70AC8417C2D0}" dt="2022-11-16T06:54:11.293" v="25" actId="47"/>
-        <pc:sldMkLst>
-          <pc:docMk/>
-          <pc:sldMk cId="1757180629" sldId="338"/>
-        </pc:sldMkLst>
-      </pc:sldChg>
-      <pc:sldChg chg="del">
-        <pc:chgData name="Matthieu De Mari" userId="dfb708c9-d8dc-439f-9a3b-c772bf4a311c" providerId="ADAL" clId="{8EE40018-26BD-4A7B-8D17-70AC8417C2D0}" dt="2022-11-16T06:54:11.293" v="25" actId="47"/>
-        <pc:sldMkLst>
-          <pc:docMk/>
-          <pc:sldMk cId="3251712844" sldId="339"/>
-        </pc:sldMkLst>
-      </pc:sldChg>
-      <pc:sldChg chg="del">
-        <pc:chgData name="Matthieu De Mari" userId="dfb708c9-d8dc-439f-9a3b-c772bf4a311c" providerId="ADAL" clId="{8EE40018-26BD-4A7B-8D17-70AC8417C2D0}" dt="2022-11-16T06:54:11.293" v="25" actId="47"/>
-        <pc:sldMkLst>
-          <pc:docMk/>
-          <pc:sldMk cId="3000047863" sldId="341"/>
-        </pc:sldMkLst>
-      </pc:sldChg>
-      <pc:sldChg chg="del">
-        <pc:chgData name="Matthieu De Mari" userId="dfb708c9-d8dc-439f-9a3b-c772bf4a311c" providerId="ADAL" clId="{8EE40018-26BD-4A7B-8D17-70AC8417C2D0}" dt="2022-11-16T06:54:11.293" v="25" actId="47"/>
-        <pc:sldMkLst>
-          <pc:docMk/>
-          <pc:sldMk cId="3607475250" sldId="342"/>
-        </pc:sldMkLst>
-      </pc:sldChg>
-      <pc:sldChg chg="del">
-        <pc:chgData name="Matthieu De Mari" userId="dfb708c9-d8dc-439f-9a3b-c772bf4a311c" providerId="ADAL" clId="{8EE40018-26BD-4A7B-8D17-70AC8417C2D0}" dt="2022-11-16T06:54:11.293" v="25" actId="47"/>
-        <pc:sldMkLst>
-          <pc:docMk/>
-          <pc:sldMk cId="2202386436" sldId="343"/>
-        </pc:sldMkLst>
-      </pc:sldChg>
-      <pc:sldChg chg="del">
-        <pc:chgData name="Matthieu De Mari" userId="dfb708c9-d8dc-439f-9a3b-c772bf4a311c" providerId="ADAL" clId="{8EE40018-26BD-4A7B-8D17-70AC8417C2D0}" dt="2022-11-16T06:54:14.637" v="28" actId="47"/>
-        <pc:sldMkLst>
-          <pc:docMk/>
-          <pc:sldMk cId="4222503966" sldId="345"/>
-        </pc:sldMkLst>
-      </pc:sldChg>
-      <pc:sldChg chg="modSp add del mod">
-        <pc:chgData name="Matthieu De Mari" userId="dfb708c9-d8dc-439f-9a3b-c772bf4a311c" providerId="ADAL" clId="{8EE40018-26BD-4A7B-8D17-70AC8417C2D0}" dt="2022-11-16T06:54:26.067" v="39" actId="20577"/>
-        <pc:sldMkLst>
-          <pc:docMk/>
-          <pc:sldMk cId="1036081419" sldId="346"/>
-        </pc:sldMkLst>
-      </pc:sldChg>
-      <pc:sldChg chg="del">
-        <pc:chgData name="Matthieu De Mari" userId="dfb708c9-d8dc-439f-9a3b-c772bf4a311c" providerId="ADAL" clId="{8EE40018-26BD-4A7B-8D17-70AC8417C2D0}" dt="2022-11-16T06:54:11.293" v="25" actId="47"/>
-        <pc:sldMkLst>
-          <pc:docMk/>
-          <pc:sldMk cId="2902606749" sldId="350"/>
-        </pc:sldMkLst>
-      </pc:sldChg>
-      <pc:sldChg chg="del">
-        <pc:chgData name="Matthieu De Mari" userId="dfb708c9-d8dc-439f-9a3b-c772bf4a311c" providerId="ADAL" clId="{8EE40018-26BD-4A7B-8D17-70AC8417C2D0}" dt="2022-11-16T06:54:11.293" v="25" actId="47"/>
-        <pc:sldMkLst>
-          <pc:docMk/>
-          <pc:sldMk cId="1008855396" sldId="352"/>
-        </pc:sldMkLst>
-      </pc:sldChg>
-      <pc:sldChg chg="del">
-        <pc:chgData name="Matthieu De Mari" userId="dfb708c9-d8dc-439f-9a3b-c772bf4a311c" providerId="ADAL" clId="{8EE40018-26BD-4A7B-8D17-70AC8417C2D0}" dt="2022-11-16T06:54:11.293" v="25" actId="47"/>
-        <pc:sldMkLst>
-          <pc:docMk/>
-          <pc:sldMk cId="1005123530" sldId="353"/>
-        </pc:sldMkLst>
-      </pc:sldChg>
-      <pc:sldChg chg="del">
-        <pc:chgData name="Matthieu De Mari" userId="dfb708c9-d8dc-439f-9a3b-c772bf4a311c" providerId="ADAL" clId="{8EE40018-26BD-4A7B-8D17-70AC8417C2D0}" dt="2022-11-16T06:54:11.293" v="25" actId="47"/>
-        <pc:sldMkLst>
-          <pc:docMk/>
-          <pc:sldMk cId="304430080" sldId="354"/>
-        </pc:sldMkLst>
-      </pc:sldChg>
-      <pc:sldChg chg="del">
-        <pc:chgData name="Matthieu De Mari" userId="dfb708c9-d8dc-439f-9a3b-c772bf4a311c" providerId="ADAL" clId="{8EE40018-26BD-4A7B-8D17-70AC8417C2D0}" dt="2022-11-16T06:54:11.293" v="25" actId="47"/>
-        <pc:sldMkLst>
-          <pc:docMk/>
-          <pc:sldMk cId="2530765258" sldId="355"/>
-        </pc:sldMkLst>
-      </pc:sldChg>
-      <pc:sldChg chg="del">
-        <pc:chgData name="Matthieu De Mari" userId="dfb708c9-d8dc-439f-9a3b-c772bf4a311c" providerId="ADAL" clId="{8EE40018-26BD-4A7B-8D17-70AC8417C2D0}" dt="2022-11-16T06:54:11.293" v="25" actId="47"/>
-        <pc:sldMkLst>
-          <pc:docMk/>
-          <pc:sldMk cId="2900566505" sldId="356"/>
-        </pc:sldMkLst>
-      </pc:sldChg>
-      <pc:sldChg chg="del">
-        <pc:chgData name="Matthieu De Mari" userId="dfb708c9-d8dc-439f-9a3b-c772bf4a311c" providerId="ADAL" clId="{8EE40018-26BD-4A7B-8D17-70AC8417C2D0}" dt="2022-11-16T06:54:11.293" v="25" actId="47"/>
-        <pc:sldMkLst>
-          <pc:docMk/>
-          <pc:sldMk cId="151041797" sldId="357"/>
-        </pc:sldMkLst>
-      </pc:sldChg>
-      <pc:sldChg chg="del">
-        <pc:chgData name="Matthieu De Mari" userId="dfb708c9-d8dc-439f-9a3b-c772bf4a311c" providerId="ADAL" clId="{8EE40018-26BD-4A7B-8D17-70AC8417C2D0}" dt="2022-11-16T06:54:11.293" v="25" actId="47"/>
-        <pc:sldMkLst>
-          <pc:docMk/>
-          <pc:sldMk cId="2341017383" sldId="358"/>
-        </pc:sldMkLst>
-      </pc:sldChg>
-      <pc:sldChg chg="del">
-        <pc:chgData name="Matthieu De Mari" userId="dfb708c9-d8dc-439f-9a3b-c772bf4a311c" providerId="ADAL" clId="{8EE40018-26BD-4A7B-8D17-70AC8417C2D0}" dt="2022-11-16T06:54:12.971" v="26" actId="47"/>
-        <pc:sldMkLst>
-          <pc:docMk/>
-          <pc:sldMk cId="843036564" sldId="360"/>
-        </pc:sldMkLst>
-      </pc:sldChg>
-      <pc:sldChg chg="del">
-        <pc:chgData name="Matthieu De Mari" userId="dfb708c9-d8dc-439f-9a3b-c772bf4a311c" providerId="ADAL" clId="{8EE40018-26BD-4A7B-8D17-70AC8417C2D0}" dt="2022-11-16T06:54:12.971" v="26" actId="47"/>
-        <pc:sldMkLst>
-          <pc:docMk/>
-          <pc:sldMk cId="1543635220" sldId="363"/>
-        </pc:sldMkLst>
-      </pc:sldChg>
-      <pc:sldChg chg="del">
-        <pc:chgData name="Matthieu De Mari" userId="dfb708c9-d8dc-439f-9a3b-c772bf4a311c" providerId="ADAL" clId="{8EE40018-26BD-4A7B-8D17-70AC8417C2D0}" dt="2022-11-16T06:54:12.971" v="26" actId="47"/>
-        <pc:sldMkLst>
-          <pc:docMk/>
-          <pc:sldMk cId="467323081" sldId="364"/>
-        </pc:sldMkLst>
-      </pc:sldChg>
-      <pc:sldChg chg="del">
-        <pc:chgData name="Matthieu De Mari" userId="dfb708c9-d8dc-439f-9a3b-c772bf4a311c" providerId="ADAL" clId="{8EE40018-26BD-4A7B-8D17-70AC8417C2D0}" dt="2022-11-16T06:54:12.971" v="26" actId="47"/>
-        <pc:sldMkLst>
-          <pc:docMk/>
-          <pc:sldMk cId="2557491043" sldId="365"/>
-        </pc:sldMkLst>
-      </pc:sldChg>
-      <pc:sldChg chg="del">
-        <pc:chgData name="Matthieu De Mari" userId="dfb708c9-d8dc-439f-9a3b-c772bf4a311c" providerId="ADAL" clId="{8EE40018-26BD-4A7B-8D17-70AC8417C2D0}" dt="2022-11-16T06:54:12.971" v="26" actId="47"/>
-        <pc:sldMkLst>
-          <pc:docMk/>
-          <pc:sldMk cId="30137941" sldId="366"/>
-        </pc:sldMkLst>
-      </pc:sldChg>
-      <pc:sldChg chg="del">
-        <pc:chgData name="Matthieu De Mari" userId="dfb708c9-d8dc-439f-9a3b-c772bf4a311c" providerId="ADAL" clId="{8EE40018-26BD-4A7B-8D17-70AC8417C2D0}" dt="2022-11-16T06:54:12.971" v="26" actId="47"/>
-        <pc:sldMkLst>
-          <pc:docMk/>
-          <pc:sldMk cId="2759705435" sldId="367"/>
-        </pc:sldMkLst>
-      </pc:sldChg>
-      <pc:sldChg chg="del">
-        <pc:chgData name="Matthieu De Mari" userId="dfb708c9-d8dc-439f-9a3b-c772bf4a311c" providerId="ADAL" clId="{8EE40018-26BD-4A7B-8D17-70AC8417C2D0}" dt="2022-11-16T06:54:12.971" v="26" actId="47"/>
-        <pc:sldMkLst>
-          <pc:docMk/>
-          <pc:sldMk cId="3578341878" sldId="368"/>
-        </pc:sldMkLst>
-      </pc:sldChg>
-      <pc:sldChg chg="del">
-        <pc:chgData name="Matthieu De Mari" userId="dfb708c9-d8dc-439f-9a3b-c772bf4a311c" providerId="ADAL" clId="{8EE40018-26BD-4A7B-8D17-70AC8417C2D0}" dt="2022-11-16T06:54:12.971" v="26" actId="47"/>
-        <pc:sldMkLst>
-          <pc:docMk/>
-          <pc:sldMk cId="2979488587" sldId="369"/>
-        </pc:sldMkLst>
-      </pc:sldChg>
-      <pc:sldChg chg="del">
-        <pc:chgData name="Matthieu De Mari" userId="dfb708c9-d8dc-439f-9a3b-c772bf4a311c" providerId="ADAL" clId="{8EE40018-26BD-4A7B-8D17-70AC8417C2D0}" dt="2022-11-16T06:54:12.971" v="26" actId="47"/>
-        <pc:sldMkLst>
-          <pc:docMk/>
-          <pc:sldMk cId="954723006" sldId="371"/>
-        </pc:sldMkLst>
-      </pc:sldChg>
-      <pc:sldChg chg="del">
-        <pc:chgData name="Matthieu De Mari" userId="dfb708c9-d8dc-439f-9a3b-c772bf4a311c" providerId="ADAL" clId="{8EE40018-26BD-4A7B-8D17-70AC8417C2D0}" dt="2022-11-16T06:54:12.971" v="26" actId="47"/>
-        <pc:sldMkLst>
-          <pc:docMk/>
-          <pc:sldMk cId="1007393074" sldId="372"/>
-        </pc:sldMkLst>
-      </pc:sldChg>
-      <pc:sldChg chg="del">
-        <pc:chgData name="Matthieu De Mari" userId="dfb708c9-d8dc-439f-9a3b-c772bf4a311c" providerId="ADAL" clId="{8EE40018-26BD-4A7B-8D17-70AC8417C2D0}" dt="2022-11-16T06:54:12.971" v="26" actId="47"/>
-        <pc:sldMkLst>
-          <pc:docMk/>
-          <pc:sldMk cId="4039951211" sldId="373"/>
-        </pc:sldMkLst>
-      </pc:sldChg>
-      <pc:sldChg chg="del">
-        <pc:chgData name="Matthieu De Mari" userId="dfb708c9-d8dc-439f-9a3b-c772bf4a311c" providerId="ADAL" clId="{8EE40018-26BD-4A7B-8D17-70AC8417C2D0}" dt="2022-11-16T06:54:12.971" v="26" actId="47"/>
-        <pc:sldMkLst>
-          <pc:docMk/>
-          <pc:sldMk cId="3074715825" sldId="374"/>
-        </pc:sldMkLst>
-      </pc:sldChg>
-      <pc:sldChg chg="del">
-        <pc:chgData name="Matthieu De Mari" userId="dfb708c9-d8dc-439f-9a3b-c772bf4a311c" providerId="ADAL" clId="{8EE40018-26BD-4A7B-8D17-70AC8417C2D0}" dt="2022-11-16T06:54:13.895" v="27" actId="47"/>
-        <pc:sldMkLst>
-          <pc:docMk/>
-          <pc:sldMk cId="1113800729" sldId="376"/>
-        </pc:sldMkLst>
-      </pc:sldChg>
-      <pc:sldChg chg="modSp mod">
-        <pc:chgData name="Matthieu De Mari" userId="dfb708c9-d8dc-439f-9a3b-c772bf4a311c" providerId="ADAL" clId="{8EE40018-26BD-4A7B-8D17-70AC8417C2D0}" dt="2022-11-16T06:53:49.572" v="12" actId="20577"/>
-        <pc:sldMkLst>
-          <pc:docMk/>
-          <pc:sldMk cId="1040156172" sldId="377"/>
-        </pc:sldMkLst>
-      </pc:sldChg>
-      <pc:sldChg chg="del">
-        <pc:chgData name="Matthieu De Mari" userId="dfb708c9-d8dc-439f-9a3b-c772bf4a311c" providerId="ADAL" clId="{8EE40018-26BD-4A7B-8D17-70AC8417C2D0}" dt="2022-11-16T06:54:08.404" v="23" actId="47"/>
-        <pc:sldMkLst>
-          <pc:docMk/>
-          <pc:sldMk cId="2236780210" sldId="378"/>
-        </pc:sldMkLst>
-      </pc:sldChg>
-      <pc:sldChg chg="del">
-        <pc:chgData name="Matthieu De Mari" userId="dfb708c9-d8dc-439f-9a3b-c772bf4a311c" providerId="ADAL" clId="{8EE40018-26BD-4A7B-8D17-70AC8417C2D0}" dt="2022-11-16T06:54:09.190" v="24" actId="47"/>
-        <pc:sldMkLst>
-          <pc:docMk/>
-          <pc:sldMk cId="3686470996" sldId="379"/>
-        </pc:sldMkLst>
-      </pc:sldChg>
-      <pc:sldChg chg="del">
-        <pc:chgData name="Matthieu De Mari" userId="dfb708c9-d8dc-439f-9a3b-c772bf4a311c" providerId="ADAL" clId="{8EE40018-26BD-4A7B-8D17-70AC8417C2D0}" dt="2022-11-16T06:54:13.895" v="27" actId="47"/>
-        <pc:sldMkLst>
-          <pc:docMk/>
-          <pc:sldMk cId="2665897880" sldId="380"/>
-        </pc:sldMkLst>
-      </pc:sldChg>
-      <pc:sldChg chg="del">
-        <pc:chgData name="Matthieu De Mari" userId="dfb708c9-d8dc-439f-9a3b-c772bf4a311c" providerId="ADAL" clId="{8EE40018-26BD-4A7B-8D17-70AC8417C2D0}" dt="2022-11-16T06:54:42.327" v="41" actId="47"/>
-        <pc:sldMkLst>
-          <pc:docMk/>
-          <pc:sldMk cId="1174542860" sldId="381"/>
-        </pc:sldMkLst>
-      </pc:sldChg>
-      <pc:sldChg chg="del">
-        <pc:chgData name="Matthieu De Mari" userId="dfb708c9-d8dc-439f-9a3b-c772bf4a311c" providerId="ADAL" clId="{8EE40018-26BD-4A7B-8D17-70AC8417C2D0}" dt="2022-11-16T06:54:07.519" v="22" actId="47"/>
-        <pc:sldMkLst>
-          <pc:docMk/>
-          <pc:sldMk cId="370210852" sldId="382"/>
-        </pc:sldMkLst>
-      </pc:sldChg>
-      <pc:sldChg chg="del">
-        <pc:chgData name="Matthieu De Mari" userId="dfb708c9-d8dc-439f-9a3b-c772bf4a311c" providerId="ADAL" clId="{8EE40018-26BD-4A7B-8D17-70AC8417C2D0}" dt="2022-11-16T06:54:06.554" v="21" actId="47"/>
-        <pc:sldMkLst>
-          <pc:docMk/>
-          <pc:sldMk cId="3654187078" sldId="383"/>
-        </pc:sldMkLst>
-      </pc:sldChg>
-      <pc:sldChg chg="del">
-        <pc:chgData name="Matthieu De Mari" userId="dfb708c9-d8dc-439f-9a3b-c772bf4a311c" providerId="ADAL" clId="{8EE40018-26BD-4A7B-8D17-70AC8417C2D0}" dt="2022-11-16T06:54:11.293" v="25" actId="47"/>
-        <pc:sldMkLst>
-          <pc:docMk/>
-          <pc:sldMk cId="1145882535" sldId="384"/>
-        </pc:sldMkLst>
-      </pc:sldChg>
-      <pc:sldChg chg="del">
-        <pc:chgData name="Matthieu De Mari" userId="dfb708c9-d8dc-439f-9a3b-c772bf4a311c" providerId="ADAL" clId="{8EE40018-26BD-4A7B-8D17-70AC8417C2D0}" dt="2022-11-16T06:54:12.971" v="26" actId="47"/>
-        <pc:sldMkLst>
-          <pc:docMk/>
-          <pc:sldMk cId="2609241577" sldId="385"/>
-        </pc:sldMkLst>
-      </pc:sldChg>
-      <pc:sldChg chg="del">
-        <pc:chgData name="Matthieu De Mari" userId="dfb708c9-d8dc-439f-9a3b-c772bf4a311c" providerId="ADAL" clId="{8EE40018-26BD-4A7B-8D17-70AC8417C2D0}" dt="2022-11-16T06:54:13.895" v="27" actId="47"/>
-        <pc:sldMkLst>
-          <pc:docMk/>
-          <pc:sldMk cId="2448415676" sldId="387"/>
-        </pc:sldMkLst>
-      </pc:sldChg>
-      <pc:sldChg chg="del">
-        <pc:chgData name="Matthieu De Mari" userId="dfb708c9-d8dc-439f-9a3b-c772bf4a311c" providerId="ADAL" clId="{8EE40018-26BD-4A7B-8D17-70AC8417C2D0}" dt="2022-11-16T06:54:13.895" v="27" actId="47"/>
-        <pc:sldMkLst>
-          <pc:docMk/>
-          <pc:sldMk cId="993695443" sldId="388"/>
-        </pc:sldMkLst>
-      </pc:sldChg>
-      <pc:sldChg chg="del">
-        <pc:chgData name="Matthieu De Mari" userId="dfb708c9-d8dc-439f-9a3b-c772bf4a311c" providerId="ADAL" clId="{8EE40018-26BD-4A7B-8D17-70AC8417C2D0}" dt="2022-11-16T06:54:13.895" v="27" actId="47"/>
-        <pc:sldMkLst>
-          <pc:docMk/>
-          <pc:sldMk cId="3051477034" sldId="389"/>
-        </pc:sldMkLst>
-      </pc:sldChg>
-      <pc:sldChg chg="del">
-        <pc:chgData name="Matthieu De Mari" userId="dfb708c9-d8dc-439f-9a3b-c772bf4a311c" providerId="ADAL" clId="{8EE40018-26BD-4A7B-8D17-70AC8417C2D0}" dt="2022-11-16T06:54:13.895" v="27" actId="47"/>
-        <pc:sldMkLst>
-          <pc:docMk/>
-          <pc:sldMk cId="2663658166" sldId="390"/>
-        </pc:sldMkLst>
-      </pc:sldChg>
-      <pc:sldChg chg="del">
-        <pc:chgData name="Matthieu De Mari" userId="dfb708c9-d8dc-439f-9a3b-c772bf4a311c" providerId="ADAL" clId="{8EE40018-26BD-4A7B-8D17-70AC8417C2D0}" dt="2022-11-16T06:54:39.791" v="40" actId="47"/>
-        <pc:sldMkLst>
-          <pc:docMk/>
-          <pc:sldMk cId="1682911312" sldId="391"/>
-        </pc:sldMkLst>
-      </pc:sldChg>
-    </pc:docChg>
-  </pc:docChgLst>
-  <pc:docChgLst>
-    <pc:chgData name="Matthieu De Mari" userId="dfb708c9-d8dc-439f-9a3b-c772bf4a311c" providerId="ADAL" clId="{1002CE28-12E1-453F-8E06-90F32FAF9697}"/>
-    <pc:docChg chg="mod delSld modSld sldOrd modMainMaster delSection modSection">
-      <pc:chgData name="Matthieu De Mari" userId="dfb708c9-d8dc-439f-9a3b-c772bf4a311c" providerId="ADAL" clId="{1002CE28-12E1-453F-8E06-90F32FAF9697}" dt="2022-10-19T06:32:13.307" v="17" actId="20577"/>
-      <pc:docMkLst>
-        <pc:docMk/>
-      </pc:docMkLst>
-      <pc:sldChg chg="modSp del mod">
-        <pc:chgData name="Matthieu De Mari" userId="dfb708c9-d8dc-439f-9a3b-c772bf4a311c" providerId="ADAL" clId="{1002CE28-12E1-453F-8E06-90F32FAF9697}" dt="2022-10-19T06:32:10.067" v="8" actId="47"/>
-        <pc:sldMkLst>
-          <pc:docMk/>
-          <pc:sldMk cId="4221035150" sldId="256"/>
-        </pc:sldMkLst>
-      </pc:sldChg>
-      <pc:sldChg chg="del">
-        <pc:chgData name="Matthieu De Mari" userId="dfb708c9-d8dc-439f-9a3b-c772bf4a311c" providerId="ADAL" clId="{1002CE28-12E1-453F-8E06-90F32FAF9697}" dt="2022-10-19T06:32:06.571" v="5" actId="47"/>
-        <pc:sldMkLst>
-          <pc:docMk/>
-          <pc:sldMk cId="2169851104" sldId="258"/>
-        </pc:sldMkLst>
-      </pc:sldChg>
-      <pc:sldChg chg="del">
-        <pc:chgData name="Matthieu De Mari" userId="dfb708c9-d8dc-439f-9a3b-c772bf4a311c" providerId="ADAL" clId="{1002CE28-12E1-453F-8E06-90F32FAF9697}" dt="2022-10-19T06:32:06.571" v="5" actId="47"/>
-        <pc:sldMkLst>
-          <pc:docMk/>
-          <pc:sldMk cId="1814682152" sldId="259"/>
-        </pc:sldMkLst>
-      </pc:sldChg>
-      <pc:sldChg chg="del">
-        <pc:chgData name="Matthieu De Mari" userId="dfb708c9-d8dc-439f-9a3b-c772bf4a311c" providerId="ADAL" clId="{1002CE28-12E1-453F-8E06-90F32FAF9697}" dt="2022-10-19T06:32:06.571" v="5" actId="47"/>
-        <pc:sldMkLst>
-          <pc:docMk/>
-          <pc:sldMk cId="753975277" sldId="260"/>
-        </pc:sldMkLst>
-      </pc:sldChg>
-      <pc:sldChg chg="del">
-        <pc:chgData name="Matthieu De Mari" userId="dfb708c9-d8dc-439f-9a3b-c772bf4a311c" providerId="ADAL" clId="{1002CE28-12E1-453F-8E06-90F32FAF9697}" dt="2022-10-19T06:32:06.571" v="5" actId="47"/>
-        <pc:sldMkLst>
-          <pc:docMk/>
-          <pc:sldMk cId="968033501" sldId="268"/>
-        </pc:sldMkLst>
-      </pc:sldChg>
-      <pc:sldChg chg="modSp mod ord">
-        <pc:chgData name="Matthieu De Mari" userId="dfb708c9-d8dc-439f-9a3b-c772bf4a311c" providerId="ADAL" clId="{1002CE28-12E1-453F-8E06-90F32FAF9697}" dt="2022-10-19T06:32:13.307" v="17" actId="20577"/>
-        <pc:sldMkLst>
-          <pc:docMk/>
-          <pc:sldMk cId="1040156172" sldId="377"/>
-        </pc:sldMkLst>
-      </pc:sldChg>
-      <pc:sldMasterChg chg="addSp mod">
-        <pc:chgData name="Matthieu De Mari" userId="dfb708c9-d8dc-439f-9a3b-c772bf4a311c" providerId="ADAL" clId="{1002CE28-12E1-453F-8E06-90F32FAF9697}" dt="2022-10-19T06:30:58.618" v="0" actId="33475"/>
-        <pc:sldMasterMkLst>
-          <pc:docMk/>
-          <pc:sldMasterMk cId="2168708284" sldId="2147483648"/>
-        </pc:sldMasterMkLst>
-      </pc:sldMasterChg>
-    </pc:docChg>
-  </pc:docChgLst>
-  <pc:docChgLst>
-    <pc:chgData name="Matthieu De Mari" userId="dfb708c9-d8dc-439f-9a3b-c772bf4a311c" providerId="ADAL" clId="{851712E7-4765-4026-AAE1-C7179918B94D}"/>
-    <pc:docChg chg="custSel modSld">
-      <pc:chgData name="Matthieu De Mari" userId="dfb708c9-d8dc-439f-9a3b-c772bf4a311c" providerId="ADAL" clId="{851712E7-4765-4026-AAE1-C7179918B94D}" dt="2023-07-06T03:12:53.570" v="760" actId="20577"/>
-      <pc:docMkLst>
-        <pc:docMk/>
-      </pc:docMkLst>
-      <pc:sldChg chg="modSp mod">
-        <pc:chgData name="Matthieu De Mari" userId="dfb708c9-d8dc-439f-9a3b-c772bf4a311c" providerId="ADAL" clId="{851712E7-4765-4026-AAE1-C7179918B94D}" dt="2023-07-06T02:50:03.612" v="477" actId="20577"/>
-        <pc:sldMkLst>
-          <pc:docMk/>
-          <pc:sldMk cId="1040156172" sldId="377"/>
-        </pc:sldMkLst>
-      </pc:sldChg>
-      <pc:sldChg chg="modSp mod">
-        <pc:chgData name="Matthieu De Mari" userId="dfb708c9-d8dc-439f-9a3b-c772bf4a311c" providerId="ADAL" clId="{851712E7-4765-4026-AAE1-C7179918B94D}" dt="2023-07-06T03:00:07.628" v="478" actId="113"/>
-        <pc:sldMkLst>
-          <pc:docMk/>
-          <pc:sldMk cId="2474697269" sldId="387"/>
-        </pc:sldMkLst>
-      </pc:sldChg>
-      <pc:sldChg chg="modSp">
-        <pc:chgData name="Matthieu De Mari" userId="dfb708c9-d8dc-439f-9a3b-c772bf4a311c" providerId="ADAL" clId="{851712E7-4765-4026-AAE1-C7179918B94D}" dt="2023-07-06T03:04:04.577" v="568" actId="20577"/>
-        <pc:sldMkLst>
-          <pc:docMk/>
-          <pc:sldMk cId="4198773114" sldId="388"/>
-        </pc:sldMkLst>
-      </pc:sldChg>
-      <pc:sldChg chg="modSp mod">
-        <pc:chgData name="Matthieu De Mari" userId="dfb708c9-d8dc-439f-9a3b-c772bf4a311c" providerId="ADAL" clId="{851712E7-4765-4026-AAE1-C7179918B94D}" dt="2023-07-06T03:05:25.247" v="619" actId="20577"/>
-        <pc:sldMkLst>
-          <pc:docMk/>
-          <pc:sldMk cId="481628505" sldId="389"/>
-        </pc:sldMkLst>
-      </pc:sldChg>
-      <pc:sldChg chg="modSp mod">
-        <pc:chgData name="Matthieu De Mari" userId="dfb708c9-d8dc-439f-9a3b-c772bf4a311c" providerId="ADAL" clId="{851712E7-4765-4026-AAE1-C7179918B94D}" dt="2023-07-06T03:08:28.347" v="634" actId="20577"/>
-        <pc:sldMkLst>
-          <pc:docMk/>
-          <pc:sldMk cId="1283478655" sldId="391"/>
-        </pc:sldMkLst>
-      </pc:sldChg>
-      <pc:sldChg chg="modSp mod">
-        <pc:chgData name="Matthieu De Mari" userId="dfb708c9-d8dc-439f-9a3b-c772bf4a311c" providerId="ADAL" clId="{851712E7-4765-4026-AAE1-C7179918B94D}" dt="2023-06-22T06:24:28.011" v="466" actId="20577"/>
-        <pc:sldMkLst>
-          <pc:docMk/>
-          <pc:sldMk cId="164097668" sldId="394"/>
-        </pc:sldMkLst>
-      </pc:sldChg>
-      <pc:sldChg chg="modSp mod">
-        <pc:chgData name="Matthieu De Mari" userId="dfb708c9-d8dc-439f-9a3b-c772bf4a311c" providerId="ADAL" clId="{851712E7-4765-4026-AAE1-C7179918B94D}" dt="2023-07-06T03:12:41.739" v="758" actId="20577"/>
-        <pc:sldMkLst>
-          <pc:docMk/>
-          <pc:sldMk cId="3048177291" sldId="395"/>
-        </pc:sldMkLst>
-      </pc:sldChg>
-      <pc:sldChg chg="modSp mod">
-        <pc:chgData name="Matthieu De Mari" userId="dfb708c9-d8dc-439f-9a3b-c772bf4a311c" providerId="ADAL" clId="{851712E7-4765-4026-AAE1-C7179918B94D}" dt="2023-07-06T03:01:23.820" v="541" actId="14100"/>
-        <pc:sldMkLst>
-          <pc:docMk/>
-          <pc:sldMk cId="3339699406" sldId="761"/>
-        </pc:sldMkLst>
-      </pc:sldChg>
-      <pc:sldChg chg="modSp mod">
-        <pc:chgData name="Matthieu De Mari" userId="dfb708c9-d8dc-439f-9a3b-c772bf4a311c" providerId="ADAL" clId="{851712E7-4765-4026-AAE1-C7179918B94D}" dt="2023-07-06T03:01:40.402" v="556" actId="27636"/>
-        <pc:sldMkLst>
-          <pc:docMk/>
-          <pc:sldMk cId="1546007078" sldId="762"/>
-        </pc:sldMkLst>
-      </pc:sldChg>
-      <pc:sldChg chg="modSp mod">
-        <pc:chgData name="Matthieu De Mari" userId="dfb708c9-d8dc-439f-9a3b-c772bf4a311c" providerId="ADAL" clId="{851712E7-4765-4026-AAE1-C7179918B94D}" dt="2023-06-22T06:17:43.042" v="142" actId="20577"/>
-        <pc:sldMkLst>
-          <pc:docMk/>
-          <pc:sldMk cId="2580175991" sldId="763"/>
-        </pc:sldMkLst>
-      </pc:sldChg>
-      <pc:sldChg chg="modSp mod">
-        <pc:chgData name="Matthieu De Mari" userId="dfb708c9-d8dc-439f-9a3b-c772bf4a311c" providerId="ADAL" clId="{851712E7-4765-4026-AAE1-C7179918B94D}" dt="2023-07-06T03:03:15.891" v="566" actId="20577"/>
-        <pc:sldMkLst>
-          <pc:docMk/>
-          <pc:sldMk cId="1879463264" sldId="764"/>
-        </pc:sldMkLst>
-      </pc:sldChg>
-      <pc:sldChg chg="modSp mod">
-        <pc:chgData name="Matthieu De Mari" userId="dfb708c9-d8dc-439f-9a3b-c772bf4a311c" providerId="ADAL" clId="{851712E7-4765-4026-AAE1-C7179918B94D}" dt="2023-07-06T03:04:48.912" v="573" actId="27636"/>
-        <pc:sldMkLst>
-          <pc:docMk/>
-          <pc:sldMk cId="1996337912" sldId="765"/>
-        </pc:sldMkLst>
-      </pc:sldChg>
-      <pc:sldChg chg="modSp mod">
-        <pc:chgData name="Matthieu De Mari" userId="dfb708c9-d8dc-439f-9a3b-c772bf4a311c" providerId="ADAL" clId="{851712E7-4765-4026-AAE1-C7179918B94D}" dt="2023-06-22T06:20:11.669" v="212" actId="113"/>
-        <pc:sldMkLst>
-          <pc:docMk/>
-          <pc:sldMk cId="1554669076" sldId="766"/>
-        </pc:sldMkLst>
-      </pc:sldChg>
-      <pc:sldChg chg="addSp modSp mod">
-        <pc:chgData name="Matthieu De Mari" userId="dfb708c9-d8dc-439f-9a3b-c772bf4a311c" providerId="ADAL" clId="{851712E7-4765-4026-AAE1-C7179918B94D}" dt="2023-07-06T03:06:07.523" v="624" actId="693"/>
-        <pc:sldMkLst>
-          <pc:docMk/>
-          <pc:sldMk cId="887698529" sldId="767"/>
-        </pc:sldMkLst>
-      </pc:sldChg>
-      <pc:sldChg chg="addSp modSp mod">
-        <pc:chgData name="Matthieu De Mari" userId="dfb708c9-d8dc-439f-9a3b-c772bf4a311c" providerId="ADAL" clId="{851712E7-4765-4026-AAE1-C7179918B94D}" dt="2023-07-06T03:06:16.222" v="627" actId="14100"/>
-        <pc:sldMkLst>
-          <pc:docMk/>
-          <pc:sldMk cId="3101493777" sldId="768"/>
-        </pc:sldMkLst>
-      </pc:sldChg>
-      <pc:sldChg chg="modSp mod">
-        <pc:chgData name="Matthieu De Mari" userId="dfb708c9-d8dc-439f-9a3b-c772bf4a311c" providerId="ADAL" clId="{851712E7-4765-4026-AAE1-C7179918B94D}" dt="2023-06-22T06:21:19.225" v="268" actId="20577"/>
-        <pc:sldMkLst>
-          <pc:docMk/>
-          <pc:sldMk cId="2909899754" sldId="769"/>
-        </pc:sldMkLst>
-      </pc:sldChg>
-      <pc:sldChg chg="modSp mod">
-        <pc:chgData name="Matthieu De Mari" userId="dfb708c9-d8dc-439f-9a3b-c772bf4a311c" providerId="ADAL" clId="{851712E7-4765-4026-AAE1-C7179918B94D}" dt="2023-06-22T06:22:41.678" v="327" actId="113"/>
-        <pc:sldMkLst>
-          <pc:docMk/>
-          <pc:sldMk cId="743119883" sldId="775"/>
-        </pc:sldMkLst>
-      </pc:sldChg>
-      <pc:sldChg chg="modSp mod">
-        <pc:chgData name="Matthieu De Mari" userId="dfb708c9-d8dc-439f-9a3b-c772bf4a311c" providerId="ADAL" clId="{851712E7-4765-4026-AAE1-C7179918B94D}" dt="2023-07-06T03:09:16.298" v="635" actId="14100"/>
-        <pc:sldMkLst>
-          <pc:docMk/>
-          <pc:sldMk cId="1966383991" sldId="776"/>
-        </pc:sldMkLst>
-      </pc:sldChg>
-      <pc:sldChg chg="modSp mod">
-        <pc:chgData name="Matthieu De Mari" userId="dfb708c9-d8dc-439f-9a3b-c772bf4a311c" providerId="ADAL" clId="{851712E7-4765-4026-AAE1-C7179918B94D}" dt="2023-07-06T03:10:32.745" v="707" actId="20577"/>
-        <pc:sldMkLst>
-          <pc:docMk/>
-          <pc:sldMk cId="3349972987" sldId="777"/>
-        </pc:sldMkLst>
-      </pc:sldChg>
-      <pc:sldChg chg="modSp mod">
-        <pc:chgData name="Matthieu De Mari" userId="dfb708c9-d8dc-439f-9a3b-c772bf4a311c" providerId="ADAL" clId="{851712E7-4765-4026-AAE1-C7179918B94D}" dt="2023-07-06T03:11:49.580" v="708" actId="5793"/>
-        <pc:sldMkLst>
-          <pc:docMk/>
-          <pc:sldMk cId="2678238830" sldId="780"/>
-        </pc:sldMkLst>
-      </pc:sldChg>
-      <pc:sldChg chg="modSp mod">
-        <pc:chgData name="Matthieu De Mari" userId="dfb708c9-d8dc-439f-9a3b-c772bf4a311c" providerId="ADAL" clId="{851712E7-4765-4026-AAE1-C7179918B94D}" dt="2023-07-06T03:12:53.570" v="760" actId="20577"/>
-        <pc:sldMkLst>
-          <pc:docMk/>
-          <pc:sldMk cId="278531271" sldId="782"/>
-        </pc:sldMkLst>
-      </pc:sldChg>
-    </pc:docChg>
-  </pc:docChgLst>
-  <pc:docChgLst>
-    <pc:chgData name="Matthieu De Mari" userId="dfb708c9-d8dc-439f-9a3b-c772bf4a311c" providerId="ADAL" clId="{C34E2A22-FDC1-4426-9035-4069BE986496}"/>
-    <pc:docChg chg="modSld">
-      <pc:chgData name="Matthieu De Mari" userId="dfb708c9-d8dc-439f-9a3b-c772bf4a311c" providerId="ADAL" clId="{C34E2A22-FDC1-4426-9035-4069BE986496}" dt="2024-12-16T01:33:25.608" v="51" actId="732"/>
-      <pc:docMkLst>
-        <pc:docMk/>
-      </pc:docMkLst>
-      <pc:sldChg chg="modSp mod">
-        <pc:chgData name="Matthieu De Mari" userId="dfb708c9-d8dc-439f-9a3b-c772bf4a311c" providerId="ADAL" clId="{C34E2A22-FDC1-4426-9035-4069BE986496}" dt="2024-12-16T01:33:25.608" v="51" actId="732"/>
-        <pc:sldMkLst>
-          <pc:docMk/>
-          <pc:sldMk cId="2116083586" sldId="786"/>
-        </pc:sldMkLst>
         <pc:spChg chg="mod">
-          <ac:chgData name="Matthieu De Mari" userId="dfb708c9-d8dc-439f-9a3b-c772bf4a311c" providerId="ADAL" clId="{C34E2A22-FDC1-4426-9035-4069BE986496}" dt="2024-12-16T01:33:11.815" v="50" actId="20577"/>
+          <ac:chgData name="Matthieu De Mari" userId="dfb708c9-d8dc-439f-9a3b-c772bf4a311c" providerId="ADAL" clId="{81E9B007-0C2C-493E-9B93-55A62C9C1F12}" dt="2025-12-18T22:26:21.436" v="82" actId="27636"/>
           <ac:spMkLst>
             <pc:docMk/>
-            <pc:sldMk cId="2116083586" sldId="786"/>
-            <ac:spMk id="4" creationId="{875DF954-50B0-50B8-B602-A4BADC48B243}"/>
+            <pc:sldMk cId="2678238830" sldId="780"/>
+            <ac:spMk id="4" creationId="{7B27ED01-4B43-7115-3D3C-53FF72E7590A}"/>
           </ac:spMkLst>
         </pc:spChg>
-        <pc:picChg chg="mod modCrop">
-          <ac:chgData name="Matthieu De Mari" userId="dfb708c9-d8dc-439f-9a3b-c772bf4a311c" providerId="ADAL" clId="{C34E2A22-FDC1-4426-9035-4069BE986496}" dt="2024-12-16T01:33:25.608" v="51" actId="732"/>
+        <pc:picChg chg="mod">
+          <ac:chgData name="Matthieu De Mari" userId="dfb708c9-d8dc-439f-9a3b-c772bf4a311c" providerId="ADAL" clId="{81E9B007-0C2C-493E-9B93-55A62C9C1F12}" dt="2025-12-18T22:26:26.279" v="83" actId="14100"/>
           <ac:picMkLst>
             <pc:docMk/>
-            <pc:sldMk cId="2116083586" sldId="786"/>
-            <ac:picMk id="9" creationId="{8EB51A59-EDBF-04FF-A358-04B81894FD97}"/>
+            <pc:sldMk cId="2678238830" sldId="780"/>
+            <ac:picMk id="5" creationId="{F9B5E18C-3841-3FEA-69B5-359FC902D27F}"/>
           </ac:picMkLst>
         </pc:picChg>
       </pc:sldChg>
@@ -2635,7 +423,7 @@
           <a:p>
             <a:fld id="{61478373-EB31-4867-8CF0-FA31364748A5}" type="datetimeFigureOut">
               <a:rPr lang="en-GB" smtClean="0"/>
-              <a:t>16/12/2024</a:t>
+              <a:t>18/12/2025</a:t>
             </a:fld>
             <a:endParaRPr lang="en-GB"/>
           </a:p>
@@ -3052,7 +840,7 @@
           <a:p>
             <a:fld id="{E85DF616-B21E-4EF6-A6A5-95E2FB3EB1A1}" type="datetimeFigureOut">
               <a:rPr lang="en-GB" smtClean="0"/>
-              <a:t>16/12/2024</a:t>
+              <a:t>18/12/2025</a:t>
             </a:fld>
             <a:endParaRPr lang="en-GB"/>
           </a:p>
@@ -3252,7 +1040,7 @@
           <a:p>
             <a:fld id="{E85DF616-B21E-4EF6-A6A5-95E2FB3EB1A1}" type="datetimeFigureOut">
               <a:rPr lang="en-GB" smtClean="0"/>
-              <a:t>16/12/2024</a:t>
+              <a:t>18/12/2025</a:t>
             </a:fld>
             <a:endParaRPr lang="en-GB"/>
           </a:p>
@@ -3462,7 +1250,7 @@
           <a:p>
             <a:fld id="{E85DF616-B21E-4EF6-A6A5-95E2FB3EB1A1}" type="datetimeFigureOut">
               <a:rPr lang="en-GB" smtClean="0"/>
-              <a:t>16/12/2024</a:t>
+              <a:t>18/12/2025</a:t>
             </a:fld>
             <a:endParaRPr lang="en-GB"/>
           </a:p>
@@ -3662,7 +1450,7 @@
           <a:p>
             <a:fld id="{E85DF616-B21E-4EF6-A6A5-95E2FB3EB1A1}" type="datetimeFigureOut">
               <a:rPr lang="en-GB" smtClean="0"/>
-              <a:t>16/12/2024</a:t>
+              <a:t>18/12/2025</a:t>
             </a:fld>
             <a:endParaRPr lang="en-GB"/>
           </a:p>
@@ -3938,7 +1726,7 @@
           <a:p>
             <a:fld id="{E85DF616-B21E-4EF6-A6A5-95E2FB3EB1A1}" type="datetimeFigureOut">
               <a:rPr lang="en-GB" smtClean="0"/>
-              <a:t>16/12/2024</a:t>
+              <a:t>18/12/2025</a:t>
             </a:fld>
             <a:endParaRPr lang="en-GB"/>
           </a:p>
@@ -4206,7 +1994,7 @@
           <a:p>
             <a:fld id="{E85DF616-B21E-4EF6-A6A5-95E2FB3EB1A1}" type="datetimeFigureOut">
               <a:rPr lang="en-GB" smtClean="0"/>
-              <a:t>16/12/2024</a:t>
+              <a:t>18/12/2025</a:t>
             </a:fld>
             <a:endParaRPr lang="en-GB"/>
           </a:p>
@@ -4621,7 +2409,7 @@
           <a:p>
             <a:fld id="{E85DF616-B21E-4EF6-A6A5-95E2FB3EB1A1}" type="datetimeFigureOut">
               <a:rPr lang="en-GB" smtClean="0"/>
-              <a:t>16/12/2024</a:t>
+              <a:t>18/12/2025</a:t>
             </a:fld>
             <a:endParaRPr lang="en-GB"/>
           </a:p>
@@ -4763,7 +2551,7 @@
           <a:p>
             <a:fld id="{E85DF616-B21E-4EF6-A6A5-95E2FB3EB1A1}" type="datetimeFigureOut">
               <a:rPr lang="en-GB" smtClean="0"/>
-              <a:t>16/12/2024</a:t>
+              <a:t>18/12/2025</a:t>
             </a:fld>
             <a:endParaRPr lang="en-GB"/>
           </a:p>
@@ -4876,7 +2664,7 @@
           <a:p>
             <a:fld id="{E85DF616-B21E-4EF6-A6A5-95E2FB3EB1A1}" type="datetimeFigureOut">
               <a:rPr lang="en-GB" smtClean="0"/>
-              <a:t>16/12/2024</a:t>
+              <a:t>18/12/2025</a:t>
             </a:fld>
             <a:endParaRPr lang="en-GB"/>
           </a:p>
@@ -5189,7 +2977,7 @@
           <a:p>
             <a:fld id="{E85DF616-B21E-4EF6-A6A5-95E2FB3EB1A1}" type="datetimeFigureOut">
               <a:rPr lang="en-GB" smtClean="0"/>
-              <a:t>16/12/2024</a:t>
+              <a:t>18/12/2025</a:t>
             </a:fld>
             <a:endParaRPr lang="en-GB"/>
           </a:p>
@@ -5478,7 +3266,7 @@
           <a:p>
             <a:fld id="{E85DF616-B21E-4EF6-A6A5-95E2FB3EB1A1}" type="datetimeFigureOut">
               <a:rPr lang="en-GB" smtClean="0"/>
-              <a:t>16/12/2024</a:t>
+              <a:t>18/12/2025</a:t>
             </a:fld>
             <a:endParaRPr lang="en-GB"/>
           </a:p>
@@ -5721,7 +3509,7 @@
           <a:p>
             <a:fld id="{E85DF616-B21E-4EF6-A6A5-95E2FB3EB1A1}" type="datetimeFigureOut">
               <a:rPr lang="en-GB" smtClean="0"/>
-              <a:t>16/12/2024</a:t>
+              <a:t>18/12/2025</a:t>
             </a:fld>
             <a:endParaRPr lang="en-GB"/>
           </a:p>
@@ -6458,7 +4246,11 @@
               <a:t>The </a:t>
             </a:r>
             <a:r>
-              <a:rPr lang="en-GB" b="1" dirty="0" err="1"/>
+              <a:rPr lang="en-GB" b="1" dirty="0" err="1">
+                <a:solidFill>
+                  <a:srgbClr val="00B050"/>
+                </a:solidFill>
+              </a:rPr>
               <a:t>autograd</a:t>
             </a:r>
             <a:r>
@@ -6480,12 +4272,16 @@
               <a:t>Thanks to </a:t>
             </a:r>
             <a:r>
-              <a:rPr lang="en-GB" b="1" dirty="0" err="1"/>
+              <a:rPr lang="en-GB" b="1" dirty="0" err="1">
+                <a:solidFill>
+                  <a:srgbClr val="00B050"/>
+                </a:solidFill>
+              </a:rPr>
               <a:t>autograd</a:t>
             </a:r>
             <a:r>
               <a:rPr lang="en-GB" b="1" dirty="0"/>
-              <a:t>, we do not need to calculate the gradients for any of our future gradient descent rules, manually again! (yay!)</a:t>
+              <a:t>, we do not need to manually calculate the gradients for any of our future gradient descent rules ever again!</a:t>
             </a:r>
           </a:p>
           <a:p>
@@ -10806,176 +8602,251 @@
           </a:p>
         </p:txBody>
       </p:sp>
-      <p:sp>
-        <p:nvSpPr>
-          <p:cNvPr id="3" name="Content Placeholder 2">
-            <a:extLst>
-              <a:ext uri="{FF2B5EF4-FFF2-40B4-BE49-F238E27FC236}">
-                <a16:creationId xmlns:a16="http://schemas.microsoft.com/office/drawing/2014/main" id="{EDC87932-752D-FABC-76EF-38023409D8D8}"/>
-              </a:ext>
-            </a:extLst>
-          </p:cNvPr>
-          <p:cNvSpPr>
-            <a:spLocks noGrp="1"/>
-          </p:cNvSpPr>
-          <p:nvPr>
-            <p:ph idx="1"/>
-          </p:nvPr>
-        </p:nvSpPr>
-        <p:spPr>
-          <a:xfrm>
-            <a:off x="838200" y="1825624"/>
-            <a:ext cx="10923954" cy="5032375"/>
-          </a:xfrm>
-        </p:spPr>
-        <p:txBody>
-          <a:bodyPr>
-            <a:normAutofit/>
-          </a:bodyPr>
-          <a:lstStyle/>
-          <a:p>
-            <a:pPr marL="0" indent="0">
-              <a:buNone/>
-            </a:pPr>
-            <a:r>
-              <a:rPr lang="en-GB" dirty="0"/>
-              <a:t>Three modifications are to be considered to use </a:t>
-            </a:r>
-            <a:r>
-              <a:rPr lang="en-GB" b="1" dirty="0"/>
-              <a:t>Adam</a:t>
-            </a:r>
-            <a:r>
-              <a:rPr lang="en-GB" dirty="0"/>
-              <a:t> instead of the Vanilla gradient descent rule.</a:t>
-            </a:r>
-            <a:endParaRPr lang="en-SG" dirty="0"/>
-          </a:p>
-          <a:p>
-            <a:r>
-              <a:rPr lang="en-GB" b="1" dirty="0"/>
-              <a:t>Adam</a:t>
-            </a:r>
-            <a:r>
-              <a:rPr lang="en-GB" dirty="0"/>
-              <a:t> will be added as an optimizer object and can be passed to the </a:t>
-            </a:r>
-            <a:r>
-              <a:rPr lang="en-GB" b="1" dirty="0"/>
-              <a:t>train()</a:t>
-            </a:r>
-            <a:r>
-              <a:rPr lang="en-GB" dirty="0"/>
-              <a:t> method. It will simply consist of an additional variable.</a:t>
-            </a:r>
-          </a:p>
-          <a:p>
-            <a:pPr marL="0" indent="0">
-              <a:buNone/>
-            </a:pPr>
-            <a:r>
-              <a:rPr lang="en-GB" i="1" dirty="0"/>
-              <a:t>optimizer = </a:t>
-            </a:r>
-            <a:r>
-              <a:rPr lang="en-GB" i="1" dirty="0" err="1"/>
-              <a:t>torch.optim.Adam</a:t>
-            </a:r>
-            <a:r>
-              <a:rPr lang="en-GB" i="1" dirty="0"/>
-              <a:t>(</a:t>
-            </a:r>
-            <a:r>
-              <a:rPr lang="en-GB" i="1" dirty="0" err="1"/>
-              <a:t>self.parameters</a:t>
-            </a:r>
-            <a:r>
-              <a:rPr lang="en-GB" i="1" dirty="0"/>
-              <a:t>(), </a:t>
-            </a:r>
-            <a:r>
-              <a:rPr lang="en-GB" i="1" dirty="0" err="1"/>
-              <a:t>lr</a:t>
-            </a:r>
-            <a:r>
-              <a:rPr lang="en-GB" i="1" dirty="0"/>
-              <a:t> = alpha,</a:t>
-            </a:r>
-            <a:br>
-              <a:rPr lang="en-GB" i="1" dirty="0"/>
-            </a:br>
-            <a:r>
-              <a:rPr lang="en-GB" i="1" dirty="0"/>
-              <a:t>				         betas = (beta1, beta2), eps = 1e-08)</a:t>
-            </a:r>
-          </a:p>
-          <a:p>
-            <a:r>
-              <a:rPr lang="en-GB" dirty="0"/>
-              <a:t>The</a:t>
-            </a:r>
-            <a:r>
-              <a:rPr lang="en-GB" b="1" dirty="0"/>
-              <a:t> </a:t>
-            </a:r>
-            <a:r>
-              <a:rPr lang="en-GB" b="1" dirty="0" err="1"/>
-              <a:t>optimizer.step</a:t>
-            </a:r>
-            <a:r>
-              <a:rPr lang="en-GB" b="1" dirty="0"/>
-              <a:t>() </a:t>
-            </a:r>
-            <a:r>
-              <a:rPr lang="en-GB" dirty="0"/>
-              <a:t>is used to update the V and S parameters in Adam. </a:t>
-            </a:r>
-            <a:r>
-              <a:rPr lang="en-GB" b="1" dirty="0"/>
-              <a:t>This also realizes the gradient rule update procedure entirely (damn!).</a:t>
-            </a:r>
-          </a:p>
-          <a:p>
-            <a:r>
-              <a:rPr lang="en-GB" dirty="0"/>
-              <a:t>You should remember to </a:t>
-            </a:r>
-            <a:r>
-              <a:rPr lang="en-GB" b="1" dirty="0"/>
-              <a:t>reset gradients in optimizer to 0</a:t>
-            </a:r>
-            <a:r>
-              <a:rPr lang="en-GB" dirty="0"/>
-              <a:t>, like you would in the parameters tensors. The operation </a:t>
-            </a:r>
-            <a:r>
-              <a:rPr lang="en-GB" b="1" dirty="0" err="1"/>
-              <a:t>optimizer.zero_grad</a:t>
-            </a:r>
-            <a:r>
-              <a:rPr lang="en-GB" b="1" dirty="0"/>
-              <a:t>() </a:t>
-            </a:r>
-            <a:r>
-              <a:rPr lang="en-GB" dirty="0"/>
-              <a:t>replaces all four </a:t>
-            </a:r>
-            <a:r>
-              <a:rPr lang="en-GB" b="1" dirty="0" err="1"/>
-              <a:t>self.Xx.grad.zero</a:t>
-            </a:r>
-            <a:r>
-              <a:rPr lang="en-GB" b="1" dirty="0"/>
-              <a:t>_() </a:t>
-            </a:r>
-            <a:r>
-              <a:rPr lang="en-GB" dirty="0"/>
-              <a:t>operations we had earlier!</a:t>
-            </a:r>
-            <a:endParaRPr lang="en-SG" dirty="0"/>
-          </a:p>
-        </p:txBody>
-      </p:sp>
+      <mc:AlternateContent xmlns:mc="http://schemas.openxmlformats.org/markup-compatibility/2006">
+        <mc:Choice xmlns:a14="http://schemas.microsoft.com/office/drawing/2010/main" Requires="a14">
+          <p:sp>
+            <p:nvSpPr>
+              <p:cNvPr id="3" name="Content Placeholder 2">
+                <a:extLst>
+                  <a:ext uri="{FF2B5EF4-FFF2-40B4-BE49-F238E27FC236}">
+                    <a16:creationId xmlns:a16="http://schemas.microsoft.com/office/drawing/2014/main" id="{EDC87932-752D-FABC-76EF-38023409D8D8}"/>
+                  </a:ext>
+                </a:extLst>
+              </p:cNvPr>
+              <p:cNvSpPr>
+                <a:spLocks noGrp="1"/>
+              </p:cNvSpPr>
+              <p:nvPr>
+                <p:ph idx="1"/>
+              </p:nvPr>
+            </p:nvSpPr>
+            <p:spPr>
+              <a:xfrm>
+                <a:off x="838200" y="1825624"/>
+                <a:ext cx="10923954" cy="5032375"/>
+              </a:xfrm>
+            </p:spPr>
+            <p:txBody>
+              <a:bodyPr>
+                <a:normAutofit/>
+              </a:bodyPr>
+              <a:lstStyle/>
+              <a:p>
+                <a:pPr marL="0" indent="0">
+                  <a:buNone/>
+                </a:pPr>
+                <a:r>
+                  <a:rPr lang="en-GB" dirty="0"/>
+                  <a:t>Three modifications are to be considered in order to use </a:t>
+                </a:r>
+                <a:r>
+                  <a:rPr lang="en-GB" b="1" dirty="0"/>
+                  <a:t>Adam</a:t>
+                </a:r>
+                <a:r>
+                  <a:rPr lang="en-GB" dirty="0"/>
+                  <a:t> optimizer instead of the Vanilla gradient descent.</a:t>
+                </a:r>
+                <a:endParaRPr lang="en-SG" dirty="0"/>
+              </a:p>
+              <a:p>
+                <a:r>
+                  <a:rPr lang="en-GB" b="1" dirty="0"/>
+                  <a:t>Adam</a:t>
+                </a:r>
+                <a:r>
+                  <a:rPr lang="en-GB" dirty="0"/>
+                  <a:t> will be added as an optimizer object and can be passed to the </a:t>
+                </a:r>
+                <a:r>
+                  <a:rPr lang="en-GB" b="1" dirty="0"/>
+                  <a:t>train()</a:t>
+                </a:r>
+                <a:r>
+                  <a:rPr lang="en-GB" dirty="0"/>
+                  <a:t> method. It will simply consist of an additional variable.</a:t>
+                </a:r>
+              </a:p>
+              <a:p>
+                <a:pPr marL="0" indent="0">
+                  <a:buNone/>
+                </a:pPr>
+                <a:r>
+                  <a:rPr lang="en-GB" i="1" dirty="0"/>
+                  <a:t>optimizer = </a:t>
+                </a:r>
+                <a:r>
+                  <a:rPr lang="en-GB" i="1" dirty="0" err="1"/>
+                  <a:t>torch.optim.Adam</a:t>
+                </a:r>
+                <a:r>
+                  <a:rPr lang="en-GB" i="1" dirty="0"/>
+                  <a:t>(</a:t>
+                </a:r>
+                <a:r>
+                  <a:rPr lang="en-GB" i="1" dirty="0" err="1"/>
+                  <a:t>self.parameters</a:t>
+                </a:r>
+                <a:r>
+                  <a:rPr lang="en-GB" i="1" dirty="0"/>
+                  <a:t>(), </a:t>
+                </a:r>
+                <a:r>
+                  <a:rPr lang="en-GB" i="1" dirty="0" err="1"/>
+                  <a:t>lr</a:t>
+                </a:r>
+                <a:r>
+                  <a:rPr lang="en-GB" i="1" dirty="0"/>
+                  <a:t> = alpha,</a:t>
+                </a:r>
+                <a:br>
+                  <a:rPr lang="en-GB" i="1" dirty="0"/>
+                </a:br>
+                <a:r>
+                  <a:rPr lang="en-GB" i="1" dirty="0"/>
+                  <a:t>				         betas = (beta1, beta2), eps = 1e-08)</a:t>
+                </a:r>
+              </a:p>
+              <a:p>
+                <a:r>
+                  <a:rPr lang="en-GB" dirty="0"/>
+                  <a:t>The</a:t>
+                </a:r>
+                <a:r>
+                  <a:rPr lang="en-GB" b="1" dirty="0"/>
+                  <a:t> </a:t>
+                </a:r>
+                <a:r>
+                  <a:rPr lang="en-GB" b="1" dirty="0" err="1"/>
+                  <a:t>optimizer.step</a:t>
+                </a:r>
+                <a:r>
+                  <a:rPr lang="en-GB" b="1" dirty="0"/>
+                  <a:t>() </a:t>
+                </a:r>
+                <a:r>
+                  <a:rPr lang="en-GB" dirty="0"/>
+                  <a:t>is used to update the </a:t>
+                </a:r>
+                <a14:m>
+                  <m:oMath xmlns:m="http://schemas.openxmlformats.org/officeDocument/2006/math">
+                    <m:r>
+                      <a:rPr lang="en-GB" i="1" dirty="0" smtClean="0">
+                        <a:latin typeface="Cambria Math" panose="02040503050406030204" pitchFamily="18" charset="0"/>
+                      </a:rPr>
+                      <m:t>𝑉</m:t>
+                    </m:r>
+                  </m:oMath>
+                </a14:m>
+                <a:r>
+                  <a:rPr lang="en-GB" dirty="0"/>
+                  <a:t> and </a:t>
+                </a:r>
+                <a14:m>
+                  <m:oMath xmlns:m="http://schemas.openxmlformats.org/officeDocument/2006/math">
+                    <m:r>
+                      <a:rPr lang="en-GB" i="1" dirty="0" smtClean="0">
+                        <a:latin typeface="Cambria Math" panose="02040503050406030204" pitchFamily="18" charset="0"/>
+                      </a:rPr>
+                      <m:t>𝑆</m:t>
+                    </m:r>
+                  </m:oMath>
+                </a14:m>
+                <a:r>
+                  <a:rPr lang="en-GB" dirty="0"/>
+                  <a:t> parameters in Adam. </a:t>
+                </a:r>
+                <a:r>
+                  <a:rPr lang="en-GB" b="1" dirty="0"/>
+                  <a:t>This also realizes the gradient rule update procedure entirely (damn!).</a:t>
+                </a:r>
+              </a:p>
+              <a:p>
+                <a:r>
+                  <a:rPr lang="en-GB" dirty="0"/>
+                  <a:t>You should remember to </a:t>
+                </a:r>
+                <a:r>
+                  <a:rPr lang="en-GB" b="1" dirty="0"/>
+                  <a:t>reset gradients in optimizer to 0</a:t>
+                </a:r>
+                <a:r>
+                  <a:rPr lang="en-GB" dirty="0"/>
+                  <a:t>, like you would in the parameters tensors. The operation </a:t>
+                </a:r>
+                <a:r>
+                  <a:rPr lang="en-GB" b="1" dirty="0" err="1"/>
+                  <a:t>optimizer.zero_grad</a:t>
+                </a:r>
+                <a:r>
+                  <a:rPr lang="en-GB" b="1" dirty="0"/>
+                  <a:t>() </a:t>
+                </a:r>
+                <a:r>
+                  <a:rPr lang="en-GB" dirty="0"/>
+                  <a:t>replaces all four </a:t>
+                </a:r>
+                <a:r>
+                  <a:rPr lang="en-GB" b="1" dirty="0" err="1"/>
+                  <a:t>self.Xx.grad.zero</a:t>
+                </a:r>
+                <a:r>
+                  <a:rPr lang="en-GB" b="1" dirty="0"/>
+                  <a:t>_() </a:t>
+                </a:r>
+                <a:r>
+                  <a:rPr lang="en-GB" dirty="0"/>
+                  <a:t>operations we had earlier!</a:t>
+                </a:r>
+                <a:endParaRPr lang="en-SG" dirty="0"/>
+              </a:p>
+            </p:txBody>
+          </p:sp>
+        </mc:Choice>
+        <mc:Fallback>
+          <p:sp>
+            <p:nvSpPr>
+              <p:cNvPr id="3" name="Content Placeholder 2">
+                <a:extLst>
+                  <a:ext uri="{FF2B5EF4-FFF2-40B4-BE49-F238E27FC236}">
+                    <a16:creationId xmlns:a16="http://schemas.microsoft.com/office/drawing/2014/main" id="{EDC87932-752D-FABC-76EF-38023409D8D8}"/>
+                  </a:ext>
+                </a:extLst>
+              </p:cNvPr>
+              <p:cNvSpPr>
+                <a:spLocks noGrp="1" noRot="1" noChangeAspect="1" noMove="1" noResize="1" noEditPoints="1" noAdjustHandles="1" noChangeArrowheads="1" noChangeShapeType="1" noTextEdit="1"/>
+              </p:cNvSpPr>
+              <p:nvPr>
+                <p:ph idx="1"/>
+              </p:nvPr>
+            </p:nvSpPr>
+            <p:spPr>
+              <a:xfrm>
+                <a:off x="838200" y="1825624"/>
+                <a:ext cx="10923954" cy="5032375"/>
+              </a:xfrm>
+              <a:blipFill>
+                <a:blip r:embed="rId2"/>
+                <a:stretch>
+                  <a:fillRect l="-1173" t="-1937" r="-670"/>
+                </a:stretch>
+              </a:blipFill>
+            </p:spPr>
+            <p:txBody>
+              <a:bodyPr/>
+              <a:lstStyle/>
+              <a:p>
+                <a:r>
+                  <a:rPr lang="en-GB">
+                    <a:noFill/>
+                  </a:rPr>
+                  <a:t> </a:t>
+                </a:r>
+              </a:p>
+            </p:txBody>
+          </p:sp>
+        </mc:Fallback>
+      </mc:AlternateContent>
     </p:spTree>
     <p:extLst>
       <p:ext uri="{BB962C8B-B14F-4D97-AF65-F5344CB8AC3E}">
@@ -12581,8 +10452,8 @@
         </p:blipFill>
         <p:spPr>
           <a:xfrm>
-            <a:off x="4138137" y="1690688"/>
-            <a:ext cx="8053863" cy="4657063"/>
+            <a:off x="4241260" y="1750318"/>
+            <a:ext cx="7950740" cy="4597433"/>
           </a:xfrm>
           <a:prstGeom prst="rect">
             <a:avLst/>
@@ -12641,12 +10512,12 @@
         <p:spPr>
           <a:xfrm>
             <a:off x="234461" y="1825625"/>
-            <a:ext cx="3856783" cy="4351338"/>
+            <a:ext cx="4006799" cy="4351338"/>
           </a:xfrm>
         </p:spPr>
         <p:txBody>
           <a:bodyPr>
-            <a:normAutofit lnSpcReduction="10000"/>
+            <a:normAutofit/>
           </a:bodyPr>
           <a:lstStyle/>
           <a:p>
@@ -13134,8 +11005,8 @@
           </a:p>
         </p:txBody>
       </p:sp>
-      <mc:AlternateContent xmlns:mc="http://schemas.openxmlformats.org/markup-compatibility/2006">
-        <mc:Choice xmlns:a14="http://schemas.microsoft.com/office/drawing/2010/main" Requires="a14">
+      <mc:AlternateContent xmlns:mc="http://schemas.openxmlformats.org/markup-compatibility/2006" xmlns:a14="http://schemas.microsoft.com/office/drawing/2010/main">
+        <mc:Choice Requires="a14">
           <p:sp>
             <p:nvSpPr>
               <p:cNvPr id="4" name="Content Placeholder 3">
@@ -13268,7 +11139,7 @@
             </p:txBody>
           </p:sp>
         </mc:Choice>
-        <mc:Fallback>
+        <mc:Fallback xmlns="">
           <p:sp>
             <p:nvSpPr>
               <p:cNvPr id="4" name="Content Placeholder 3">
@@ -14052,8 +11923,8 @@
           </a:p>
         </p:txBody>
       </p:sp>
-      <mc:AlternateContent xmlns:mc="http://schemas.openxmlformats.org/markup-compatibility/2006" xmlns:a14="http://schemas.microsoft.com/office/drawing/2010/main">
-        <mc:Choice Requires="a14">
+      <mc:AlternateContent xmlns:mc="http://schemas.openxmlformats.org/markup-compatibility/2006">
+        <mc:Choice xmlns:a14="http://schemas.microsoft.com/office/drawing/2010/main" Requires="a14">
           <p:sp>
             <p:nvSpPr>
               <p:cNvPr id="3" name="Content Placeholder 2">
@@ -14098,7 +11969,11 @@
                   <a:t> extremely powerful is the </a:t>
                 </a:r>
                 <a:r>
-                  <a:rPr lang="en-GB" b="1" dirty="0" err="1"/>
+                  <a:rPr lang="en-GB" b="1" dirty="0" err="1">
+                    <a:solidFill>
+                      <a:srgbClr val="00B050"/>
+                    </a:solidFill>
+                  </a:rPr>
                   <a:t>autograd</a:t>
                 </a:r>
                 <a:r>
@@ -14262,8 +12137,12 @@
                   <a:t>The </a:t>
                 </a:r>
                 <a:r>
-                  <a:rPr lang="en-GB" b="1" dirty="0"/>
-                  <a:t>automatic differentiation </a:t>
+                  <a:rPr lang="en-GB" b="1" dirty="0">
+                    <a:solidFill>
+                      <a:srgbClr val="00B050"/>
+                    </a:solidFill>
+                  </a:rPr>
+                  <a:t>automatic differentiation/gradient computation </a:t>
                 </a:r>
                 <a:r>
                   <a:rPr lang="en-GB" dirty="0"/>
@@ -14348,7 +12227,7 @@
             </p:txBody>
           </p:sp>
         </mc:Choice>
-        <mc:Fallback xmlns="">
+        <mc:Fallback>
           <p:sp>
             <p:nvSpPr>
               <p:cNvPr id="3" name="Content Placeholder 2">
@@ -14382,7 +12261,7 @@
               <a:lstStyle/>
               <a:p>
                 <a:r>
-                  <a:rPr lang="en-SG">
+                  <a:rPr lang="en-GB">
                     <a:noFill/>
                   </a:rPr>
                   <a:t> </a:t>
@@ -15110,8 +12989,8 @@
           </a:p>
         </p:txBody>
       </p:sp>
-      <mc:AlternateContent xmlns:mc="http://schemas.openxmlformats.org/markup-compatibility/2006" xmlns:a14="http://schemas.microsoft.com/office/drawing/2010/main">
-        <mc:Choice Requires="a14">
+      <mc:AlternateContent xmlns:mc="http://schemas.openxmlformats.org/markup-compatibility/2006">
+        <mc:Choice xmlns:a14="http://schemas.microsoft.com/office/drawing/2010/main" Requires="a14">
           <p:sp>
             <p:nvSpPr>
               <p:cNvPr id="11" name="Content Placeholder 10">
@@ -15271,7 +13150,7 @@
               <a:p>
                 <a:r>
                   <a:rPr lang="en-GB" dirty="0"/>
-                  <a:t>And function</a:t>
+                  <a:t>And multi-parameter function</a:t>
                 </a:r>
               </a:p>
               <a:p>
@@ -15610,7 +13489,7 @@
             </p:txBody>
           </p:sp>
         </mc:Choice>
-        <mc:Fallback xmlns="">
+        <mc:Fallback>
           <p:sp>
             <p:nvSpPr>
               <p:cNvPr id="11" name="Content Placeholder 10">

--- a/W3/2. W3S2 final/W3S2.pptx
+++ b/W3/2. W3S2 final/W3S2.pptx
@@ -239,7 +239,7 @@
 <file path=ppt/revisionInfo.xml><?xml version="1.0" encoding="utf-8"?>
 <p1510:revInfo xmlns:a="http://schemas.openxmlformats.org/drawingml/2006/main" xmlns:r="http://schemas.openxmlformats.org/officeDocument/2006/relationships" xmlns:p1510="http://schemas.microsoft.com/office/powerpoint/2015/10/main">
   <p1510:revLst>
-    <p1510:client id="{C7561F6F-100F-4C53-BF2E-4E1318C410DF}" v="3" dt="2025-12-18T22:25:14.215"/>
+    <p1510:client id="{FABB78FB-7C92-4CDC-8C62-AA4800B04067}" v="1" dt="2026-01-12T06:19:00.997"/>
   </p1510:revLst>
 </p1510:revInfo>
 </file>
@@ -249,7 +249,7 @@
   <pc:docChgLst>
     <pc:chgData name="Matthieu De Mari" userId="dfb708c9-d8dc-439f-9a3b-c772bf4a311c" providerId="ADAL" clId="{81E9B007-0C2C-493E-9B93-55A62C9C1F12}"/>
     <pc:docChg chg="custSel modSld">
-      <pc:chgData name="Matthieu De Mari" userId="dfb708c9-d8dc-439f-9a3b-c772bf4a311c" providerId="ADAL" clId="{81E9B007-0C2C-493E-9B93-55A62C9C1F12}" dt="2025-12-18T22:26:26.279" v="83" actId="14100"/>
+      <pc:chgData name="Matthieu De Mari" userId="dfb708c9-d8dc-439f-9a3b-c772bf4a311c" providerId="ADAL" clId="{81E9B007-0C2C-493E-9B93-55A62C9C1F12}" dt="2026-01-12T06:19:00.997" v="84"/>
       <pc:docMkLst>
         <pc:docMk/>
       </pc:docMkLst>
@@ -295,6 +295,21 @@
             <pc:docMk/>
             <pc:sldMk cId="2580175991" sldId="763"/>
             <ac:spMk id="5" creationId="{1A87BA25-5926-816A-6E16-0F90D4B62FB8}"/>
+          </ac:spMkLst>
+        </pc:spChg>
+      </pc:sldChg>
+      <pc:sldChg chg="addSp modSp">
+        <pc:chgData name="Matthieu De Mari" userId="dfb708c9-d8dc-439f-9a3b-c772bf4a311c" providerId="ADAL" clId="{81E9B007-0C2C-493E-9B93-55A62C9C1F12}" dt="2026-01-12T06:19:00.997" v="84"/>
+        <pc:sldMkLst>
+          <pc:docMk/>
+          <pc:sldMk cId="1554669076" sldId="766"/>
+        </pc:sldMkLst>
+        <pc:spChg chg="add mod">
+          <ac:chgData name="Matthieu De Mari" userId="dfb708c9-d8dc-439f-9a3b-c772bf4a311c" providerId="ADAL" clId="{81E9B007-0C2C-493E-9B93-55A62C9C1F12}" dt="2026-01-12T06:19:00.997" v="84"/>
+          <ac:spMkLst>
+            <pc:docMk/>
+            <pc:sldMk cId="1554669076" sldId="766"/>
+            <ac:spMk id="4" creationId="{0835CA2A-B4E8-1215-37A1-0152CE5F42EF}"/>
           </ac:spMkLst>
         </pc:spChg>
       </pc:sldChg>
@@ -423,7 +438,7 @@
           <a:p>
             <a:fld id="{61478373-EB31-4867-8CF0-FA31364748A5}" type="datetimeFigureOut">
               <a:rPr lang="en-GB" smtClean="0"/>
-              <a:t>18/12/2025</a:t>
+              <a:t>12/01/2026</a:t>
             </a:fld>
             <a:endParaRPr lang="en-GB"/>
           </a:p>
@@ -840,7 +855,7 @@
           <a:p>
             <a:fld id="{E85DF616-B21E-4EF6-A6A5-95E2FB3EB1A1}" type="datetimeFigureOut">
               <a:rPr lang="en-GB" smtClean="0"/>
-              <a:t>18/12/2025</a:t>
+              <a:t>12/01/2026</a:t>
             </a:fld>
             <a:endParaRPr lang="en-GB"/>
           </a:p>
@@ -1040,7 +1055,7 @@
           <a:p>
             <a:fld id="{E85DF616-B21E-4EF6-A6A5-95E2FB3EB1A1}" type="datetimeFigureOut">
               <a:rPr lang="en-GB" smtClean="0"/>
-              <a:t>18/12/2025</a:t>
+              <a:t>12/01/2026</a:t>
             </a:fld>
             <a:endParaRPr lang="en-GB"/>
           </a:p>
@@ -1250,7 +1265,7 @@
           <a:p>
             <a:fld id="{E85DF616-B21E-4EF6-A6A5-95E2FB3EB1A1}" type="datetimeFigureOut">
               <a:rPr lang="en-GB" smtClean="0"/>
-              <a:t>18/12/2025</a:t>
+              <a:t>12/01/2026</a:t>
             </a:fld>
             <a:endParaRPr lang="en-GB"/>
           </a:p>
@@ -1450,7 +1465,7 @@
           <a:p>
             <a:fld id="{E85DF616-B21E-4EF6-A6A5-95E2FB3EB1A1}" type="datetimeFigureOut">
               <a:rPr lang="en-GB" smtClean="0"/>
-              <a:t>18/12/2025</a:t>
+              <a:t>12/01/2026</a:t>
             </a:fld>
             <a:endParaRPr lang="en-GB"/>
           </a:p>
@@ -1726,7 +1741,7 @@
           <a:p>
             <a:fld id="{E85DF616-B21E-4EF6-A6A5-95E2FB3EB1A1}" type="datetimeFigureOut">
               <a:rPr lang="en-GB" smtClean="0"/>
-              <a:t>18/12/2025</a:t>
+              <a:t>12/01/2026</a:t>
             </a:fld>
             <a:endParaRPr lang="en-GB"/>
           </a:p>
@@ -1994,7 +2009,7 @@
           <a:p>
             <a:fld id="{E85DF616-B21E-4EF6-A6A5-95E2FB3EB1A1}" type="datetimeFigureOut">
               <a:rPr lang="en-GB" smtClean="0"/>
-              <a:t>18/12/2025</a:t>
+              <a:t>12/01/2026</a:t>
             </a:fld>
             <a:endParaRPr lang="en-GB"/>
           </a:p>
@@ -2409,7 +2424,7 @@
           <a:p>
             <a:fld id="{E85DF616-B21E-4EF6-A6A5-95E2FB3EB1A1}" type="datetimeFigureOut">
               <a:rPr lang="en-GB" smtClean="0"/>
-              <a:t>18/12/2025</a:t>
+              <a:t>12/01/2026</a:t>
             </a:fld>
             <a:endParaRPr lang="en-GB"/>
           </a:p>
@@ -2551,7 +2566,7 @@
           <a:p>
             <a:fld id="{E85DF616-B21E-4EF6-A6A5-95E2FB3EB1A1}" type="datetimeFigureOut">
               <a:rPr lang="en-GB" smtClean="0"/>
-              <a:t>18/12/2025</a:t>
+              <a:t>12/01/2026</a:t>
             </a:fld>
             <a:endParaRPr lang="en-GB"/>
           </a:p>
@@ -2664,7 +2679,7 @@
           <a:p>
             <a:fld id="{E85DF616-B21E-4EF6-A6A5-95E2FB3EB1A1}" type="datetimeFigureOut">
               <a:rPr lang="en-GB" smtClean="0"/>
-              <a:t>18/12/2025</a:t>
+              <a:t>12/01/2026</a:t>
             </a:fld>
             <a:endParaRPr lang="en-GB"/>
           </a:p>
@@ -2977,7 +2992,7 @@
           <a:p>
             <a:fld id="{E85DF616-B21E-4EF6-A6A5-95E2FB3EB1A1}" type="datetimeFigureOut">
               <a:rPr lang="en-GB" smtClean="0"/>
-              <a:t>18/12/2025</a:t>
+              <a:t>12/01/2026</a:t>
             </a:fld>
             <a:endParaRPr lang="en-GB"/>
           </a:p>
@@ -3266,7 +3281,7 @@
           <a:p>
             <a:fld id="{E85DF616-B21E-4EF6-A6A5-95E2FB3EB1A1}" type="datetimeFigureOut">
               <a:rPr lang="en-GB" smtClean="0"/>
-              <a:t>18/12/2025</a:t>
+              <a:t>12/01/2026</a:t>
             </a:fld>
             <a:endParaRPr lang="en-GB"/>
           </a:p>
@@ -3509,7 +3524,7 @@
           <a:p>
             <a:fld id="{E85DF616-B21E-4EF6-A6A5-95E2FB3EB1A1}" type="datetimeFigureOut">
               <a:rPr lang="en-GB" smtClean="0"/>
-              <a:t>18/12/2025</a:t>
+              <a:t>12/01/2026</a:t>
             </a:fld>
             <a:endParaRPr lang="en-GB"/>
           </a:p>
@@ -6241,6 +6256,59 @@
           </a:prstGeom>
         </p:spPr>
       </p:pic>
+      <p:sp>
+        <p:nvSpPr>
+          <p:cNvPr id="4" name="Rectangle 3">
+            <a:extLst>
+              <a:ext uri="{FF2B5EF4-FFF2-40B4-BE49-F238E27FC236}">
+                <a16:creationId xmlns:a16="http://schemas.microsoft.com/office/drawing/2014/main" id="{0835CA2A-B4E8-1215-37A1-0152CE5F42EF}"/>
+              </a:ext>
+            </a:extLst>
+          </p:cNvPr>
+          <p:cNvSpPr/>
+          <p:nvPr/>
+        </p:nvSpPr>
+        <p:spPr>
+          <a:xfrm flipV="1">
+            <a:off x="5683045" y="2208179"/>
+            <a:ext cx="5670755" cy="1124956"/>
+          </a:xfrm>
+          <a:prstGeom prst="rect">
+            <a:avLst/>
+          </a:prstGeom>
+          <a:noFill/>
+          <a:ln w="38100">
+            <a:solidFill>
+              <a:schemeClr val="accent2"/>
+            </a:solidFill>
+            <a:prstDash val="sysDash"/>
+          </a:ln>
+        </p:spPr>
+        <p:style>
+          <a:lnRef idx="2">
+            <a:schemeClr val="accent1">
+              <a:shade val="15000"/>
+            </a:schemeClr>
+          </a:lnRef>
+          <a:fillRef idx="1">
+            <a:schemeClr val="accent1"/>
+          </a:fillRef>
+          <a:effectRef idx="0">
+            <a:schemeClr val="accent1"/>
+          </a:effectRef>
+          <a:fontRef idx="minor">
+            <a:schemeClr val="lt1"/>
+          </a:fontRef>
+        </p:style>
+        <p:txBody>
+          <a:bodyPr rtlCol="0" anchor="ctr"/>
+          <a:lstStyle/>
+          <a:p>
+            <a:pPr algn="ctr"/>
+            <a:endParaRPr lang="en-SG"/>
+          </a:p>
+        </p:txBody>
+      </p:sp>
     </p:spTree>
     <p:extLst>
       <p:ext uri="{BB962C8B-B14F-4D97-AF65-F5344CB8AC3E}">
@@ -8602,8 +8670,8 @@
           </a:p>
         </p:txBody>
       </p:sp>
-      <mc:AlternateContent xmlns:mc="http://schemas.openxmlformats.org/markup-compatibility/2006">
-        <mc:Choice xmlns:a14="http://schemas.microsoft.com/office/drawing/2010/main" Requires="a14">
+      <mc:AlternateContent xmlns:mc="http://schemas.openxmlformats.org/markup-compatibility/2006" xmlns:a14="http://schemas.microsoft.com/office/drawing/2010/main">
+        <mc:Choice Requires="a14">
           <p:sp>
             <p:nvSpPr>
               <p:cNvPr id="3" name="Content Placeholder 2">
@@ -8803,7 +8871,7 @@
             </p:txBody>
           </p:sp>
         </mc:Choice>
-        <mc:Fallback>
+        <mc:Fallback xmlns="">
           <p:sp>
             <p:nvSpPr>
               <p:cNvPr id="3" name="Content Placeholder 2">
@@ -11923,8 +11991,8 @@
           </a:p>
         </p:txBody>
       </p:sp>
-      <mc:AlternateContent xmlns:mc="http://schemas.openxmlformats.org/markup-compatibility/2006">
-        <mc:Choice xmlns:a14="http://schemas.microsoft.com/office/drawing/2010/main" Requires="a14">
+      <mc:AlternateContent xmlns:mc="http://schemas.openxmlformats.org/markup-compatibility/2006" xmlns:a14="http://schemas.microsoft.com/office/drawing/2010/main">
+        <mc:Choice Requires="a14">
           <p:sp>
             <p:nvSpPr>
               <p:cNvPr id="3" name="Content Placeholder 2">
@@ -12227,7 +12295,7 @@
             </p:txBody>
           </p:sp>
         </mc:Choice>
-        <mc:Fallback>
+        <mc:Fallback xmlns="">
           <p:sp>
             <p:nvSpPr>
               <p:cNvPr id="3" name="Content Placeholder 2">
@@ -12989,8 +13057,8 @@
           </a:p>
         </p:txBody>
       </p:sp>
-      <mc:AlternateContent xmlns:mc="http://schemas.openxmlformats.org/markup-compatibility/2006">
-        <mc:Choice xmlns:a14="http://schemas.microsoft.com/office/drawing/2010/main" Requires="a14">
+      <mc:AlternateContent xmlns:mc="http://schemas.openxmlformats.org/markup-compatibility/2006" xmlns:a14="http://schemas.microsoft.com/office/drawing/2010/main">
+        <mc:Choice Requires="a14">
           <p:sp>
             <p:nvSpPr>
               <p:cNvPr id="11" name="Content Placeholder 10">
@@ -13489,7 +13557,7 @@
             </p:txBody>
           </p:sp>
         </mc:Choice>
-        <mc:Fallback>
+        <mc:Fallback xmlns="">
           <p:sp>
             <p:nvSpPr>
               <p:cNvPr id="11" name="Content Placeholder 10">

--- a/W3/2. W3S2 final/W3S2.pptx
+++ b/W3/2. W3S2 final/W3S2.pptx
@@ -236,20 +236,12 @@
 </p:presentation>
 </file>
 
-<file path=ppt/revisionInfo.xml><?xml version="1.0" encoding="utf-8"?>
-<p1510:revInfo xmlns:a="http://schemas.openxmlformats.org/drawingml/2006/main" xmlns:r="http://schemas.openxmlformats.org/officeDocument/2006/relationships" xmlns:p1510="http://schemas.microsoft.com/office/powerpoint/2015/10/main">
-  <p1510:revLst>
-    <p1510:client id="{FABB78FB-7C92-4CDC-8C62-AA4800B04067}" v="1" dt="2026-01-12T06:19:00.997"/>
-  </p1510:revLst>
-</p1510:revInfo>
-</file>
-
 <file path=ppt/changesInfos/changesInfo1.xml><?xml version="1.0" encoding="utf-8"?>
 <pc:chgInfo xmlns:a="http://schemas.openxmlformats.org/drawingml/2006/main" xmlns:r="http://schemas.openxmlformats.org/officeDocument/2006/relationships" xmlns:ac="http://schemas.microsoft.com/office/drawing/2013/main/command" xmlns:pc="http://schemas.microsoft.com/office/powerpoint/2013/main/command">
   <pc:docChgLst>
     <pc:chgData name="Matthieu De Mari" userId="dfb708c9-d8dc-439f-9a3b-c772bf4a311c" providerId="ADAL" clId="{81E9B007-0C2C-493E-9B93-55A62C9C1F12}"/>
-    <pc:docChg chg="custSel modSld">
-      <pc:chgData name="Matthieu De Mari" userId="dfb708c9-d8dc-439f-9a3b-c772bf4a311c" providerId="ADAL" clId="{81E9B007-0C2C-493E-9B93-55A62C9C1F12}" dt="2026-01-12T06:19:00.997" v="84"/>
+    <pc:docChg chg="custSel addSld delSld modSld modSection">
+      <pc:chgData name="Matthieu De Mari" userId="dfb708c9-d8dc-439f-9a3b-c772bf4a311c" providerId="ADAL" clId="{81E9B007-0C2C-493E-9B93-55A62C9C1F12}" dt="2026-01-16T05:46:46.692" v="99" actId="1076"/>
       <pc:docMkLst>
         <pc:docMk/>
       </pc:docMkLst>
@@ -298,14 +290,14 @@
           </ac:spMkLst>
         </pc:spChg>
       </pc:sldChg>
-      <pc:sldChg chg="addSp modSp">
-        <pc:chgData name="Matthieu De Mari" userId="dfb708c9-d8dc-439f-9a3b-c772bf4a311c" providerId="ADAL" clId="{81E9B007-0C2C-493E-9B93-55A62C9C1F12}" dt="2026-01-12T06:19:00.997" v="84"/>
+      <pc:sldChg chg="addSp modSp mod">
+        <pc:chgData name="Matthieu De Mari" userId="dfb708c9-d8dc-439f-9a3b-c772bf4a311c" providerId="ADAL" clId="{81E9B007-0C2C-493E-9B93-55A62C9C1F12}" dt="2026-01-16T05:44:30.611" v="89" actId="14100"/>
         <pc:sldMkLst>
           <pc:docMk/>
           <pc:sldMk cId="1554669076" sldId="766"/>
         </pc:sldMkLst>
         <pc:spChg chg="add mod">
-          <ac:chgData name="Matthieu De Mari" userId="dfb708c9-d8dc-439f-9a3b-c772bf4a311c" providerId="ADAL" clId="{81E9B007-0C2C-493E-9B93-55A62C9C1F12}" dt="2026-01-12T06:19:00.997" v="84"/>
+          <ac:chgData name="Matthieu De Mari" userId="dfb708c9-d8dc-439f-9a3b-c772bf4a311c" providerId="ADAL" clId="{81E9B007-0C2C-493E-9B93-55A62C9C1F12}" dt="2026-01-16T05:44:30.611" v="89" actId="14100"/>
           <ac:spMkLst>
             <pc:docMk/>
             <pc:sldMk cId="1554669076" sldId="766"/>
@@ -327,6 +319,29 @@
             <ac:spMk id="3" creationId="{EDC87932-752D-FABC-76EF-38023409D8D8}"/>
           </ac:spMkLst>
         </pc:spChg>
+      </pc:sldChg>
+      <pc:sldChg chg="addSp modSp mod">
+        <pc:chgData name="Matthieu De Mari" userId="dfb708c9-d8dc-439f-9a3b-c772bf4a311c" providerId="ADAL" clId="{81E9B007-0C2C-493E-9B93-55A62C9C1F12}" dt="2026-01-16T05:46:46.692" v="99" actId="1076"/>
+        <pc:sldMkLst>
+          <pc:docMk/>
+          <pc:sldMk cId="1966383991" sldId="776"/>
+        </pc:sldMkLst>
+        <pc:spChg chg="add">
+          <ac:chgData name="Matthieu De Mari" userId="dfb708c9-d8dc-439f-9a3b-c772bf4a311c" providerId="ADAL" clId="{81E9B007-0C2C-493E-9B93-55A62C9C1F12}" dt="2026-01-16T05:46:44.061" v="98" actId="11529"/>
+          <ac:spMkLst>
+            <pc:docMk/>
+            <pc:sldMk cId="1966383991" sldId="776"/>
+            <ac:spMk id="4" creationId="{84255C81-7190-79B5-D115-60B9D34FDB8B}"/>
+          </ac:spMkLst>
+        </pc:spChg>
+        <pc:picChg chg="add mod">
+          <ac:chgData name="Matthieu De Mari" userId="dfb708c9-d8dc-439f-9a3b-c772bf4a311c" providerId="ADAL" clId="{81E9B007-0C2C-493E-9B93-55A62C9C1F12}" dt="2026-01-16T05:46:46.692" v="99" actId="1076"/>
+          <ac:picMkLst>
+            <pc:docMk/>
+            <pc:sldMk cId="1966383991" sldId="776"/>
+            <ac:picMk id="3" creationId="{DA3B3083-3F34-03B4-56DA-AA68C5E9C209}"/>
+          </ac:picMkLst>
+        </pc:picChg>
       </pc:sldChg>
       <pc:sldChg chg="modSp mod">
         <pc:chgData name="Matthieu De Mari" userId="dfb708c9-d8dc-439f-9a3b-c772bf4a311c" providerId="ADAL" clId="{81E9B007-0C2C-493E-9B93-55A62C9C1F12}" dt="2025-12-18T22:26:26.279" v="83" actId="14100"/>
@@ -350,6 +365,21 @@
             <ac:picMk id="5" creationId="{F9B5E18C-3841-3FEA-69B5-359FC902D27F}"/>
           </ac:picMkLst>
         </pc:picChg>
+      </pc:sldChg>
+      <pc:sldChg chg="modSp add del mod">
+        <pc:chgData name="Matthieu De Mari" userId="dfb708c9-d8dc-439f-9a3b-c772bf4a311c" providerId="ADAL" clId="{81E9B007-0C2C-493E-9B93-55A62C9C1F12}" dt="2026-01-16T05:43:56.180" v="87" actId="47"/>
+        <pc:sldMkLst>
+          <pc:docMk/>
+          <pc:sldMk cId="2290051427" sldId="788"/>
+        </pc:sldMkLst>
+        <pc:spChg chg="mod">
+          <ac:chgData name="Matthieu De Mari" userId="dfb708c9-d8dc-439f-9a3b-c772bf4a311c" providerId="ADAL" clId="{81E9B007-0C2C-493E-9B93-55A62C9C1F12}" dt="2026-01-16T05:43:45.271" v="86" actId="20577"/>
+          <ac:spMkLst>
+            <pc:docMk/>
+            <pc:sldMk cId="2290051427" sldId="788"/>
+            <ac:spMk id="3" creationId="{8D85BC7B-5BA7-E99C-6F69-ADCC4ADC6309}"/>
+          </ac:spMkLst>
+        </pc:spChg>
       </pc:sldChg>
     </pc:docChg>
   </pc:docChgLst>
@@ -438,7 +468,7 @@
           <a:p>
             <a:fld id="{61478373-EB31-4867-8CF0-FA31364748A5}" type="datetimeFigureOut">
               <a:rPr lang="en-GB" smtClean="0"/>
-              <a:t>12/01/2026</a:t>
+              <a:t>16/01/2026</a:t>
             </a:fld>
             <a:endParaRPr lang="en-GB"/>
           </a:p>
@@ -855,7 +885,7 @@
           <a:p>
             <a:fld id="{E85DF616-B21E-4EF6-A6A5-95E2FB3EB1A1}" type="datetimeFigureOut">
               <a:rPr lang="en-GB" smtClean="0"/>
-              <a:t>12/01/2026</a:t>
+              <a:t>16/01/2026</a:t>
             </a:fld>
             <a:endParaRPr lang="en-GB"/>
           </a:p>
@@ -1055,7 +1085,7 @@
           <a:p>
             <a:fld id="{E85DF616-B21E-4EF6-A6A5-95E2FB3EB1A1}" type="datetimeFigureOut">
               <a:rPr lang="en-GB" smtClean="0"/>
-              <a:t>12/01/2026</a:t>
+              <a:t>16/01/2026</a:t>
             </a:fld>
             <a:endParaRPr lang="en-GB"/>
           </a:p>
@@ -1265,7 +1295,7 @@
           <a:p>
             <a:fld id="{E85DF616-B21E-4EF6-A6A5-95E2FB3EB1A1}" type="datetimeFigureOut">
               <a:rPr lang="en-GB" smtClean="0"/>
-              <a:t>12/01/2026</a:t>
+              <a:t>16/01/2026</a:t>
             </a:fld>
             <a:endParaRPr lang="en-GB"/>
           </a:p>
@@ -1465,7 +1495,7 @@
           <a:p>
             <a:fld id="{E85DF616-B21E-4EF6-A6A5-95E2FB3EB1A1}" type="datetimeFigureOut">
               <a:rPr lang="en-GB" smtClean="0"/>
-              <a:t>12/01/2026</a:t>
+              <a:t>16/01/2026</a:t>
             </a:fld>
             <a:endParaRPr lang="en-GB"/>
           </a:p>
@@ -1741,7 +1771,7 @@
           <a:p>
             <a:fld id="{E85DF616-B21E-4EF6-A6A5-95E2FB3EB1A1}" type="datetimeFigureOut">
               <a:rPr lang="en-GB" smtClean="0"/>
-              <a:t>12/01/2026</a:t>
+              <a:t>16/01/2026</a:t>
             </a:fld>
             <a:endParaRPr lang="en-GB"/>
           </a:p>
@@ -2009,7 +2039,7 @@
           <a:p>
             <a:fld id="{E85DF616-B21E-4EF6-A6A5-95E2FB3EB1A1}" type="datetimeFigureOut">
               <a:rPr lang="en-GB" smtClean="0"/>
-              <a:t>12/01/2026</a:t>
+              <a:t>16/01/2026</a:t>
             </a:fld>
             <a:endParaRPr lang="en-GB"/>
           </a:p>
@@ -2424,7 +2454,7 @@
           <a:p>
             <a:fld id="{E85DF616-B21E-4EF6-A6A5-95E2FB3EB1A1}" type="datetimeFigureOut">
               <a:rPr lang="en-GB" smtClean="0"/>
-              <a:t>12/01/2026</a:t>
+              <a:t>16/01/2026</a:t>
             </a:fld>
             <a:endParaRPr lang="en-GB"/>
           </a:p>
@@ -2566,7 +2596,7 @@
           <a:p>
             <a:fld id="{E85DF616-B21E-4EF6-A6A5-95E2FB3EB1A1}" type="datetimeFigureOut">
               <a:rPr lang="en-GB" smtClean="0"/>
-              <a:t>12/01/2026</a:t>
+              <a:t>16/01/2026</a:t>
             </a:fld>
             <a:endParaRPr lang="en-GB"/>
           </a:p>
@@ -2679,7 +2709,7 @@
           <a:p>
             <a:fld id="{E85DF616-B21E-4EF6-A6A5-95E2FB3EB1A1}" type="datetimeFigureOut">
               <a:rPr lang="en-GB" smtClean="0"/>
-              <a:t>12/01/2026</a:t>
+              <a:t>16/01/2026</a:t>
             </a:fld>
             <a:endParaRPr lang="en-GB"/>
           </a:p>
@@ -2992,7 +3022,7 @@
           <a:p>
             <a:fld id="{E85DF616-B21E-4EF6-A6A5-95E2FB3EB1A1}" type="datetimeFigureOut">
               <a:rPr lang="en-GB" smtClean="0"/>
-              <a:t>12/01/2026</a:t>
+              <a:t>16/01/2026</a:t>
             </a:fld>
             <a:endParaRPr lang="en-GB"/>
           </a:p>
@@ -3281,7 +3311,7 @@
           <a:p>
             <a:fld id="{E85DF616-B21E-4EF6-A6A5-95E2FB3EB1A1}" type="datetimeFigureOut">
               <a:rPr lang="en-GB" smtClean="0"/>
-              <a:t>12/01/2026</a:t>
+              <a:t>16/01/2026</a:t>
             </a:fld>
             <a:endParaRPr lang="en-GB"/>
           </a:p>
@@ -3524,7 +3554,7 @@
           <a:p>
             <a:fld id="{E85DF616-B21E-4EF6-A6A5-95E2FB3EB1A1}" type="datetimeFigureOut">
               <a:rPr lang="en-GB" smtClean="0"/>
-              <a:t>12/01/2026</a:t>
+              <a:t>16/01/2026</a:t>
             </a:fld>
             <a:endParaRPr lang="en-GB"/>
           </a:p>
@@ -6270,8 +6300,8 @@
         </p:nvSpPr>
         <p:spPr>
           <a:xfrm flipV="1">
-            <a:off x="5683045" y="2208179"/>
-            <a:ext cx="5670755" cy="1124956"/>
+            <a:off x="5683045" y="947955"/>
+            <a:ext cx="5670755" cy="4026716"/>
           </a:xfrm>
           <a:prstGeom prst="rect">
             <a:avLst/>
@@ -9184,6 +9214,96 @@
           <a:p>
             <a:pPr algn="ctr"/>
             <a:endParaRPr lang="en-SG"/>
+          </a:p>
+        </p:txBody>
+      </p:sp>
+      <p:pic>
+        <p:nvPicPr>
+          <p:cNvPr id="3" name="Picture 2">
+            <a:extLst>
+              <a:ext uri="{FF2B5EF4-FFF2-40B4-BE49-F238E27FC236}">
+                <a16:creationId xmlns:a16="http://schemas.microsoft.com/office/drawing/2014/main" id="{DA3B3083-3F34-03B4-56DA-AA68C5E9C209}"/>
+              </a:ext>
+            </a:extLst>
+          </p:cNvPr>
+          <p:cNvPicPr>
+            <a:picLocks noChangeAspect="1"/>
+          </p:cNvPicPr>
+          <p:nvPr/>
+        </p:nvPicPr>
+        <p:blipFill>
+          <a:blip r:embed="rId3"/>
+          <a:stretch>
+            <a:fillRect/>
+          </a:stretch>
+        </p:blipFill>
+        <p:spPr>
+          <a:xfrm>
+            <a:off x="8374444" y="4180155"/>
+            <a:ext cx="3582903" cy="1770793"/>
+          </a:xfrm>
+          <a:prstGeom prst="rect">
+            <a:avLst/>
+          </a:prstGeom>
+          <a:ln w="38100" cap="sq">
+            <a:solidFill>
+              <a:srgbClr val="000000"/>
+            </a:solidFill>
+            <a:prstDash val="solid"/>
+            <a:miter lim="800000"/>
+          </a:ln>
+          <a:effectLst>
+            <a:outerShdw blurRad="50800" dist="38100" dir="2700000" algn="tl" rotWithShape="0">
+              <a:srgbClr val="000000">
+                <a:alpha val="43000"/>
+              </a:srgbClr>
+            </a:outerShdw>
+          </a:effectLst>
+        </p:spPr>
+      </p:pic>
+      <p:sp>
+        <p:nvSpPr>
+          <p:cNvPr id="4" name="Arrow: Right 3">
+            <a:extLst>
+              <a:ext uri="{FF2B5EF4-FFF2-40B4-BE49-F238E27FC236}">
+                <a16:creationId xmlns:a16="http://schemas.microsoft.com/office/drawing/2014/main" id="{84255C81-7190-79B5-D115-60B9D34FDB8B}"/>
+              </a:ext>
+            </a:extLst>
+          </p:cNvPr>
+          <p:cNvSpPr/>
+          <p:nvPr/>
+        </p:nvSpPr>
+        <p:spPr>
+          <a:xfrm>
+            <a:off x="7667538" y="4751754"/>
+            <a:ext cx="570451" cy="758092"/>
+          </a:xfrm>
+          <a:prstGeom prst="rightArrow">
+            <a:avLst/>
+          </a:prstGeom>
+        </p:spPr>
+        <p:style>
+          <a:lnRef idx="2">
+            <a:schemeClr val="accent1">
+              <a:shade val="15000"/>
+            </a:schemeClr>
+          </a:lnRef>
+          <a:fillRef idx="1">
+            <a:schemeClr val="accent1"/>
+          </a:fillRef>
+          <a:effectRef idx="0">
+            <a:schemeClr val="accent1"/>
+          </a:effectRef>
+          <a:fontRef idx="minor">
+            <a:schemeClr val="lt1"/>
+          </a:fontRef>
+        </p:style>
+        <p:txBody>
+          <a:bodyPr rtlCol="0" anchor="ctr"/>
+          <a:lstStyle/>
+          <a:p>
+            <a:pPr algn="ctr"/>
+            <a:endParaRPr lang="en-GB"/>
           </a:p>
         </p:txBody>
       </p:sp>
